--- a/Advanced Reactor Materials/Fall2026/Lec4_TRISO.pptx
+++ b/Advanced Reactor Materials/Fall2026/Lec4_TRISO.pptx
@@ -5,30 +5,23 @@
     <p:sldMasterId id="2147483684" r:id="rId1"/>
   </p:sldMasterIdLst>
   <p:notesMasterIdLst>
-    <p:notesMasterId r:id="rId23"/>
+    <p:notesMasterId r:id="rId16"/>
   </p:notesMasterIdLst>
   <p:sldIdLst>
     <p:sldId id="256" r:id="rId2"/>
     <p:sldId id="507" r:id="rId3"/>
-    <p:sldId id="462" r:id="rId4"/>
-    <p:sldId id="469" r:id="rId5"/>
-    <p:sldId id="468" r:id="rId6"/>
-    <p:sldId id="477" r:id="rId7"/>
-    <p:sldId id="478" r:id="rId8"/>
-    <p:sldId id="479" r:id="rId9"/>
-    <p:sldId id="480" r:id="rId10"/>
-    <p:sldId id="481" r:id="rId11"/>
-    <p:sldId id="482" r:id="rId12"/>
-    <p:sldId id="483" r:id="rId13"/>
-    <p:sldId id="484" r:id="rId14"/>
-    <p:sldId id="485" r:id="rId15"/>
-    <p:sldId id="486" r:id="rId16"/>
-    <p:sldId id="534" r:id="rId17"/>
-    <p:sldId id="487" r:id="rId18"/>
-    <p:sldId id="488" r:id="rId19"/>
-    <p:sldId id="489" r:id="rId20"/>
-    <p:sldId id="491" r:id="rId21"/>
-    <p:sldId id="490" r:id="rId22"/>
+    <p:sldId id="481" r:id="rId4"/>
+    <p:sldId id="482" r:id="rId5"/>
+    <p:sldId id="483" r:id="rId6"/>
+    <p:sldId id="484" r:id="rId7"/>
+    <p:sldId id="485" r:id="rId8"/>
+    <p:sldId id="486" r:id="rId9"/>
+    <p:sldId id="534" r:id="rId10"/>
+    <p:sldId id="487" r:id="rId11"/>
+    <p:sldId id="488" r:id="rId12"/>
+    <p:sldId id="489" r:id="rId13"/>
+    <p:sldId id="491" r:id="rId14"/>
+    <p:sldId id="490" r:id="rId15"/>
   </p:sldIdLst>
   <p:sldSz cx="12192000" cy="6858000"/>
   <p:notesSz cx="6858000" cy="9144000"/>
@@ -217,7 +210,7 @@
           <a:p>
             <a:fld id="{A32B0241-1142-C84C-9EE2-42E44ABD8DAA}" type="datetimeFigureOut">
               <a:rPr lang="en-US" smtClean="0"/>
-              <a:t>8/26/25</a:t>
+              <a:t>8/19/26</a:t>
             </a:fld>
             <a:endParaRPr lang="en-US"/>
           </a:p>
@@ -672,7 +665,7 @@
             </a:pPr>
             <a:fld id="{7EF8CCA7-042D-4344-9F38-A30A24316FF0}" type="datetime1">
               <a:rPr lang="en-US" smtClean="0"/>
-              <a:t>8/26/25</a:t>
+              <a:t>8/19/26</a:t>
             </a:fld>
             <a:endParaRPr lang="en-US"/>
           </a:p>
@@ -865,7 +858,7 @@
             </a:pPr>
             <a:fld id="{31013E56-4916-404E-AAB2-B4BA03F90FC2}" type="datetime1">
               <a:rPr lang="en-US" smtClean="0"/>
-              <a:t>8/26/25</a:t>
+              <a:t>8/19/26</a:t>
             </a:fld>
             <a:endParaRPr lang="en-US"/>
           </a:p>
@@ -1067,7 +1060,7 @@
             </a:pPr>
             <a:fld id="{81713883-51E5-FD4C-BFE2-284CCAA85938}" type="datetime1">
               <a:rPr lang="en-US" smtClean="0"/>
-              <a:t>8/26/25</a:t>
+              <a:t>8/19/26</a:t>
             </a:fld>
             <a:endParaRPr lang="en-US"/>
           </a:p>
@@ -1269,7 +1262,7 @@
             </a:pPr>
             <a:fld id="{F85CAF1B-B7C8-8347-AE4A-EC343217B68C}" type="datetime1">
               <a:rPr lang="en-US" smtClean="0"/>
-              <a:t>8/26/25</a:t>
+              <a:t>8/19/26</a:t>
             </a:fld>
             <a:endParaRPr lang="en-US"/>
           </a:p>
@@ -1539,7 +1532,7 @@
             </a:pPr>
             <a:fld id="{44FF136D-307A-4941-889F-E9EB8268902E}" type="datetime1">
               <a:rPr lang="en-US" smtClean="0"/>
-              <a:t>8/26/25</a:t>
+              <a:t>8/19/26</a:t>
             </a:fld>
             <a:endParaRPr lang="en-US"/>
           </a:p>
@@ -1853,7 +1846,7 @@
             </a:pPr>
             <a:fld id="{B51F76C3-E96E-A54F-A122-6303A871D871}" type="datetime1">
               <a:rPr lang="en-US" smtClean="0"/>
-              <a:t>8/26/25</a:t>
+              <a:t>8/19/26</a:t>
             </a:fld>
             <a:endParaRPr lang="en-US"/>
           </a:p>
@@ -2172,7 +2165,7 @@
             </a:pPr>
             <a:fld id="{34040392-1101-8A42-BEB5-9592F30E3A91}" type="datetime1">
               <a:rPr lang="en-US" smtClean="0"/>
-              <a:t>8/26/25</a:t>
+              <a:t>8/19/26</a:t>
             </a:fld>
             <a:endParaRPr lang="en-US"/>
           </a:p>
@@ -2317,7 +2310,7 @@
             </a:pPr>
             <a:fld id="{65C72F20-AC2E-6D46-8A6B-0183BC6D49D1}" type="datetime1">
               <a:rPr lang="en-US" smtClean="0"/>
-              <a:t>8/26/25</a:t>
+              <a:t>8/19/26</a:t>
             </a:fld>
             <a:endParaRPr lang="en-US"/>
           </a:p>
@@ -2436,7 +2429,7 @@
             </a:pPr>
             <a:fld id="{36FEA4AC-8DBD-3E4B-B61C-36A721F07D61}" type="datetime1">
               <a:rPr lang="en-US" smtClean="0"/>
-              <a:t>8/26/25</a:t>
+              <a:t>8/19/26</a:t>
             </a:fld>
             <a:endParaRPr lang="en-US"/>
           </a:p>
@@ -2735,7 +2728,7 @@
             </a:pPr>
             <a:fld id="{971BFB7E-23D3-E748-98B9-B9A8C558BBAC}" type="datetime1">
               <a:rPr lang="en-US" smtClean="0"/>
-              <a:t>8/26/25</a:t>
+              <a:t>8/19/26</a:t>
             </a:fld>
             <a:endParaRPr lang="en-US"/>
           </a:p>
@@ -3019,7 +3012,7 @@
             </a:pPr>
             <a:fld id="{C690E0F4-A999-A54E-B545-67F2F70C10FB}" type="datetime1">
               <a:rPr lang="en-US" smtClean="0"/>
-              <a:t>8/26/25</a:t>
+              <a:t>8/19/26</a:t>
             </a:fld>
             <a:endParaRPr lang="en-US"/>
           </a:p>
@@ -3143,14 +3136,14 @@
           </a:ln>
           <a:extLst>
             <a:ext uri="{909E8E84-426E-40dd-AFC4-6F175D3DCCD1}">
-              <a14:hiddenFill xmlns:a14="http://schemas.microsoft.com/office/drawing/2010/main" xmlns="">
+              <a14:hiddenFill xmlns="" xmlns:a14="http://schemas.microsoft.com/office/drawing/2010/main">
                 <a:solidFill>
                   <a:srgbClr val="FFFFFF"/>
                 </a:solidFill>
               </a14:hiddenFill>
             </a:ext>
             <a:ext uri="{91240B29-F687-4f45-9708-019B960494DF}">
-              <a14:hiddenLine xmlns:a14="http://schemas.microsoft.com/office/drawing/2010/main" xmlns="" w="9525">
+              <a14:hiddenLine xmlns="" xmlns:a14="http://schemas.microsoft.com/office/drawing/2010/main" w="9525">
                 <a:solidFill>
                   <a:srgbClr val="000000"/>
                 </a:solidFill>
@@ -3160,7 +3153,7 @@
               </a14:hiddenLine>
             </a:ext>
             <a:ext uri="{FAA26D3D-D897-4be2-8F04-BA451C77F1D7}">
-              <ma14:placeholderFlag xmlns:ma14="http://schemas.microsoft.com/office/mac/drawingml/2011/main" xmlns="" val="1"/>
+              <ma14:placeholderFlag xmlns="" xmlns:ma14="http://schemas.microsoft.com/office/mac/drawingml/2011/main" val="1"/>
             </a:ext>
           </a:extLst>
         </p:spPr>
@@ -3211,14 +3204,14 @@
           </a:ln>
           <a:extLst>
             <a:ext uri="{909E8E84-426E-40dd-AFC4-6F175D3DCCD1}">
-              <a14:hiddenFill xmlns:a14="http://schemas.microsoft.com/office/drawing/2010/main" xmlns="">
+              <a14:hiddenFill xmlns="" xmlns:a14="http://schemas.microsoft.com/office/drawing/2010/main">
                 <a:solidFill>
                   <a:srgbClr val="FFFFFF"/>
                 </a:solidFill>
               </a14:hiddenFill>
             </a:ext>
             <a:ext uri="{91240B29-F687-4f45-9708-019B960494DF}">
-              <a14:hiddenLine xmlns:a14="http://schemas.microsoft.com/office/drawing/2010/main" xmlns="" w="9525">
+              <a14:hiddenLine xmlns="" xmlns:a14="http://schemas.microsoft.com/office/drawing/2010/main" w="9525">
                 <a:solidFill>
                   <a:srgbClr val="000000"/>
                 </a:solidFill>
@@ -3228,7 +3221,7 @@
               </a14:hiddenLine>
             </a:ext>
             <a:ext uri="{FAA26D3D-D897-4be2-8F04-BA451C77F1D7}">
-              <ma14:placeholderFlag xmlns:ma14="http://schemas.microsoft.com/office/mac/drawingml/2011/main" xmlns="" val="1"/>
+              <ma14:placeholderFlag xmlns="" xmlns:ma14="http://schemas.microsoft.com/office/mac/drawingml/2011/main" val="1"/>
             </a:ext>
           </a:extLst>
         </p:spPr>
@@ -3324,7 +3317,7 @@
             </a:pPr>
             <a:fld id="{50A6D047-5534-0641-AA46-5C16F49FBEAF}" type="datetime1">
               <a:rPr lang="en-US" smtClean="0"/>
-              <a:t>8/26/25</a:t>
+              <a:t>8/19/26</a:t>
             </a:fld>
             <a:endParaRPr lang="en-US" dirty="0"/>
           </a:p>
@@ -3945,7 +3938,7 @@
           <a:p>
             <a:r>
               <a:rPr lang="en-US" dirty="0"/>
-              <a:t>Fall 2025</a:t>
+              <a:t>Fall 2026</a:t>
             </a:r>
           </a:p>
           <a:p>
@@ -4026,1860 +4019,6 @@
           <p:cNvPr id="2" name="Title 1">
             <a:extLst>
               <a:ext uri="{FF2B5EF4-FFF2-40B4-BE49-F238E27FC236}">
-                <a16:creationId xmlns:a16="http://schemas.microsoft.com/office/drawing/2014/main" id="{7D15B8A0-BF30-1440-97BD-9FCCBD7373F7}"/>
-              </a:ext>
-            </a:extLst>
-          </p:cNvPr>
-          <p:cNvSpPr>
-            <a:spLocks noGrp="1"/>
-          </p:cNvSpPr>
-          <p:nvPr>
-            <p:ph type="title"/>
-          </p:nvPr>
-        </p:nvSpPr>
-        <p:spPr/>
-        <p:txBody>
-          <a:bodyPr/>
-          <a:lstStyle/>
-          <a:p>
-            <a:r>
-              <a:rPr lang="en-US" dirty="0"/>
-              <a:t>Saturation Swelling in </a:t>
-            </a:r>
-            <a:r>
-              <a:rPr lang="en-US" dirty="0" err="1"/>
-              <a:t>SiC</a:t>
-            </a:r>
-            <a:endParaRPr lang="en-US" dirty="0"/>
-          </a:p>
-        </p:txBody>
-      </p:sp>
-      <p:sp>
-        <p:nvSpPr>
-          <p:cNvPr id="3" name="Content Placeholder 2">
-            <a:extLst>
-              <a:ext uri="{FF2B5EF4-FFF2-40B4-BE49-F238E27FC236}">
-                <a16:creationId xmlns:a16="http://schemas.microsoft.com/office/drawing/2014/main" id="{0C9D6EBB-A39D-884F-B14C-39C6B20CF978}"/>
-              </a:ext>
-            </a:extLst>
-          </p:cNvPr>
-          <p:cNvSpPr>
-            <a:spLocks noGrp="1"/>
-          </p:cNvSpPr>
-          <p:nvPr>
-            <p:ph sz="half" idx="1"/>
-          </p:nvPr>
-        </p:nvSpPr>
-        <p:spPr>
-          <a:xfrm>
-            <a:off x="609599" y="1968503"/>
-            <a:ext cx="5769685" cy="4157663"/>
-          </a:xfrm>
-        </p:spPr>
-        <p:txBody>
-          <a:bodyPr/>
-          <a:lstStyle/>
-          <a:p>
-            <a:r>
-              <a:rPr lang="en-US" sz="2400" dirty="0"/>
-              <a:t>Log swelling vs dose shown at right for CVD </a:t>
-            </a:r>
-            <a:r>
-              <a:rPr lang="en-US" sz="2400" dirty="0" err="1"/>
-              <a:t>SiC</a:t>
-            </a:r>
-            <a:r>
-              <a:rPr lang="en-US" sz="2400" dirty="0"/>
-              <a:t> irradiated in HFIR</a:t>
-            </a:r>
-          </a:p>
-          <a:p>
-            <a:r>
-              <a:rPr lang="en-US" sz="2400" dirty="0"/>
-              <a:t>The swelling of </a:t>
-            </a:r>
-            <a:r>
-              <a:rPr lang="en-US" sz="2400" dirty="0" err="1"/>
-              <a:t>SiC</a:t>
-            </a:r>
-            <a:r>
-              <a:rPr lang="en-US" sz="2400" dirty="0"/>
-              <a:t> is highly temperature dependent</a:t>
-            </a:r>
-          </a:p>
-          <a:p>
-            <a:pPr lvl="1"/>
-            <a:r>
-              <a:rPr lang="en-US" sz="1867" dirty="0"/>
-              <a:t>at 1 dpa, saturation values from 200 C to 800 C vary by a factor of 5</a:t>
-            </a:r>
-          </a:p>
-          <a:p>
-            <a:r>
-              <a:rPr lang="en-US" sz="2400" dirty="0"/>
-              <a:t>The decrease in saturation with increasing T is due to increased recombination of defects</a:t>
-            </a:r>
-          </a:p>
-          <a:p>
-            <a:r>
-              <a:rPr lang="en-US" sz="2400" dirty="0"/>
-              <a:t>Swelling saturates at relatively low doses, less than 10 dpa</a:t>
-            </a:r>
-          </a:p>
-        </p:txBody>
-      </p:sp>
-      <p:pic>
-        <p:nvPicPr>
-          <p:cNvPr id="6" name="Picture 5">
-            <a:extLst>
-              <a:ext uri="{FF2B5EF4-FFF2-40B4-BE49-F238E27FC236}">
-                <a16:creationId xmlns:a16="http://schemas.microsoft.com/office/drawing/2014/main" id="{B841284E-76ED-6C42-A0AC-3A121F12F2BE}"/>
-              </a:ext>
-            </a:extLst>
-          </p:cNvPr>
-          <p:cNvPicPr>
-            <a:picLocks noChangeAspect="1"/>
-          </p:cNvPicPr>
-          <p:nvPr/>
-        </p:nvPicPr>
-        <p:blipFill>
-          <a:blip r:embed="rId2" cstate="email">
-            <a:extLst>
-              <a:ext uri="{28A0092B-C50C-407E-A947-70E740481C1C}">
-                <a14:useLocalDpi xmlns:a14="http://schemas.microsoft.com/office/drawing/2010/main"/>
-              </a:ext>
-            </a:extLst>
-          </a:blip>
-          <a:stretch>
-            <a:fillRect/>
-          </a:stretch>
-        </p:blipFill>
-        <p:spPr>
-          <a:xfrm>
-            <a:off x="7092746" y="5856493"/>
-            <a:ext cx="3835400" cy="850900"/>
-          </a:xfrm>
-          <a:prstGeom prst="rect">
-            <a:avLst/>
-          </a:prstGeom>
-        </p:spPr>
-      </p:pic>
-      <p:pic>
-        <p:nvPicPr>
-          <p:cNvPr id="10" name="Content Placeholder 9">
-            <a:extLst>
-              <a:ext uri="{FF2B5EF4-FFF2-40B4-BE49-F238E27FC236}">
-                <a16:creationId xmlns:a16="http://schemas.microsoft.com/office/drawing/2014/main" id="{79E1832C-7411-3443-9900-A8C2E4757AB8}"/>
-              </a:ext>
-            </a:extLst>
-          </p:cNvPr>
-          <p:cNvPicPr>
-            <a:picLocks noGrp="1" noChangeAspect="1"/>
-          </p:cNvPicPr>
-          <p:nvPr>
-            <p:ph sz="half" idx="2"/>
-          </p:nvPr>
-        </p:nvPicPr>
-        <p:blipFill>
-          <a:blip r:embed="rId3" cstate="email">
-            <a:extLst>
-              <a:ext uri="{28A0092B-C50C-407E-A947-70E740481C1C}">
-                <a14:useLocalDpi xmlns:a14="http://schemas.microsoft.com/office/drawing/2010/main"/>
-              </a:ext>
-            </a:extLst>
-          </a:blip>
-          <a:stretch>
-            <a:fillRect/>
-          </a:stretch>
-        </p:blipFill>
-        <p:spPr>
-          <a:xfrm>
-            <a:off x="7368988" y="1968501"/>
-            <a:ext cx="3342046" cy="3815168"/>
-          </a:xfrm>
-          <a:prstGeom prst="rect">
-            <a:avLst/>
-          </a:prstGeom>
-        </p:spPr>
-      </p:pic>
-      <p:sp>
-        <p:nvSpPr>
-          <p:cNvPr id="4" name="Slide Number Placeholder 3">
-            <a:extLst>
-              <a:ext uri="{FF2B5EF4-FFF2-40B4-BE49-F238E27FC236}">
-                <a16:creationId xmlns:a16="http://schemas.microsoft.com/office/drawing/2014/main" id="{20782E88-0D33-9D41-801A-A4A219FAA716}"/>
-              </a:ext>
-            </a:extLst>
-          </p:cNvPr>
-          <p:cNvSpPr>
-            <a:spLocks noGrp="1"/>
-          </p:cNvSpPr>
-          <p:nvPr>
-            <p:ph type="sldNum" sz="quarter" idx="12"/>
-          </p:nvPr>
-        </p:nvSpPr>
-        <p:spPr/>
-        <p:txBody>
-          <a:bodyPr/>
-          <a:lstStyle/>
-          <a:p>
-            <a:pPr>
-              <a:defRPr/>
-            </a:pPr>
-            <a:fld id="{EC35E9FC-F6D5-0349-BBED-EA7D7A9BC49B}" type="slidenum">
-              <a:rPr lang="en-US" smtClean="0"/>
-              <a:pPr>
-                <a:defRPr/>
-              </a:pPr>
-              <a:t>10</a:t>
-            </a:fld>
-            <a:endParaRPr lang="en-US"/>
-          </a:p>
-        </p:txBody>
-      </p:sp>
-    </p:spTree>
-    <p:extLst>
-      <p:ext uri="{BB962C8B-B14F-4D97-AF65-F5344CB8AC3E}">
-        <p14:creationId xmlns:p14="http://schemas.microsoft.com/office/powerpoint/2010/main" val="222066799"/>
-      </p:ext>
-    </p:extLst>
-  </p:cSld>
-  <p:clrMapOvr>
-    <a:masterClrMapping/>
-  </p:clrMapOvr>
-</p:sld>
-</file>
-
-<file path=ppt/slides/slide11.xml><?xml version="1.0" encoding="utf-8"?>
-<p:sld xmlns:a="http://schemas.openxmlformats.org/drawingml/2006/main" xmlns:r="http://schemas.openxmlformats.org/officeDocument/2006/relationships" xmlns:p="http://schemas.openxmlformats.org/presentationml/2006/main">
-  <p:cSld>
-    <p:spTree>
-      <p:nvGrpSpPr>
-        <p:cNvPr id="1" name=""/>
-        <p:cNvGrpSpPr/>
-        <p:nvPr/>
-      </p:nvGrpSpPr>
-      <p:grpSpPr>
-        <a:xfrm>
-          <a:off x="0" y="0"/>
-          <a:ext cx="0" cy="0"/>
-          <a:chOff x="0" y="0"/>
-          <a:chExt cx="0" cy="0"/>
-        </a:xfrm>
-      </p:grpSpPr>
-      <p:sp>
-        <p:nvSpPr>
-          <p:cNvPr id="2" name="Title 1">
-            <a:extLst>
-              <a:ext uri="{FF2B5EF4-FFF2-40B4-BE49-F238E27FC236}">
-                <a16:creationId xmlns:a16="http://schemas.microsoft.com/office/drawing/2014/main" id="{659957E8-B98C-F044-BD9F-900BAC2054B4}"/>
-              </a:ext>
-            </a:extLst>
-          </p:cNvPr>
-          <p:cNvSpPr>
-            <a:spLocks noGrp="1"/>
-          </p:cNvSpPr>
-          <p:nvPr>
-            <p:ph type="title"/>
-          </p:nvPr>
-        </p:nvSpPr>
-        <p:spPr/>
-        <p:txBody>
-          <a:bodyPr/>
-          <a:lstStyle/>
-          <a:p>
-            <a:r>
-              <a:rPr lang="en-US" dirty="0"/>
-              <a:t>High T Radiation Effects in </a:t>
-            </a:r>
-            <a:r>
-              <a:rPr lang="en-US" dirty="0" err="1"/>
-              <a:t>SiC</a:t>
-            </a:r>
-            <a:endParaRPr lang="en-US" dirty="0"/>
-          </a:p>
-        </p:txBody>
-      </p:sp>
-      <p:sp>
-        <p:nvSpPr>
-          <p:cNvPr id="3" name="Content Placeholder 2">
-            <a:extLst>
-              <a:ext uri="{FF2B5EF4-FFF2-40B4-BE49-F238E27FC236}">
-                <a16:creationId xmlns:a16="http://schemas.microsoft.com/office/drawing/2014/main" id="{880A1D2C-87D7-A84A-BED9-7210B2DFF21B}"/>
-              </a:ext>
-            </a:extLst>
-          </p:cNvPr>
-          <p:cNvSpPr>
-            <a:spLocks noGrp="1"/>
-          </p:cNvSpPr>
-          <p:nvPr>
-            <p:ph sz="half" idx="1"/>
-          </p:nvPr>
-        </p:nvSpPr>
-        <p:spPr>
-          <a:xfrm>
-            <a:off x="609599" y="1968503"/>
-            <a:ext cx="6533479" cy="4157663"/>
-          </a:xfrm>
-        </p:spPr>
-        <p:txBody>
-          <a:bodyPr/>
-          <a:lstStyle/>
-          <a:p>
-            <a:r>
-              <a:rPr lang="en-US" sz="2200" dirty="0"/>
-              <a:t>Above 1000C, Frank loops of the interstitial type become the dominant defects observed by TEM</a:t>
-            </a:r>
-          </a:p>
-          <a:p>
-            <a:r>
-              <a:rPr lang="en-US" sz="2200" dirty="0"/>
-              <a:t>Interstitial Frank loops are faulted, in that they include a stacking fault</a:t>
-            </a:r>
-          </a:p>
-          <a:p>
-            <a:r>
-              <a:rPr lang="en-US" sz="2200" dirty="0"/>
-              <a:t>Consequently, these loops cannot glide and will not move under an applied stress or temperature, and are therefore considered as sessile</a:t>
-            </a:r>
-          </a:p>
-          <a:p>
-            <a:r>
-              <a:rPr lang="en-US" sz="2200" dirty="0"/>
-              <a:t>At high temperature, the development of Frank loops into dislocation networks through unfaulting reactions at high doses is reported</a:t>
-            </a:r>
-          </a:p>
-        </p:txBody>
-      </p:sp>
-      <p:pic>
-        <p:nvPicPr>
-          <p:cNvPr id="5" name="Content Placeholder 4">
-            <a:extLst>
-              <a:ext uri="{FF2B5EF4-FFF2-40B4-BE49-F238E27FC236}">
-                <a16:creationId xmlns:a16="http://schemas.microsoft.com/office/drawing/2014/main" id="{C26003CB-11BC-CE42-8ADA-9D9BD5F78ACA}"/>
-              </a:ext>
-            </a:extLst>
-          </p:cNvPr>
-          <p:cNvPicPr>
-            <a:picLocks noGrp="1" noChangeAspect="1"/>
-          </p:cNvPicPr>
-          <p:nvPr>
-            <p:ph sz="half" idx="2"/>
-          </p:nvPr>
-        </p:nvPicPr>
-        <p:blipFill rotWithShape="1">
-          <a:blip r:embed="rId2" cstate="email">
-            <a:extLst>
-              <a:ext uri="{28A0092B-C50C-407E-A947-70E740481C1C}">
-                <a14:useLocalDpi xmlns:a14="http://schemas.microsoft.com/office/drawing/2010/main"/>
-              </a:ext>
-            </a:extLst>
-          </a:blip>
-          <a:srcRect/>
-          <a:stretch/>
-        </p:blipFill>
-        <p:spPr>
-          <a:xfrm>
-            <a:off x="7957440" y="1968500"/>
-            <a:ext cx="2810598" cy="1908371"/>
-          </a:xfrm>
-          <a:prstGeom prst="rect">
-            <a:avLst/>
-          </a:prstGeom>
-        </p:spPr>
-      </p:pic>
-      <p:pic>
-        <p:nvPicPr>
-          <p:cNvPr id="6" name="Picture 5">
-            <a:extLst>
-              <a:ext uri="{FF2B5EF4-FFF2-40B4-BE49-F238E27FC236}">
-                <a16:creationId xmlns:a16="http://schemas.microsoft.com/office/drawing/2014/main" id="{57F7C259-2E87-BB45-9DF5-516B803A9A0E}"/>
-              </a:ext>
-            </a:extLst>
-          </p:cNvPr>
-          <p:cNvPicPr>
-            <a:picLocks noChangeAspect="1"/>
-          </p:cNvPicPr>
-          <p:nvPr/>
-        </p:nvPicPr>
-        <p:blipFill rotWithShape="1">
-          <a:blip r:embed="rId3" cstate="email">
-            <a:extLst>
-              <a:ext uri="{28A0092B-C50C-407E-A947-70E740481C1C}">
-                <a14:useLocalDpi xmlns:a14="http://schemas.microsoft.com/office/drawing/2010/main"/>
-              </a:ext>
-            </a:extLst>
-          </a:blip>
-          <a:srcRect/>
-          <a:stretch/>
-        </p:blipFill>
-        <p:spPr>
-          <a:xfrm>
-            <a:off x="7779721" y="3876871"/>
-            <a:ext cx="2429286" cy="2620990"/>
-          </a:xfrm>
-          <a:prstGeom prst="rect">
-            <a:avLst/>
-          </a:prstGeom>
-        </p:spPr>
-      </p:pic>
-      <p:sp>
-        <p:nvSpPr>
-          <p:cNvPr id="7" name="TextBox 6">
-            <a:extLst>
-              <a:ext uri="{FF2B5EF4-FFF2-40B4-BE49-F238E27FC236}">
-                <a16:creationId xmlns:a16="http://schemas.microsoft.com/office/drawing/2014/main" id="{8088A641-3ABC-A946-BE15-9A77593E4AFE}"/>
-              </a:ext>
-            </a:extLst>
-          </p:cNvPr>
-          <p:cNvSpPr txBox="1"/>
-          <p:nvPr/>
-        </p:nvSpPr>
-        <p:spPr>
-          <a:xfrm>
-            <a:off x="10424160" y="4593515"/>
-            <a:ext cx="1258645" cy="646331"/>
-          </a:xfrm>
-          <a:prstGeom prst="rect">
-            <a:avLst/>
-          </a:prstGeom>
-          <a:noFill/>
-        </p:spPr>
-        <p:txBody>
-          <a:bodyPr wrap="square" rtlCol="0">
-            <a:spAutoFit/>
-          </a:bodyPr>
-          <a:lstStyle/>
-          <a:p>
-            <a:r>
-              <a:rPr lang="en-US" dirty="0"/>
-              <a:t>Frank loops in Al</a:t>
-            </a:r>
-          </a:p>
-        </p:txBody>
-      </p:sp>
-      <p:sp>
-        <p:nvSpPr>
-          <p:cNvPr id="4" name="Slide Number Placeholder 3">
-            <a:extLst>
-              <a:ext uri="{FF2B5EF4-FFF2-40B4-BE49-F238E27FC236}">
-                <a16:creationId xmlns:a16="http://schemas.microsoft.com/office/drawing/2014/main" id="{B6432E1F-F866-0244-8360-246DAFA3F823}"/>
-              </a:ext>
-            </a:extLst>
-          </p:cNvPr>
-          <p:cNvSpPr>
-            <a:spLocks noGrp="1"/>
-          </p:cNvSpPr>
-          <p:nvPr>
-            <p:ph type="sldNum" sz="quarter" idx="12"/>
-          </p:nvPr>
-        </p:nvSpPr>
-        <p:spPr/>
-        <p:txBody>
-          <a:bodyPr/>
-          <a:lstStyle/>
-          <a:p>
-            <a:pPr>
-              <a:defRPr/>
-            </a:pPr>
-            <a:fld id="{EC35E9FC-F6D5-0349-BBED-EA7D7A9BC49B}" type="slidenum">
-              <a:rPr lang="en-US" smtClean="0"/>
-              <a:pPr>
-                <a:defRPr/>
-              </a:pPr>
-              <a:t>11</a:t>
-            </a:fld>
-            <a:endParaRPr lang="en-US"/>
-          </a:p>
-        </p:txBody>
-      </p:sp>
-    </p:spTree>
-    <p:extLst>
-      <p:ext uri="{BB962C8B-B14F-4D97-AF65-F5344CB8AC3E}">
-        <p14:creationId xmlns:p14="http://schemas.microsoft.com/office/powerpoint/2010/main" val="2410084725"/>
-      </p:ext>
-    </p:extLst>
-  </p:cSld>
-  <p:clrMapOvr>
-    <a:masterClrMapping/>
-  </p:clrMapOvr>
-</p:sld>
-</file>
-
-<file path=ppt/slides/slide12.xml><?xml version="1.0" encoding="utf-8"?>
-<p:sld xmlns:a="http://schemas.openxmlformats.org/drawingml/2006/main" xmlns:r="http://schemas.openxmlformats.org/officeDocument/2006/relationships" xmlns:p="http://schemas.openxmlformats.org/presentationml/2006/main">
-  <p:cSld>
-    <p:spTree>
-      <p:nvGrpSpPr>
-        <p:cNvPr id="1" name=""/>
-        <p:cNvGrpSpPr/>
-        <p:nvPr/>
-      </p:nvGrpSpPr>
-      <p:grpSpPr>
-        <a:xfrm>
-          <a:off x="0" y="0"/>
-          <a:ext cx="0" cy="0"/>
-          <a:chOff x="0" y="0"/>
-          <a:chExt cx="0" cy="0"/>
-        </a:xfrm>
-      </p:grpSpPr>
-      <p:sp>
-        <p:nvSpPr>
-          <p:cNvPr id="2" name="Title 1">
-            <a:extLst>
-              <a:ext uri="{FF2B5EF4-FFF2-40B4-BE49-F238E27FC236}">
-                <a16:creationId xmlns:a16="http://schemas.microsoft.com/office/drawing/2014/main" id="{196D329D-E63E-0349-A476-6CE2C0E0ADD8}"/>
-              </a:ext>
-            </a:extLst>
-          </p:cNvPr>
-          <p:cNvSpPr>
-            <a:spLocks noGrp="1"/>
-          </p:cNvSpPr>
-          <p:nvPr>
-            <p:ph type="title"/>
-          </p:nvPr>
-        </p:nvSpPr>
-        <p:spPr/>
-        <p:txBody>
-          <a:bodyPr/>
-          <a:lstStyle/>
-          <a:p>
-            <a:r>
-              <a:rPr lang="en-US" dirty="0"/>
-              <a:t>High T Radiation Effects in </a:t>
-            </a:r>
-            <a:r>
-              <a:rPr lang="en-US" dirty="0" err="1"/>
-              <a:t>SiC</a:t>
-            </a:r>
-            <a:endParaRPr lang="en-US" dirty="0"/>
-          </a:p>
-        </p:txBody>
-      </p:sp>
-      <p:sp>
-        <p:nvSpPr>
-          <p:cNvPr id="3" name="Content Placeholder 2">
-            <a:extLst>
-              <a:ext uri="{FF2B5EF4-FFF2-40B4-BE49-F238E27FC236}">
-                <a16:creationId xmlns:a16="http://schemas.microsoft.com/office/drawing/2014/main" id="{3359A460-9072-664C-AABE-83BB119ABDEB}"/>
-              </a:ext>
-            </a:extLst>
-          </p:cNvPr>
-          <p:cNvSpPr>
-            <a:spLocks noGrp="1"/>
-          </p:cNvSpPr>
-          <p:nvPr>
-            <p:ph sz="half" idx="1"/>
-          </p:nvPr>
-        </p:nvSpPr>
-        <p:spPr/>
-        <p:txBody>
-          <a:bodyPr/>
-          <a:lstStyle/>
-          <a:p>
-            <a:r>
-              <a:rPr lang="en-US" sz="2400" dirty="0"/>
-              <a:t>The volume associated with dislocation loops in irradiated </a:t>
-            </a:r>
-            <a:r>
-              <a:rPr lang="en-US" sz="2400" dirty="0" err="1"/>
-              <a:t>SiC</a:t>
-            </a:r>
-            <a:r>
-              <a:rPr lang="en-US" sz="2400" dirty="0"/>
-              <a:t> has been estimated to be on the order of 0.1%</a:t>
-            </a:r>
-          </a:p>
-          <a:p>
-            <a:r>
-              <a:rPr lang="en-US" sz="2400" dirty="0"/>
-              <a:t>At high T (greater than about 1250 K) vacancies are sufficiently mobile and vacancy clusters can be formed</a:t>
-            </a:r>
-          </a:p>
-          <a:p>
-            <a:r>
-              <a:rPr lang="en-US" sz="2400" dirty="0"/>
-              <a:t>This high T regime is the void swelling regime</a:t>
-            </a:r>
-          </a:p>
-        </p:txBody>
-      </p:sp>
-      <p:pic>
-        <p:nvPicPr>
-          <p:cNvPr id="5" name="Content Placeholder 4">
-            <a:extLst>
-              <a:ext uri="{FF2B5EF4-FFF2-40B4-BE49-F238E27FC236}">
-                <a16:creationId xmlns:a16="http://schemas.microsoft.com/office/drawing/2014/main" id="{E5790135-67CB-E646-90F9-4856CD5B2572}"/>
-              </a:ext>
-            </a:extLst>
-          </p:cNvPr>
-          <p:cNvPicPr>
-            <a:picLocks noGrp="1" noChangeAspect="1"/>
-          </p:cNvPicPr>
-          <p:nvPr>
-            <p:ph sz="half" idx="2"/>
-          </p:nvPr>
-        </p:nvPicPr>
-        <p:blipFill>
-          <a:blip r:embed="rId2" cstate="email">
-            <a:extLst>
-              <a:ext uri="{28A0092B-C50C-407E-A947-70E740481C1C}">
-                <a14:useLocalDpi xmlns:a14="http://schemas.microsoft.com/office/drawing/2010/main"/>
-              </a:ext>
-            </a:extLst>
-          </a:blip>
-          <a:stretch>
-            <a:fillRect/>
-          </a:stretch>
-        </p:blipFill>
-        <p:spPr>
-          <a:xfrm>
-            <a:off x="6267450" y="2288381"/>
-            <a:ext cx="5245100" cy="3517900"/>
-          </a:xfrm>
-          <a:prstGeom prst="rect">
-            <a:avLst/>
-          </a:prstGeom>
-        </p:spPr>
-      </p:pic>
-      <p:sp>
-        <p:nvSpPr>
-          <p:cNvPr id="6" name="Rectangle 5">
-            <a:extLst>
-              <a:ext uri="{FF2B5EF4-FFF2-40B4-BE49-F238E27FC236}">
-                <a16:creationId xmlns:a16="http://schemas.microsoft.com/office/drawing/2014/main" id="{6BA361B1-3443-C34A-AB65-DC5B2A5A2FE9}"/>
-              </a:ext>
-            </a:extLst>
-          </p:cNvPr>
-          <p:cNvSpPr/>
-          <p:nvPr/>
-        </p:nvSpPr>
-        <p:spPr>
-          <a:xfrm>
-            <a:off x="5822493" y="6126162"/>
-            <a:ext cx="6135013" cy="369332"/>
-          </a:xfrm>
-          <a:prstGeom prst="rect">
-            <a:avLst/>
-          </a:prstGeom>
-        </p:spPr>
-        <p:txBody>
-          <a:bodyPr wrap="none">
-            <a:spAutoFit/>
-          </a:bodyPr>
-          <a:lstStyle/>
-          <a:p>
-            <a:r>
-              <a:rPr lang="en-US" dirty="0">
-                <a:latin typeface="Helvetica" pitchFamily="2" charset="0"/>
-              </a:rPr>
-              <a:t>Evolution of voids in high-temperature irradiated CVD </a:t>
-            </a:r>
-            <a:r>
-              <a:rPr lang="en-US" dirty="0" err="1">
-                <a:latin typeface="Helvetica" pitchFamily="2" charset="0"/>
-              </a:rPr>
-              <a:t>SiC</a:t>
-            </a:r>
-            <a:endParaRPr lang="en-US" dirty="0">
-              <a:effectLst/>
-              <a:latin typeface="Helvetica" pitchFamily="2" charset="0"/>
-            </a:endParaRPr>
-          </a:p>
-        </p:txBody>
-      </p:sp>
-      <p:sp>
-        <p:nvSpPr>
-          <p:cNvPr id="7" name="Rectangle 6">
-            <a:extLst>
-              <a:ext uri="{FF2B5EF4-FFF2-40B4-BE49-F238E27FC236}">
-                <a16:creationId xmlns:a16="http://schemas.microsoft.com/office/drawing/2014/main" id="{A22ED2E6-AE87-6E40-B576-536035F5A1EE}"/>
-              </a:ext>
-            </a:extLst>
-          </p:cNvPr>
-          <p:cNvSpPr/>
-          <p:nvPr/>
-        </p:nvSpPr>
-        <p:spPr>
-          <a:xfrm>
-            <a:off x="6553323" y="3082970"/>
-            <a:ext cx="1225015" cy="261610"/>
-          </a:xfrm>
-          <a:prstGeom prst="rect">
-            <a:avLst/>
-          </a:prstGeom>
-        </p:spPr>
-        <p:txBody>
-          <a:bodyPr wrap="none">
-            <a:spAutoFit/>
-          </a:bodyPr>
-          <a:lstStyle/>
-          <a:p>
-            <a:r>
-              <a:rPr lang="en-US" sz="1100" dirty="0">
-                <a:latin typeface="Helvetica" pitchFamily="2" charset="0"/>
-              </a:rPr>
-              <a:t>1130  C, 1.8 dpa</a:t>
-            </a:r>
-            <a:endParaRPr lang="en-US" sz="1100" dirty="0">
-              <a:effectLst/>
-              <a:latin typeface="Helvetica" pitchFamily="2" charset="0"/>
-            </a:endParaRPr>
-          </a:p>
-        </p:txBody>
-      </p:sp>
-      <p:sp>
-        <p:nvSpPr>
-          <p:cNvPr id="8" name="Rectangle 7">
-            <a:extLst>
-              <a:ext uri="{FF2B5EF4-FFF2-40B4-BE49-F238E27FC236}">
-                <a16:creationId xmlns:a16="http://schemas.microsoft.com/office/drawing/2014/main" id="{7EAFB8A6-2C53-AF49-875E-2D0C6943D6D3}"/>
-              </a:ext>
-            </a:extLst>
-          </p:cNvPr>
-          <p:cNvSpPr/>
-          <p:nvPr/>
-        </p:nvSpPr>
-        <p:spPr>
-          <a:xfrm>
-            <a:off x="8175892" y="3082970"/>
-            <a:ext cx="1225015" cy="261610"/>
-          </a:xfrm>
-          <a:prstGeom prst="rect">
-            <a:avLst/>
-          </a:prstGeom>
-        </p:spPr>
-        <p:txBody>
-          <a:bodyPr wrap="none">
-            <a:spAutoFit/>
-          </a:bodyPr>
-          <a:lstStyle/>
-          <a:p>
-            <a:r>
-              <a:rPr lang="en-US" sz="1100" dirty="0">
-                <a:latin typeface="Helvetica" pitchFamily="2" charset="0"/>
-              </a:rPr>
-              <a:t>1130  C, 8.5 dpa</a:t>
-            </a:r>
-            <a:endParaRPr lang="en-US" sz="1100" dirty="0">
-              <a:effectLst/>
-              <a:latin typeface="Helvetica" pitchFamily="2" charset="0"/>
-            </a:endParaRPr>
-          </a:p>
-        </p:txBody>
-      </p:sp>
-      <p:sp>
-        <p:nvSpPr>
-          <p:cNvPr id="9" name="Rectangle 8">
-            <a:extLst>
-              <a:ext uri="{FF2B5EF4-FFF2-40B4-BE49-F238E27FC236}">
-                <a16:creationId xmlns:a16="http://schemas.microsoft.com/office/drawing/2014/main" id="{505B05CB-08F4-164B-9CDB-622B4A1C45A9}"/>
-              </a:ext>
-            </a:extLst>
-          </p:cNvPr>
-          <p:cNvSpPr/>
-          <p:nvPr/>
-        </p:nvSpPr>
-        <p:spPr>
-          <a:xfrm>
-            <a:off x="10081754" y="3004905"/>
-            <a:ext cx="1225015" cy="261610"/>
-          </a:xfrm>
-          <a:prstGeom prst="rect">
-            <a:avLst/>
-          </a:prstGeom>
-        </p:spPr>
-        <p:txBody>
-          <a:bodyPr wrap="none">
-            <a:spAutoFit/>
-          </a:bodyPr>
-          <a:lstStyle/>
-          <a:p>
-            <a:r>
-              <a:rPr lang="en-US" sz="1100" dirty="0">
-                <a:latin typeface="Helvetica" pitchFamily="2" charset="0"/>
-              </a:rPr>
-              <a:t>1280  C, 5.0 dpa</a:t>
-            </a:r>
-            <a:endParaRPr lang="en-US" sz="1100" dirty="0">
-              <a:effectLst/>
-              <a:latin typeface="Helvetica" pitchFamily="2" charset="0"/>
-            </a:endParaRPr>
-          </a:p>
-        </p:txBody>
-      </p:sp>
-      <p:sp>
-        <p:nvSpPr>
-          <p:cNvPr id="10" name="Rectangle 9">
-            <a:extLst>
-              <a:ext uri="{FF2B5EF4-FFF2-40B4-BE49-F238E27FC236}">
-                <a16:creationId xmlns:a16="http://schemas.microsoft.com/office/drawing/2014/main" id="{5B09F7C5-67CF-8C46-8304-29F7A11B29B2}"/>
-              </a:ext>
-            </a:extLst>
-          </p:cNvPr>
-          <p:cNvSpPr/>
-          <p:nvPr/>
-        </p:nvSpPr>
-        <p:spPr>
-          <a:xfrm>
-            <a:off x="6553322" y="4739648"/>
-            <a:ext cx="1225015" cy="261610"/>
-          </a:xfrm>
-          <a:prstGeom prst="rect">
-            <a:avLst/>
-          </a:prstGeom>
-        </p:spPr>
-        <p:txBody>
-          <a:bodyPr wrap="none">
-            <a:spAutoFit/>
-          </a:bodyPr>
-          <a:lstStyle/>
-          <a:p>
-            <a:r>
-              <a:rPr lang="en-US" sz="1100" dirty="0">
-                <a:latin typeface="Helvetica" pitchFamily="2" charset="0"/>
-              </a:rPr>
-              <a:t>1450  C, 1.8 dpa</a:t>
-            </a:r>
-            <a:endParaRPr lang="en-US" sz="1100" dirty="0">
-              <a:effectLst/>
-              <a:latin typeface="Helvetica" pitchFamily="2" charset="0"/>
-            </a:endParaRPr>
-          </a:p>
-        </p:txBody>
-      </p:sp>
-      <p:sp>
-        <p:nvSpPr>
-          <p:cNvPr id="11" name="Rectangle 10">
-            <a:extLst>
-              <a:ext uri="{FF2B5EF4-FFF2-40B4-BE49-F238E27FC236}">
-                <a16:creationId xmlns:a16="http://schemas.microsoft.com/office/drawing/2014/main" id="{1C0533CC-AE9D-094C-9A17-0C75DC313A49}"/>
-              </a:ext>
-            </a:extLst>
-          </p:cNvPr>
-          <p:cNvSpPr/>
-          <p:nvPr/>
-        </p:nvSpPr>
-        <p:spPr>
-          <a:xfrm>
-            <a:off x="8277491" y="4739648"/>
-            <a:ext cx="1225015" cy="261610"/>
-          </a:xfrm>
-          <a:prstGeom prst="rect">
-            <a:avLst/>
-          </a:prstGeom>
-        </p:spPr>
-        <p:txBody>
-          <a:bodyPr wrap="none">
-            <a:spAutoFit/>
-          </a:bodyPr>
-          <a:lstStyle/>
-          <a:p>
-            <a:r>
-              <a:rPr lang="en-US" sz="1100" dirty="0">
-                <a:latin typeface="Helvetica" pitchFamily="2" charset="0"/>
-              </a:rPr>
-              <a:t>1450  C, 5.0 dpa</a:t>
-            </a:r>
-            <a:endParaRPr lang="en-US" sz="1100" dirty="0">
-              <a:effectLst/>
-              <a:latin typeface="Helvetica" pitchFamily="2" charset="0"/>
-            </a:endParaRPr>
-          </a:p>
-        </p:txBody>
-      </p:sp>
-      <p:sp>
-        <p:nvSpPr>
-          <p:cNvPr id="12" name="Rectangle 11">
-            <a:extLst>
-              <a:ext uri="{FF2B5EF4-FFF2-40B4-BE49-F238E27FC236}">
-                <a16:creationId xmlns:a16="http://schemas.microsoft.com/office/drawing/2014/main" id="{09A8950D-F948-074F-A106-0680561A17E3}"/>
-              </a:ext>
-            </a:extLst>
-          </p:cNvPr>
-          <p:cNvSpPr/>
-          <p:nvPr/>
-        </p:nvSpPr>
-        <p:spPr>
-          <a:xfrm>
-            <a:off x="10081753" y="4739648"/>
-            <a:ext cx="1225015" cy="261610"/>
-          </a:xfrm>
-          <a:prstGeom prst="rect">
-            <a:avLst/>
-          </a:prstGeom>
-        </p:spPr>
-        <p:txBody>
-          <a:bodyPr wrap="none">
-            <a:spAutoFit/>
-          </a:bodyPr>
-          <a:lstStyle/>
-          <a:p>
-            <a:r>
-              <a:rPr lang="en-US" sz="1100" dirty="0">
-                <a:latin typeface="Helvetica" pitchFamily="2" charset="0"/>
-              </a:rPr>
-              <a:t>1450  C, 8.5 dpa</a:t>
-            </a:r>
-            <a:endParaRPr lang="en-US" sz="1100" dirty="0">
-              <a:effectLst/>
-              <a:latin typeface="Helvetica" pitchFamily="2" charset="0"/>
-            </a:endParaRPr>
-          </a:p>
-        </p:txBody>
-      </p:sp>
-      <p:sp>
-        <p:nvSpPr>
-          <p:cNvPr id="4" name="Slide Number Placeholder 3">
-            <a:extLst>
-              <a:ext uri="{FF2B5EF4-FFF2-40B4-BE49-F238E27FC236}">
-                <a16:creationId xmlns:a16="http://schemas.microsoft.com/office/drawing/2014/main" id="{6D25DBD7-A652-2744-9757-49E48B0C731E}"/>
-              </a:ext>
-            </a:extLst>
-          </p:cNvPr>
-          <p:cNvSpPr>
-            <a:spLocks noGrp="1"/>
-          </p:cNvSpPr>
-          <p:nvPr>
-            <p:ph type="sldNum" sz="quarter" idx="12"/>
-          </p:nvPr>
-        </p:nvSpPr>
-        <p:spPr/>
-        <p:txBody>
-          <a:bodyPr/>
-          <a:lstStyle/>
-          <a:p>
-            <a:pPr>
-              <a:defRPr/>
-            </a:pPr>
-            <a:fld id="{EC35E9FC-F6D5-0349-BBED-EA7D7A9BC49B}" type="slidenum">
-              <a:rPr lang="en-US" smtClean="0"/>
-              <a:pPr>
-                <a:defRPr/>
-              </a:pPr>
-              <a:t>12</a:t>
-            </a:fld>
-            <a:endParaRPr lang="en-US"/>
-          </a:p>
-        </p:txBody>
-      </p:sp>
-    </p:spTree>
-    <p:extLst>
-      <p:ext uri="{BB962C8B-B14F-4D97-AF65-F5344CB8AC3E}">
-        <p14:creationId xmlns:p14="http://schemas.microsoft.com/office/powerpoint/2010/main" val="238767562"/>
-      </p:ext>
-    </p:extLst>
-  </p:cSld>
-  <p:clrMapOvr>
-    <a:masterClrMapping/>
-  </p:clrMapOvr>
-</p:sld>
-</file>
-
-<file path=ppt/slides/slide13.xml><?xml version="1.0" encoding="utf-8"?>
-<p:sld xmlns:a="http://schemas.openxmlformats.org/drawingml/2006/main" xmlns:r="http://schemas.openxmlformats.org/officeDocument/2006/relationships" xmlns:p="http://schemas.openxmlformats.org/presentationml/2006/main">
-  <p:cSld>
-    <p:spTree>
-      <p:nvGrpSpPr>
-        <p:cNvPr id="1" name=""/>
-        <p:cNvGrpSpPr/>
-        <p:nvPr/>
-      </p:nvGrpSpPr>
-      <p:grpSpPr>
-        <a:xfrm>
-          <a:off x="0" y="0"/>
-          <a:ext cx="0" cy="0"/>
-          <a:chOff x="0" y="0"/>
-          <a:chExt cx="0" cy="0"/>
-        </a:xfrm>
-      </p:grpSpPr>
-      <p:sp>
-        <p:nvSpPr>
-          <p:cNvPr id="2" name="Title 1">
-            <a:extLst>
-              <a:ext uri="{FF2B5EF4-FFF2-40B4-BE49-F238E27FC236}">
-                <a16:creationId xmlns:a16="http://schemas.microsoft.com/office/drawing/2014/main" id="{3EB8E768-A935-F342-A8D1-4E267FB4C244}"/>
-              </a:ext>
-            </a:extLst>
-          </p:cNvPr>
-          <p:cNvSpPr>
-            <a:spLocks noGrp="1"/>
-          </p:cNvSpPr>
-          <p:nvPr>
-            <p:ph type="title"/>
-          </p:nvPr>
-        </p:nvSpPr>
-        <p:spPr/>
-        <p:txBody>
-          <a:bodyPr/>
-          <a:lstStyle/>
-          <a:p>
-            <a:r>
-              <a:rPr lang="en-US" dirty="0"/>
-              <a:t>Irradiation-Induced Swelling in </a:t>
-            </a:r>
-            <a:r>
-              <a:rPr lang="en-US" dirty="0" err="1"/>
-              <a:t>SiC</a:t>
-            </a:r>
-            <a:endParaRPr lang="en-US" dirty="0"/>
-          </a:p>
-        </p:txBody>
-      </p:sp>
-      <p:sp>
-        <p:nvSpPr>
-          <p:cNvPr id="3" name="Content Placeholder 2">
-            <a:extLst>
-              <a:ext uri="{FF2B5EF4-FFF2-40B4-BE49-F238E27FC236}">
-                <a16:creationId xmlns:a16="http://schemas.microsoft.com/office/drawing/2014/main" id="{EC33DA84-6B86-3845-A6D5-98EB5A1288CD}"/>
-              </a:ext>
-            </a:extLst>
-          </p:cNvPr>
-          <p:cNvSpPr>
-            <a:spLocks noGrp="1"/>
-          </p:cNvSpPr>
-          <p:nvPr>
-            <p:ph sz="half" idx="1"/>
-          </p:nvPr>
-        </p:nvSpPr>
-        <p:spPr>
-          <a:xfrm>
-            <a:off x="609599" y="1968503"/>
-            <a:ext cx="5926851" cy="4157663"/>
-          </a:xfrm>
-        </p:spPr>
-        <p:txBody>
-          <a:bodyPr/>
-          <a:lstStyle/>
-          <a:p>
-            <a:r>
-              <a:rPr lang="en-US" sz="2400" dirty="0"/>
-              <a:t>The transition from point-defect saturated swelling to void swelling occurs above 1000C</a:t>
-            </a:r>
-          </a:p>
-          <a:p>
-            <a:r>
-              <a:rPr lang="en-US" sz="2400" dirty="0"/>
-              <a:t>Void swelling increases as a function of dose, and is not known to saturate</a:t>
-            </a:r>
-          </a:p>
-          <a:p>
-            <a:r>
-              <a:rPr lang="en-US" sz="2400" dirty="0"/>
-              <a:t>The swelling near the critical amorphization temperature is described as the differential strain between point defects or small defect clusters</a:t>
-            </a:r>
-          </a:p>
-          <a:p>
-            <a:endParaRPr lang="en-US" sz="2400" dirty="0"/>
-          </a:p>
-        </p:txBody>
-      </p:sp>
-      <p:pic>
-        <p:nvPicPr>
-          <p:cNvPr id="5" name="Content Placeholder 4">
-            <a:extLst>
-              <a:ext uri="{FF2B5EF4-FFF2-40B4-BE49-F238E27FC236}">
-                <a16:creationId xmlns:a16="http://schemas.microsoft.com/office/drawing/2014/main" id="{0E289562-8E23-8646-9690-FD01D359C181}"/>
-              </a:ext>
-            </a:extLst>
-          </p:cNvPr>
-          <p:cNvPicPr>
-            <a:picLocks noGrp="1" noChangeAspect="1"/>
-          </p:cNvPicPr>
-          <p:nvPr>
-            <p:ph sz="half" idx="2"/>
-          </p:nvPr>
-        </p:nvPicPr>
-        <p:blipFill>
-          <a:blip r:embed="rId2" cstate="email">
-            <a:extLst>
-              <a:ext uri="{28A0092B-C50C-407E-A947-70E740481C1C}">
-                <a14:useLocalDpi xmlns:a14="http://schemas.microsoft.com/office/drawing/2010/main"/>
-              </a:ext>
-            </a:extLst>
-          </a:blip>
-          <a:stretch>
-            <a:fillRect/>
-          </a:stretch>
-        </p:blipFill>
-        <p:spPr>
-          <a:xfrm>
-            <a:off x="6536451" y="1968500"/>
-            <a:ext cx="4707097" cy="4157663"/>
-          </a:xfrm>
-          <a:prstGeom prst="rect">
-            <a:avLst/>
-          </a:prstGeom>
-        </p:spPr>
-      </p:pic>
-      <p:sp>
-        <p:nvSpPr>
-          <p:cNvPr id="4" name="Slide Number Placeholder 3">
-            <a:extLst>
-              <a:ext uri="{FF2B5EF4-FFF2-40B4-BE49-F238E27FC236}">
-                <a16:creationId xmlns:a16="http://schemas.microsoft.com/office/drawing/2014/main" id="{0F3053EA-89D8-044D-BA24-295FF82C9761}"/>
-              </a:ext>
-            </a:extLst>
-          </p:cNvPr>
-          <p:cNvSpPr>
-            <a:spLocks noGrp="1"/>
-          </p:cNvSpPr>
-          <p:nvPr>
-            <p:ph type="sldNum" sz="quarter" idx="12"/>
-          </p:nvPr>
-        </p:nvSpPr>
-        <p:spPr/>
-        <p:txBody>
-          <a:bodyPr/>
-          <a:lstStyle/>
-          <a:p>
-            <a:pPr>
-              <a:defRPr/>
-            </a:pPr>
-            <a:fld id="{EC35E9FC-F6D5-0349-BBED-EA7D7A9BC49B}" type="slidenum">
-              <a:rPr lang="en-US" smtClean="0"/>
-              <a:pPr>
-                <a:defRPr/>
-              </a:pPr>
-              <a:t>13</a:t>
-            </a:fld>
-            <a:endParaRPr lang="en-US"/>
-          </a:p>
-        </p:txBody>
-      </p:sp>
-    </p:spTree>
-    <p:extLst>
-      <p:ext uri="{BB962C8B-B14F-4D97-AF65-F5344CB8AC3E}">
-        <p14:creationId xmlns:p14="http://schemas.microsoft.com/office/powerpoint/2010/main" val="3946535401"/>
-      </p:ext>
-    </p:extLst>
-  </p:cSld>
-  <p:clrMapOvr>
-    <a:masterClrMapping/>
-  </p:clrMapOvr>
-</p:sld>
-</file>
-
-<file path=ppt/slides/slide14.xml><?xml version="1.0" encoding="utf-8"?>
-<p:sld xmlns:a="http://schemas.openxmlformats.org/drawingml/2006/main" xmlns:r="http://schemas.openxmlformats.org/officeDocument/2006/relationships" xmlns:p="http://schemas.openxmlformats.org/presentationml/2006/main">
-  <p:cSld>
-    <p:spTree>
-      <p:nvGrpSpPr>
-        <p:cNvPr id="1" name=""/>
-        <p:cNvGrpSpPr/>
-        <p:nvPr/>
-      </p:nvGrpSpPr>
-      <p:grpSpPr>
-        <a:xfrm>
-          <a:off x="0" y="0"/>
-          <a:ext cx="0" cy="0"/>
-          <a:chOff x="0" y="0"/>
-          <a:chExt cx="0" cy="0"/>
-        </a:xfrm>
-      </p:grpSpPr>
-      <p:sp>
-        <p:nvSpPr>
-          <p:cNvPr id="2" name="Title 1">
-            <a:extLst>
-              <a:ext uri="{FF2B5EF4-FFF2-40B4-BE49-F238E27FC236}">
-                <a16:creationId xmlns:a16="http://schemas.microsoft.com/office/drawing/2014/main" id="{3EB8E768-A935-F342-A8D1-4E267FB4C244}"/>
-              </a:ext>
-            </a:extLst>
-          </p:cNvPr>
-          <p:cNvSpPr>
-            <a:spLocks noGrp="1"/>
-          </p:cNvSpPr>
-          <p:nvPr>
-            <p:ph type="title"/>
-          </p:nvPr>
-        </p:nvSpPr>
-        <p:spPr/>
-        <p:txBody>
-          <a:bodyPr/>
-          <a:lstStyle/>
-          <a:p>
-            <a:r>
-              <a:rPr lang="en-US" dirty="0"/>
-              <a:t>Irradiation-Induced Swelling in </a:t>
-            </a:r>
-            <a:r>
-              <a:rPr lang="en-US" dirty="0" err="1"/>
-              <a:t>SiC</a:t>
-            </a:r>
-            <a:endParaRPr lang="en-US" dirty="0"/>
-          </a:p>
-        </p:txBody>
-      </p:sp>
-      <p:sp>
-        <p:nvSpPr>
-          <p:cNvPr id="3" name="Content Placeholder 2">
-            <a:extLst>
-              <a:ext uri="{FF2B5EF4-FFF2-40B4-BE49-F238E27FC236}">
-                <a16:creationId xmlns:a16="http://schemas.microsoft.com/office/drawing/2014/main" id="{EC33DA84-6B86-3845-A6D5-98EB5A1288CD}"/>
-              </a:ext>
-            </a:extLst>
-          </p:cNvPr>
-          <p:cNvSpPr>
-            <a:spLocks noGrp="1"/>
-          </p:cNvSpPr>
-          <p:nvPr>
-            <p:ph sz="half" idx="1"/>
-          </p:nvPr>
-        </p:nvSpPr>
-        <p:spPr>
-          <a:xfrm>
-            <a:off x="609599" y="1968503"/>
-            <a:ext cx="6017112" cy="4157663"/>
-          </a:xfrm>
-        </p:spPr>
-        <p:txBody>
-          <a:bodyPr/>
-          <a:lstStyle/>
-          <a:p>
-            <a:r>
-              <a:rPr lang="en-US" sz="2200" dirty="0"/>
-              <a:t>Above the critical amorphization temperature, the number of defects surviving recombination is reduced and the mobility of both silicon and carbon interstitials becomes significant</a:t>
-            </a:r>
-          </a:p>
-          <a:p>
-            <a:r>
-              <a:rPr lang="en-US" sz="2200" dirty="0"/>
-              <a:t>Above 1000 C microstructural studies have noted the presence of both Frank loops and tiny voids, indicating limited mobility of vacancies</a:t>
-            </a:r>
-          </a:p>
-          <a:p>
-            <a:r>
-              <a:rPr lang="en-US" sz="2200" dirty="0"/>
-              <a:t>The max irradiation temperature shown is 0.65 </a:t>
-            </a:r>
-            <a:r>
-              <a:rPr lang="en-US" sz="2200" dirty="0" err="1"/>
-              <a:t>T</a:t>
-            </a:r>
-            <a:r>
-              <a:rPr lang="en-US" sz="2200" baseline="-25000" dirty="0" err="1"/>
-              <a:t>melt</a:t>
-            </a:r>
-            <a:endParaRPr lang="en-US" sz="2200" baseline="-25000" dirty="0"/>
-          </a:p>
-        </p:txBody>
-      </p:sp>
-      <p:pic>
-        <p:nvPicPr>
-          <p:cNvPr id="5" name="Content Placeholder 4">
-            <a:extLst>
-              <a:ext uri="{FF2B5EF4-FFF2-40B4-BE49-F238E27FC236}">
-                <a16:creationId xmlns:a16="http://schemas.microsoft.com/office/drawing/2014/main" id="{0E289562-8E23-8646-9690-FD01D359C181}"/>
-              </a:ext>
-            </a:extLst>
-          </p:cNvPr>
-          <p:cNvPicPr>
-            <a:picLocks noGrp="1" noChangeAspect="1"/>
-          </p:cNvPicPr>
-          <p:nvPr>
-            <p:ph sz="half" idx="2"/>
-          </p:nvPr>
-        </p:nvPicPr>
-        <p:blipFill>
-          <a:blip r:embed="rId2" cstate="email">
-            <a:extLst>
-              <a:ext uri="{28A0092B-C50C-407E-A947-70E740481C1C}">
-                <a14:useLocalDpi xmlns:a14="http://schemas.microsoft.com/office/drawing/2010/main"/>
-              </a:ext>
-            </a:extLst>
-          </a:blip>
-          <a:stretch>
-            <a:fillRect/>
-          </a:stretch>
-        </p:blipFill>
-        <p:spPr>
-          <a:xfrm>
-            <a:off x="6536451" y="1968500"/>
-            <a:ext cx="4707097" cy="4157663"/>
-          </a:xfrm>
-          <a:prstGeom prst="rect">
-            <a:avLst/>
-          </a:prstGeom>
-        </p:spPr>
-      </p:pic>
-      <p:sp>
-        <p:nvSpPr>
-          <p:cNvPr id="4" name="Slide Number Placeholder 3">
-            <a:extLst>
-              <a:ext uri="{FF2B5EF4-FFF2-40B4-BE49-F238E27FC236}">
-                <a16:creationId xmlns:a16="http://schemas.microsoft.com/office/drawing/2014/main" id="{98489A4B-F623-2B48-82E5-ED4E36D50C76}"/>
-              </a:ext>
-            </a:extLst>
-          </p:cNvPr>
-          <p:cNvSpPr>
-            <a:spLocks noGrp="1"/>
-          </p:cNvSpPr>
-          <p:nvPr>
-            <p:ph type="sldNum" sz="quarter" idx="12"/>
-          </p:nvPr>
-        </p:nvSpPr>
-        <p:spPr/>
-        <p:txBody>
-          <a:bodyPr/>
-          <a:lstStyle/>
-          <a:p>
-            <a:pPr>
-              <a:defRPr/>
-            </a:pPr>
-            <a:fld id="{EC35E9FC-F6D5-0349-BBED-EA7D7A9BC49B}" type="slidenum">
-              <a:rPr lang="en-US" smtClean="0"/>
-              <a:pPr>
-                <a:defRPr/>
-              </a:pPr>
-              <a:t>14</a:t>
-            </a:fld>
-            <a:endParaRPr lang="en-US"/>
-          </a:p>
-        </p:txBody>
-      </p:sp>
-    </p:spTree>
-    <p:extLst>
-      <p:ext uri="{BB962C8B-B14F-4D97-AF65-F5344CB8AC3E}">
-        <p14:creationId xmlns:p14="http://schemas.microsoft.com/office/powerpoint/2010/main" val="2707072449"/>
-      </p:ext>
-    </p:extLst>
-  </p:cSld>
-  <p:clrMapOvr>
-    <a:masterClrMapping/>
-  </p:clrMapOvr>
-</p:sld>
-</file>
-
-<file path=ppt/slides/slide15.xml><?xml version="1.0" encoding="utf-8"?>
-<p:sld xmlns:a="http://schemas.openxmlformats.org/drawingml/2006/main" xmlns:r="http://schemas.openxmlformats.org/officeDocument/2006/relationships" xmlns:p="http://schemas.openxmlformats.org/presentationml/2006/main">
-  <p:cSld>
-    <p:spTree>
-      <p:nvGrpSpPr>
-        <p:cNvPr id="1" name=""/>
-        <p:cNvGrpSpPr/>
-        <p:nvPr/>
-      </p:nvGrpSpPr>
-      <p:grpSpPr>
-        <a:xfrm>
-          <a:off x="0" y="0"/>
-          <a:ext cx="0" cy="0"/>
-          <a:chOff x="0" y="0"/>
-          <a:chExt cx="0" cy="0"/>
-        </a:xfrm>
-      </p:grpSpPr>
-      <p:sp>
-        <p:nvSpPr>
-          <p:cNvPr id="2" name="Title 1">
-            <a:extLst>
-              <a:ext uri="{FF2B5EF4-FFF2-40B4-BE49-F238E27FC236}">
-                <a16:creationId xmlns:a16="http://schemas.microsoft.com/office/drawing/2014/main" id="{3EB8E768-A935-F342-A8D1-4E267FB4C244}"/>
-              </a:ext>
-            </a:extLst>
-          </p:cNvPr>
-          <p:cNvSpPr>
-            <a:spLocks noGrp="1"/>
-          </p:cNvSpPr>
-          <p:nvPr>
-            <p:ph type="title"/>
-          </p:nvPr>
-        </p:nvSpPr>
-        <p:spPr/>
-        <p:txBody>
-          <a:bodyPr/>
-          <a:lstStyle/>
-          <a:p>
-            <a:r>
-              <a:rPr lang="en-US" dirty="0"/>
-              <a:t>Irradiation-Induced Swelling in </a:t>
-            </a:r>
-            <a:r>
-              <a:rPr lang="en-US" dirty="0" err="1"/>
-              <a:t>SiC</a:t>
-            </a:r>
-            <a:endParaRPr lang="en-US" dirty="0"/>
-          </a:p>
-        </p:txBody>
-      </p:sp>
-      <p:sp>
-        <p:nvSpPr>
-          <p:cNvPr id="3" name="Content Placeholder 2">
-            <a:extLst>
-              <a:ext uri="{FF2B5EF4-FFF2-40B4-BE49-F238E27FC236}">
-                <a16:creationId xmlns:a16="http://schemas.microsoft.com/office/drawing/2014/main" id="{EC33DA84-6B86-3845-A6D5-98EB5A1288CD}"/>
-              </a:ext>
-            </a:extLst>
-          </p:cNvPr>
-          <p:cNvSpPr>
-            <a:spLocks noGrp="1"/>
-          </p:cNvSpPr>
-          <p:nvPr>
-            <p:ph sz="half" idx="1"/>
-          </p:nvPr>
-        </p:nvSpPr>
-        <p:spPr>
-          <a:xfrm>
-            <a:off x="609599" y="1968503"/>
-            <a:ext cx="6017112" cy="4157663"/>
-          </a:xfrm>
-        </p:spPr>
-        <p:txBody>
-          <a:bodyPr/>
-          <a:lstStyle/>
-          <a:p>
-            <a:r>
-              <a:rPr lang="en-US" sz="2200" dirty="0"/>
-              <a:t>In typical </a:t>
-            </a:r>
-            <a:r>
-              <a:rPr lang="en-US" sz="2200" dirty="0" err="1"/>
-              <a:t>fcc</a:t>
-            </a:r>
-            <a:r>
-              <a:rPr lang="en-US" sz="2200" dirty="0"/>
-              <a:t> metal systems void swelling typically begins at ~0.35Tm, goes through a maximum value, and decreases to nil swelling by ~0.55Tm</a:t>
-            </a:r>
-          </a:p>
-          <a:p>
-            <a:r>
-              <a:rPr lang="en-US" sz="2200" dirty="0"/>
-              <a:t>The voids in </a:t>
-            </a:r>
-            <a:r>
-              <a:rPr lang="en-US" sz="2200" dirty="0" err="1"/>
-              <a:t>SiC</a:t>
-            </a:r>
-            <a:r>
-              <a:rPr lang="en-US" sz="2200" dirty="0"/>
-              <a:t> are continuing to grow in </a:t>
-            </a:r>
-            <a:r>
-              <a:rPr lang="en-US" sz="2200" dirty="0" err="1"/>
-              <a:t>SiC</a:t>
-            </a:r>
-            <a:r>
-              <a:rPr lang="en-US" sz="2200" dirty="0"/>
-              <a:t> irradiated to 1773 K, thus the energies for diffusion of either the Si or C vacancy or both must be quite high</a:t>
-            </a:r>
-          </a:p>
-          <a:p>
-            <a:r>
-              <a:rPr lang="en-US" sz="2200" dirty="0"/>
-              <a:t>This has been confirmed through DFT methods</a:t>
-            </a:r>
-          </a:p>
-          <a:p>
-            <a:r>
-              <a:rPr lang="en-US" sz="2200" dirty="0"/>
-              <a:t>It is unclear how swelling will increase as a function of dose above 10 dpa</a:t>
-            </a:r>
-          </a:p>
-          <a:p>
-            <a:endParaRPr lang="en-US" sz="2200" dirty="0"/>
-          </a:p>
-          <a:p>
-            <a:endParaRPr lang="en-US" sz="2200" dirty="0"/>
-          </a:p>
-          <a:p>
-            <a:endParaRPr lang="en-US" sz="2200" dirty="0"/>
-          </a:p>
-          <a:p>
-            <a:endParaRPr lang="en-US" sz="2200" dirty="0"/>
-          </a:p>
-          <a:p>
-            <a:endParaRPr lang="en-US" sz="2200" dirty="0"/>
-          </a:p>
-        </p:txBody>
-      </p:sp>
-      <p:pic>
-        <p:nvPicPr>
-          <p:cNvPr id="5" name="Content Placeholder 4">
-            <a:extLst>
-              <a:ext uri="{FF2B5EF4-FFF2-40B4-BE49-F238E27FC236}">
-                <a16:creationId xmlns:a16="http://schemas.microsoft.com/office/drawing/2014/main" id="{0E289562-8E23-8646-9690-FD01D359C181}"/>
-              </a:ext>
-            </a:extLst>
-          </p:cNvPr>
-          <p:cNvPicPr>
-            <a:picLocks noGrp="1" noChangeAspect="1"/>
-          </p:cNvPicPr>
-          <p:nvPr>
-            <p:ph sz="half" idx="2"/>
-          </p:nvPr>
-        </p:nvPicPr>
-        <p:blipFill>
-          <a:blip r:embed="rId2" cstate="email">
-            <a:extLst>
-              <a:ext uri="{28A0092B-C50C-407E-A947-70E740481C1C}">
-                <a14:useLocalDpi xmlns:a14="http://schemas.microsoft.com/office/drawing/2010/main"/>
-              </a:ext>
-            </a:extLst>
-          </a:blip>
-          <a:stretch>
-            <a:fillRect/>
-          </a:stretch>
-        </p:blipFill>
-        <p:spPr>
-          <a:xfrm>
-            <a:off x="6536451" y="1968500"/>
-            <a:ext cx="4707097" cy="4157663"/>
-          </a:xfrm>
-          <a:prstGeom prst="rect">
-            <a:avLst/>
-          </a:prstGeom>
-        </p:spPr>
-      </p:pic>
-      <p:sp>
-        <p:nvSpPr>
-          <p:cNvPr id="4" name="Slide Number Placeholder 3">
-            <a:extLst>
-              <a:ext uri="{FF2B5EF4-FFF2-40B4-BE49-F238E27FC236}">
-                <a16:creationId xmlns:a16="http://schemas.microsoft.com/office/drawing/2014/main" id="{1D24B6BE-B35F-E044-B8DC-C2678633E4A3}"/>
-              </a:ext>
-            </a:extLst>
-          </p:cNvPr>
-          <p:cNvSpPr>
-            <a:spLocks noGrp="1"/>
-          </p:cNvSpPr>
-          <p:nvPr>
-            <p:ph type="sldNum" sz="quarter" idx="12"/>
-          </p:nvPr>
-        </p:nvSpPr>
-        <p:spPr/>
-        <p:txBody>
-          <a:bodyPr/>
-          <a:lstStyle/>
-          <a:p>
-            <a:pPr>
-              <a:defRPr/>
-            </a:pPr>
-            <a:fld id="{EC35E9FC-F6D5-0349-BBED-EA7D7A9BC49B}" type="slidenum">
-              <a:rPr lang="en-US" smtClean="0"/>
-              <a:pPr>
-                <a:defRPr/>
-              </a:pPr>
-              <a:t>15</a:t>
-            </a:fld>
-            <a:endParaRPr lang="en-US"/>
-          </a:p>
-        </p:txBody>
-      </p:sp>
-    </p:spTree>
-    <p:extLst>
-      <p:ext uri="{BB962C8B-B14F-4D97-AF65-F5344CB8AC3E}">
-        <p14:creationId xmlns:p14="http://schemas.microsoft.com/office/powerpoint/2010/main" val="3503524009"/>
-      </p:ext>
-    </p:extLst>
-  </p:cSld>
-  <p:clrMapOvr>
-    <a:masterClrMapping/>
-  </p:clrMapOvr>
-</p:sld>
-</file>
-
-<file path=ppt/slides/slide16.xml><?xml version="1.0" encoding="utf-8"?>
-<p:sld xmlns:a="http://schemas.openxmlformats.org/drawingml/2006/main" xmlns:r="http://schemas.openxmlformats.org/officeDocument/2006/relationships" xmlns:p="http://schemas.openxmlformats.org/presentationml/2006/main">
-  <p:cSld>
-    <p:spTree>
-      <p:nvGrpSpPr>
-        <p:cNvPr id="1" name=""/>
-        <p:cNvGrpSpPr/>
-        <p:nvPr/>
-      </p:nvGrpSpPr>
-      <p:grpSpPr>
-        <a:xfrm>
-          <a:off x="0" y="0"/>
-          <a:ext cx="0" cy="0"/>
-          <a:chOff x="0" y="0"/>
-          <a:chExt cx="0" cy="0"/>
-        </a:xfrm>
-      </p:grpSpPr>
-      <p:sp>
-        <p:nvSpPr>
-          <p:cNvPr id="2" name="Title 1">
-            <a:extLst>
-              <a:ext uri="{FF2B5EF4-FFF2-40B4-BE49-F238E27FC236}">
-                <a16:creationId xmlns:a16="http://schemas.microsoft.com/office/drawing/2014/main" id="{BAB7FA9A-E401-F253-8DF3-5762FE1AF53C}"/>
-              </a:ext>
-            </a:extLst>
-          </p:cNvPr>
-          <p:cNvSpPr>
-            <a:spLocks noGrp="1"/>
-          </p:cNvSpPr>
-          <p:nvPr>
-            <p:ph type="title"/>
-          </p:nvPr>
-        </p:nvSpPr>
-        <p:spPr/>
-        <p:txBody>
-          <a:bodyPr/>
-          <a:lstStyle/>
-          <a:p>
-            <a:r>
-              <a:rPr lang="en-US" dirty="0"/>
-              <a:t>Recap of </a:t>
-            </a:r>
-            <a:r>
-              <a:rPr lang="en-US" dirty="0" err="1"/>
-              <a:t>SiC</a:t>
-            </a:r>
-            <a:r>
-              <a:rPr lang="en-US" dirty="0"/>
-              <a:t> Irradiation Defects</a:t>
-            </a:r>
-          </a:p>
-        </p:txBody>
-      </p:sp>
-      <p:sp>
-        <p:nvSpPr>
-          <p:cNvPr id="3" name="Content Placeholder 2">
-            <a:extLst>
-              <a:ext uri="{FF2B5EF4-FFF2-40B4-BE49-F238E27FC236}">
-                <a16:creationId xmlns:a16="http://schemas.microsoft.com/office/drawing/2014/main" id="{833824CF-753B-70CB-5C02-C7939F761D1A}"/>
-              </a:ext>
-            </a:extLst>
-          </p:cNvPr>
-          <p:cNvSpPr>
-            <a:spLocks noGrp="1"/>
-          </p:cNvSpPr>
-          <p:nvPr>
-            <p:ph sz="half" idx="1"/>
-          </p:nvPr>
-        </p:nvSpPr>
-        <p:spPr>
-          <a:xfrm>
-            <a:off x="609599" y="1968503"/>
-            <a:ext cx="8057361" cy="4157663"/>
-          </a:xfrm>
-        </p:spPr>
-        <p:txBody>
-          <a:bodyPr/>
-          <a:lstStyle/>
-          <a:p>
-            <a:r>
-              <a:rPr lang="en-US" dirty="0"/>
-              <a:t>below 423 K, </a:t>
-            </a:r>
-            <a:r>
-              <a:rPr lang="en-US" dirty="0" err="1"/>
-              <a:t>SiC</a:t>
-            </a:r>
-            <a:r>
-              <a:rPr lang="en-US" dirty="0"/>
-              <a:t> can amorphize, can have fairly high swelling rates</a:t>
-            </a:r>
-          </a:p>
-          <a:p>
-            <a:r>
-              <a:rPr lang="en-US" dirty="0"/>
-              <a:t>at 423-1273 K, point defect swelling regime</a:t>
-            </a:r>
-          </a:p>
-          <a:p>
-            <a:pPr lvl="1"/>
-            <a:r>
-              <a:rPr lang="en-US" sz="2400" dirty="0"/>
-              <a:t>black spot defects are the main types of defects</a:t>
-            </a:r>
-          </a:p>
-          <a:p>
-            <a:pPr lvl="1"/>
-            <a:r>
-              <a:rPr lang="en-US" sz="2400" dirty="0"/>
-              <a:t>cause swelling which saturates, the level of which is inversely proportional to T</a:t>
-            </a:r>
-          </a:p>
-          <a:p>
-            <a:r>
-              <a:rPr lang="en-US" dirty="0"/>
-              <a:t>above 1273 K, we get Frank loops and voids</a:t>
-            </a:r>
-          </a:p>
-          <a:p>
-            <a:pPr lvl="1"/>
-            <a:r>
-              <a:rPr lang="en-US" sz="2400" dirty="0"/>
-              <a:t>void swelling regime</a:t>
-            </a:r>
-          </a:p>
-          <a:p>
-            <a:pPr lvl="1"/>
-            <a:r>
-              <a:rPr lang="en-US" sz="2400" dirty="0"/>
-              <a:t>does not saturate, increases with dose and with T</a:t>
-            </a:r>
-          </a:p>
-        </p:txBody>
-      </p:sp>
-      <p:sp>
-        <p:nvSpPr>
-          <p:cNvPr id="5" name="Slide Number Placeholder 4">
-            <a:extLst>
-              <a:ext uri="{FF2B5EF4-FFF2-40B4-BE49-F238E27FC236}">
-                <a16:creationId xmlns:a16="http://schemas.microsoft.com/office/drawing/2014/main" id="{A1A33A1E-ECD6-ACE4-AAEB-5534F9A5F62F}"/>
-              </a:ext>
-            </a:extLst>
-          </p:cNvPr>
-          <p:cNvSpPr>
-            <a:spLocks noGrp="1"/>
-          </p:cNvSpPr>
-          <p:nvPr>
-            <p:ph type="sldNum" sz="quarter" idx="12"/>
-          </p:nvPr>
-        </p:nvSpPr>
-        <p:spPr/>
-        <p:txBody>
-          <a:bodyPr/>
-          <a:lstStyle/>
-          <a:p>
-            <a:pPr>
-              <a:defRPr/>
-            </a:pPr>
-            <a:fld id="{EC35E9FC-F6D5-0349-BBED-EA7D7A9BC49B}" type="slidenum">
-              <a:rPr lang="en-US" smtClean="0"/>
-              <a:pPr>
-                <a:defRPr/>
-              </a:pPr>
-              <a:t>16</a:t>
-            </a:fld>
-            <a:endParaRPr lang="en-US"/>
-          </a:p>
-        </p:txBody>
-      </p:sp>
-      <p:pic>
-        <p:nvPicPr>
-          <p:cNvPr id="6" name="Content Placeholder 4">
-            <a:extLst>
-              <a:ext uri="{FF2B5EF4-FFF2-40B4-BE49-F238E27FC236}">
-                <a16:creationId xmlns:a16="http://schemas.microsoft.com/office/drawing/2014/main" id="{9BAAAA74-F8C8-9189-0FD4-B8F4E679ADAF}"/>
-              </a:ext>
-            </a:extLst>
-          </p:cNvPr>
-          <p:cNvPicPr>
-            <a:picLocks noGrp="1" noChangeAspect="1"/>
-          </p:cNvPicPr>
-          <p:nvPr>
-            <p:ph sz="half" idx="2"/>
-          </p:nvPr>
-        </p:nvPicPr>
-        <p:blipFill>
-          <a:blip r:embed="rId2" cstate="email">
-            <a:extLst>
-              <a:ext uri="{28A0092B-C50C-407E-A947-70E740481C1C}">
-                <a14:useLocalDpi xmlns:a14="http://schemas.microsoft.com/office/drawing/2010/main"/>
-              </a:ext>
-            </a:extLst>
-          </a:blip>
-          <a:stretch>
-            <a:fillRect/>
-          </a:stretch>
-        </p:blipFill>
-        <p:spPr>
-          <a:xfrm>
-            <a:off x="8666960" y="3752382"/>
-            <a:ext cx="3112802" cy="2749462"/>
-          </a:xfrm>
-          <a:prstGeom prst="rect">
-            <a:avLst/>
-          </a:prstGeom>
-        </p:spPr>
-      </p:pic>
-      <p:pic>
-        <p:nvPicPr>
-          <p:cNvPr id="7" name="Content Placeholder 9">
-            <a:extLst>
-              <a:ext uri="{FF2B5EF4-FFF2-40B4-BE49-F238E27FC236}">
-                <a16:creationId xmlns:a16="http://schemas.microsoft.com/office/drawing/2014/main" id="{BF5BD5E9-9CB3-F2C0-3E72-7E16D46981F2}"/>
-              </a:ext>
-            </a:extLst>
-          </p:cNvPr>
-          <p:cNvPicPr>
-            <a:picLocks noChangeAspect="1"/>
-          </p:cNvPicPr>
-          <p:nvPr/>
-        </p:nvPicPr>
-        <p:blipFill>
-          <a:blip r:embed="rId3" cstate="email">
-            <a:extLst>
-              <a:ext uri="{28A0092B-C50C-407E-A947-70E740481C1C}">
-                <a14:useLocalDpi xmlns:a14="http://schemas.microsoft.com/office/drawing/2010/main"/>
-              </a:ext>
-            </a:extLst>
-          </a:blip>
-          <a:stretch>
-            <a:fillRect/>
-          </a:stretch>
-        </p:blipFill>
-        <p:spPr bwMode="auto">
-          <a:xfrm>
-            <a:off x="9005602" y="1026234"/>
-            <a:ext cx="2435518" cy="2780306"/>
-          </a:xfrm>
-          <a:prstGeom prst="rect">
-            <a:avLst/>
-          </a:prstGeom>
-          <a:noFill/>
-          <a:ln>
-            <a:noFill/>
-          </a:ln>
-          <a:extLst>
-            <a:ext uri="{909E8E84-426E-40dd-AFC4-6F175D3DCCD1}">
-              <a14:hiddenFill xmlns:a14="http://schemas.microsoft.com/office/drawing/2010/main" xmlns="">
-                <a:solidFill>
-                  <a:srgbClr val="FFFFFF"/>
-                </a:solidFill>
-              </a14:hiddenFill>
-            </a:ext>
-            <a:ext uri="{91240B29-F687-4f45-9708-019B960494DF}">
-              <a14:hiddenLine xmlns:a14="http://schemas.microsoft.com/office/drawing/2010/main" xmlns="" w="9525">
-                <a:solidFill>
-                  <a:srgbClr val="000000"/>
-                </a:solidFill>
-                <a:miter lim="800000"/>
-                <a:headEnd/>
-                <a:tailEnd/>
-              </a14:hiddenLine>
-            </a:ext>
-            <a:ext uri="{FAA26D3D-D897-4be2-8F04-BA451C77F1D7}">
-              <ma14:placeholderFlag xmlns:ma14="http://schemas.microsoft.com/office/mac/drawingml/2011/main" xmlns="" val="1"/>
-            </a:ext>
-          </a:extLst>
-        </p:spPr>
-      </p:pic>
-    </p:spTree>
-    <p:extLst>
-      <p:ext uri="{BB962C8B-B14F-4D97-AF65-F5344CB8AC3E}">
-        <p14:creationId xmlns:p14="http://schemas.microsoft.com/office/powerpoint/2010/main" val="1872868109"/>
-      </p:ext>
-    </p:extLst>
-  </p:cSld>
-  <p:clrMapOvr>
-    <a:masterClrMapping/>
-  </p:clrMapOvr>
-</p:sld>
-</file>
-
-<file path=ppt/slides/slide17.xml><?xml version="1.0" encoding="utf-8"?>
-<p:sld xmlns:a="http://schemas.openxmlformats.org/drawingml/2006/main" xmlns:r="http://schemas.openxmlformats.org/officeDocument/2006/relationships" xmlns:p="http://schemas.openxmlformats.org/presentationml/2006/main">
-  <p:cSld>
-    <p:spTree>
-      <p:nvGrpSpPr>
-        <p:cNvPr id="1" name=""/>
-        <p:cNvGrpSpPr/>
-        <p:nvPr/>
-      </p:nvGrpSpPr>
-      <p:grpSpPr>
-        <a:xfrm>
-          <a:off x="0" y="0"/>
-          <a:ext cx="0" cy="0"/>
-          <a:chOff x="0" y="0"/>
-          <a:chExt cx="0" cy="0"/>
-        </a:xfrm>
-      </p:grpSpPr>
-      <p:sp>
-        <p:nvSpPr>
-          <p:cNvPr id="2" name="Title 1">
-            <a:extLst>
-              <a:ext uri="{FF2B5EF4-FFF2-40B4-BE49-F238E27FC236}">
                 <a16:creationId xmlns:a16="http://schemas.microsoft.com/office/drawing/2014/main" id="{BB61E8AD-1ED9-E044-977B-436EBFDABD10}"/>
               </a:ext>
             </a:extLst>
@@ -5954,7 +4093,7 @@
       </p:sp>
       <p:pic>
         <p:nvPicPr>
-          <p:cNvPr id="5" name="Content Placeholder 4">
+          <p:cNvPr id="5" name="Content Placeholder 4" descr="Thermal conductivity of SiC vs temperature with different microstructures">
             <a:extLst>
               <a:ext uri="{FF2B5EF4-FFF2-40B4-BE49-F238E27FC236}">
                 <a16:creationId xmlns:a16="http://schemas.microsoft.com/office/drawing/2014/main" id="{09C2E20E-F2B5-9341-B5E7-70810E8C88A4}"/>
@@ -6019,7 +4158,7 @@
               <a:pPr>
                 <a:defRPr/>
               </a:pPr>
-              <a:t>17</a:t>
+              <a:t>10</a:t>
             </a:fld>
             <a:endParaRPr lang="en-US"/>
           </a:p>
@@ -6031,6 +4170,9 @@
             <a:extLst>
               <a:ext uri="{FF2B5EF4-FFF2-40B4-BE49-F238E27FC236}">
                 <a16:creationId xmlns:a16="http://schemas.microsoft.com/office/drawing/2014/main" id="{A1899511-6D22-BB20-3ECE-3F11857847FE}"/>
+              </a:ext>
+              <a:ext uri="{C183D7F6-B498-43B3-948B-1728B52AA6E4}">
+                <adec:decorative xmlns:adec="http://schemas.microsoft.com/office/drawing/2017/decorative" val="1"/>
               </a:ext>
             </a:extLst>
           </p:cNvPr>
@@ -6074,7 +4216,7 @@
 </p:sld>
 </file>
 
-<file path=ppt/slides/slide18.xml><?xml version="1.0" encoding="utf-8"?>
+<file path=ppt/slides/slide11.xml><?xml version="1.0" encoding="utf-8"?>
 <p:sld xmlns:a="http://schemas.openxmlformats.org/drawingml/2006/main" xmlns:r="http://schemas.openxmlformats.org/officeDocument/2006/relationships" xmlns:p="http://schemas.openxmlformats.org/presentationml/2006/main">
   <p:cSld>
     <p:spTree>
@@ -6180,7 +4322,7 @@
       </p:sp>
       <p:pic>
         <p:nvPicPr>
-          <p:cNvPr id="5" name="Content Placeholder 4">
+          <p:cNvPr id="5" name="Content Placeholder 4" descr="Thermal conductivity of SiC vs temperature">
             <a:extLst>
               <a:ext uri="{FF2B5EF4-FFF2-40B4-BE49-F238E27FC236}">
                 <a16:creationId xmlns:a16="http://schemas.microsoft.com/office/drawing/2014/main" id="{09C2E20E-F2B5-9341-B5E7-70810E8C88A4}"/>
@@ -6245,7 +4387,7 @@
               <a:pPr>
                 <a:defRPr/>
               </a:pPr>
-              <a:t>18</a:t>
+              <a:t>11</a:t>
             </a:fld>
             <a:endParaRPr lang="en-US"/>
           </a:p>
@@ -6264,7 +4406,7 @@
 </p:sld>
 </file>
 
-<file path=ppt/slides/slide19.xml><?xml version="1.0" encoding="utf-8"?>
+<file path=ppt/slides/slide12.xml><?xml version="1.0" encoding="utf-8"?>
 <p:sld xmlns:a="http://schemas.openxmlformats.org/drawingml/2006/main" xmlns:r="http://schemas.openxmlformats.org/officeDocument/2006/relationships" xmlns:p="http://schemas.openxmlformats.org/presentationml/2006/main">
   <p:cSld>
     <p:spTree>
@@ -6362,7 +4504,7 @@
       </p:sp>
       <p:pic>
         <p:nvPicPr>
-          <p:cNvPr id="8" name="Content Placeholder 7">
+          <p:cNvPr id="8" name="Content Placeholder 7" descr="Thermal conductivity degradation versus dose at different irradiation temperatures">
             <a:extLst>
               <a:ext uri="{FF2B5EF4-FFF2-40B4-BE49-F238E27FC236}">
                 <a16:creationId xmlns:a16="http://schemas.microsoft.com/office/drawing/2014/main" id="{BAE249BE-9E7F-A94E-A8AA-954DDE56E9C2}"/>
@@ -6427,7 +4569,7 @@
               <a:pPr>
                 <a:defRPr/>
               </a:pPr>
-              <a:t>19</a:t>
+              <a:t>12</a:t>
             </a:fld>
             <a:endParaRPr lang="en-US"/>
           </a:p>
@@ -6437,6 +4579,652 @@
     <p:extLst>
       <p:ext uri="{BB962C8B-B14F-4D97-AF65-F5344CB8AC3E}">
         <p14:creationId xmlns:p14="http://schemas.microsoft.com/office/powerpoint/2010/main" val="3941860420"/>
+      </p:ext>
+    </p:extLst>
+  </p:cSld>
+  <p:clrMapOvr>
+    <a:masterClrMapping/>
+  </p:clrMapOvr>
+</p:sld>
+</file>
+
+<file path=ppt/slides/slide13.xml><?xml version="1.0" encoding="utf-8"?>
+<p:sld xmlns:a="http://schemas.openxmlformats.org/drawingml/2006/main" xmlns:r="http://schemas.openxmlformats.org/officeDocument/2006/relationships" xmlns:p="http://schemas.openxmlformats.org/presentationml/2006/main">
+  <p:cSld>
+    <p:spTree>
+      <p:nvGrpSpPr>
+        <p:cNvPr id="1" name=""/>
+        <p:cNvGrpSpPr/>
+        <p:nvPr/>
+      </p:nvGrpSpPr>
+      <p:grpSpPr>
+        <a:xfrm>
+          <a:off x="0" y="0"/>
+          <a:ext cx="0" cy="0"/>
+          <a:chOff x="0" y="0"/>
+          <a:chExt cx="0" cy="0"/>
+        </a:xfrm>
+      </p:grpSpPr>
+      <p:sp>
+        <p:nvSpPr>
+          <p:cNvPr id="2" name="Title 1">
+            <a:extLst>
+              <a:ext uri="{FF2B5EF4-FFF2-40B4-BE49-F238E27FC236}">
+                <a16:creationId xmlns:a16="http://schemas.microsoft.com/office/drawing/2014/main" id="{BB61E8AD-1ED9-E044-977B-436EBFDABD10}"/>
+              </a:ext>
+            </a:extLst>
+          </p:cNvPr>
+          <p:cNvSpPr>
+            <a:spLocks noGrp="1"/>
+          </p:cNvSpPr>
+          <p:nvPr>
+            <p:ph type="title"/>
+          </p:nvPr>
+        </p:nvSpPr>
+        <p:spPr/>
+        <p:txBody>
+          <a:bodyPr/>
+          <a:lstStyle/>
+          <a:p>
+            <a:r>
+              <a:rPr lang="en-US" dirty="0"/>
+              <a:t>Thermal Conductivity Degradation</a:t>
+            </a:r>
+          </a:p>
+        </p:txBody>
+      </p:sp>
+      <p:pic>
+        <p:nvPicPr>
+          <p:cNvPr id="6" name="Content Placeholder 5" descr="Thermal defect resistance as a function of dose">
+            <a:extLst>
+              <a:ext uri="{FF2B5EF4-FFF2-40B4-BE49-F238E27FC236}">
+                <a16:creationId xmlns:a16="http://schemas.microsoft.com/office/drawing/2014/main" id="{ACE0CC0A-2F1F-9C40-A2D7-AD26591F93E9}"/>
+              </a:ext>
+            </a:extLst>
+          </p:cNvPr>
+          <p:cNvPicPr>
+            <a:picLocks noGrp="1" noChangeAspect="1"/>
+          </p:cNvPicPr>
+          <p:nvPr>
+            <p:ph sz="half" idx="2"/>
+          </p:nvPr>
+        </p:nvPicPr>
+        <p:blipFill>
+          <a:blip r:embed="rId2" cstate="email">
+            <a:extLst>
+              <a:ext uri="{28A0092B-C50C-407E-A947-70E740481C1C}">
+                <a14:useLocalDpi xmlns:a14="http://schemas.microsoft.com/office/drawing/2010/main"/>
+              </a:ext>
+            </a:extLst>
+          </a:blip>
+          <a:stretch>
+            <a:fillRect/>
+          </a:stretch>
+        </p:blipFill>
+        <p:spPr>
+          <a:xfrm>
+            <a:off x="6515910" y="2345018"/>
+            <a:ext cx="2969338" cy="3141382"/>
+          </a:xfrm>
+          <a:prstGeom prst="rect">
+            <a:avLst/>
+          </a:prstGeom>
+        </p:spPr>
+      </p:pic>
+      <p:pic>
+        <p:nvPicPr>
+          <p:cNvPr id="7" name="Picture 6" descr="Relationship between swelling and thermal conductivity in SiC">
+            <a:extLst>
+              <a:ext uri="{FF2B5EF4-FFF2-40B4-BE49-F238E27FC236}">
+                <a16:creationId xmlns:a16="http://schemas.microsoft.com/office/drawing/2014/main" id="{B091F565-C9AC-7C4E-9D36-E5BA8BDE1065}"/>
+              </a:ext>
+            </a:extLst>
+          </p:cNvPr>
+          <p:cNvPicPr>
+            <a:picLocks noChangeAspect="1"/>
+          </p:cNvPicPr>
+          <p:nvPr/>
+        </p:nvPicPr>
+        <p:blipFill>
+          <a:blip r:embed="rId3" cstate="email">
+            <a:extLst>
+              <a:ext uri="{28A0092B-C50C-407E-A947-70E740481C1C}">
+                <a14:useLocalDpi xmlns:a14="http://schemas.microsoft.com/office/drawing/2010/main"/>
+              </a:ext>
+            </a:extLst>
+          </a:blip>
+          <a:stretch>
+            <a:fillRect/>
+          </a:stretch>
+        </p:blipFill>
+        <p:spPr>
+          <a:xfrm>
+            <a:off x="9383411" y="2011366"/>
+            <a:ext cx="2808589" cy="3475034"/>
+          </a:xfrm>
+          <a:prstGeom prst="rect">
+            <a:avLst/>
+          </a:prstGeom>
+        </p:spPr>
+      </p:pic>
+      <p:sp>
+        <p:nvSpPr>
+          <p:cNvPr id="9" name="Content Placeholder 2">
+            <a:extLst>
+              <a:ext uri="{FF2B5EF4-FFF2-40B4-BE49-F238E27FC236}">
+                <a16:creationId xmlns:a16="http://schemas.microsoft.com/office/drawing/2014/main" id="{22A99754-751D-8C40-9109-7DA406691619}"/>
+              </a:ext>
+            </a:extLst>
+          </p:cNvPr>
+          <p:cNvSpPr txBox="1">
+            <a:spLocks/>
+          </p:cNvSpPr>
+          <p:nvPr/>
+        </p:nvSpPr>
+        <p:spPr bwMode="auto">
+          <a:xfrm>
+            <a:off x="762000" y="2120903"/>
+            <a:ext cx="5544207" cy="4157663"/>
+          </a:xfrm>
+          <a:prstGeom prst="rect">
+            <a:avLst/>
+          </a:prstGeom>
+          <a:noFill/>
+          <a:ln>
+            <a:noFill/>
+          </a:ln>
+          <a:extLst>
+            <a:ext uri="{909E8E84-426E-40dd-AFC4-6F175D3DCCD1}">
+              <a14:hiddenFill xmlns="" xmlns:a14="http://schemas.microsoft.com/office/drawing/2010/main">
+                <a:solidFill>
+                  <a:srgbClr val="FFFFFF"/>
+                </a:solidFill>
+              </a14:hiddenFill>
+            </a:ext>
+            <a:ext uri="{91240B29-F687-4f45-9708-019B960494DF}">
+              <a14:hiddenLine xmlns="" xmlns:a14="http://schemas.microsoft.com/office/drawing/2010/main" w="9525">
+                <a:solidFill>
+                  <a:srgbClr val="000000"/>
+                </a:solidFill>
+                <a:miter lim="800000"/>
+                <a:headEnd/>
+                <a:tailEnd/>
+              </a14:hiddenLine>
+            </a:ext>
+            <a:ext uri="{FAA26D3D-D897-4be2-8F04-BA451C77F1D7}">
+              <ma14:placeholderFlag xmlns="" xmlns:ma14="http://schemas.microsoft.com/office/mac/drawingml/2011/main" val="1"/>
+            </a:ext>
+          </a:extLst>
+        </p:spPr>
+        <p:txBody>
+          <a:bodyPr vert="horz" wrap="square" lIns="91440" tIns="45720" rIns="91440" bIns="45720" numCol="1" anchor="t" anchorCtr="0" compatLnSpc="1">
+            <a:prstTxWarp prst="textNoShape">
+              <a:avLst/>
+            </a:prstTxWarp>
+          </a:bodyPr>
+          <a:lstStyle>
+            <a:lvl1pPr marL="457189" indent="-457189" algn="l" defTabSz="609585" rtl="0" eaLnBrk="1" fontAlgn="base" hangingPunct="1">
+              <a:spcBef>
+                <a:spcPct val="20000"/>
+              </a:spcBef>
+              <a:spcAft>
+                <a:spcPct val="0"/>
+              </a:spcAft>
+              <a:buFont typeface="Arial" charset="0"/>
+              <a:buChar char="•"/>
+              <a:defRPr sz="3733" kern="1200">
+                <a:solidFill>
+                  <a:schemeClr val="tx1"/>
+                </a:solidFill>
+                <a:latin typeface="Arial"/>
+                <a:ea typeface="ＭＳ Ｐゴシック" charset="0"/>
+                <a:cs typeface="Arial"/>
+              </a:defRPr>
+            </a:lvl1pPr>
+            <a:lvl2pPr marL="990575" indent="-380990" algn="l" defTabSz="609585" rtl="0" eaLnBrk="1" fontAlgn="base" hangingPunct="1">
+              <a:spcBef>
+                <a:spcPct val="20000"/>
+              </a:spcBef>
+              <a:spcAft>
+                <a:spcPct val="0"/>
+              </a:spcAft>
+              <a:buFont typeface="Arial" charset="0"/>
+              <a:buChar char="–"/>
+              <a:defRPr sz="3200" kern="1200">
+                <a:solidFill>
+                  <a:schemeClr val="tx1"/>
+                </a:solidFill>
+                <a:latin typeface="Arial"/>
+                <a:ea typeface="ＭＳ Ｐゴシック" charset="0"/>
+                <a:cs typeface="Arial"/>
+              </a:defRPr>
+            </a:lvl2pPr>
+            <a:lvl3pPr marL="1523962" indent="-304792" algn="l" defTabSz="609585" rtl="0" eaLnBrk="1" fontAlgn="base" hangingPunct="1">
+              <a:spcBef>
+                <a:spcPct val="20000"/>
+              </a:spcBef>
+              <a:spcAft>
+                <a:spcPct val="0"/>
+              </a:spcAft>
+              <a:buFont typeface="Arial" charset="0"/>
+              <a:buChar char="•"/>
+              <a:defRPr sz="2667" kern="1200">
+                <a:solidFill>
+                  <a:schemeClr val="tx1"/>
+                </a:solidFill>
+                <a:latin typeface="Arial"/>
+                <a:ea typeface="ＭＳ Ｐゴシック" charset="0"/>
+                <a:cs typeface="Arial"/>
+              </a:defRPr>
+            </a:lvl3pPr>
+            <a:lvl4pPr marL="2133547" indent="-304792" algn="l" defTabSz="609585" rtl="0" eaLnBrk="1" fontAlgn="base" hangingPunct="1">
+              <a:spcBef>
+                <a:spcPct val="20000"/>
+              </a:spcBef>
+              <a:spcAft>
+                <a:spcPct val="0"/>
+              </a:spcAft>
+              <a:buFont typeface="Arial" charset="0"/>
+              <a:buChar char="–"/>
+              <a:defRPr sz="2400" kern="1200">
+                <a:solidFill>
+                  <a:schemeClr val="tx1"/>
+                </a:solidFill>
+                <a:latin typeface="Arial"/>
+                <a:ea typeface="ＭＳ Ｐゴシック" charset="0"/>
+                <a:cs typeface="Arial"/>
+              </a:defRPr>
+            </a:lvl4pPr>
+            <a:lvl5pPr marL="2743131" indent="-304792" algn="l" defTabSz="609585" rtl="0" eaLnBrk="1" fontAlgn="base" hangingPunct="1">
+              <a:spcBef>
+                <a:spcPct val="20000"/>
+              </a:spcBef>
+              <a:spcAft>
+                <a:spcPct val="0"/>
+              </a:spcAft>
+              <a:buFont typeface="Arial" charset="0"/>
+              <a:buChar char="»"/>
+              <a:defRPr sz="2400" kern="1200">
+                <a:solidFill>
+                  <a:schemeClr val="tx1"/>
+                </a:solidFill>
+                <a:latin typeface="Arial"/>
+                <a:ea typeface="ＭＳ Ｐゴシック" charset="0"/>
+                <a:cs typeface="Arial"/>
+              </a:defRPr>
+            </a:lvl5pPr>
+            <a:lvl6pPr marL="3352716" indent="-304792" algn="l" defTabSz="609585" rtl="0" eaLnBrk="1" latinLnBrk="0" hangingPunct="1">
+              <a:spcBef>
+                <a:spcPct val="20000"/>
+              </a:spcBef>
+              <a:buFont typeface="Arial"/>
+              <a:buChar char="•"/>
+              <a:defRPr sz="2400" kern="1200">
+                <a:solidFill>
+                  <a:schemeClr val="tx1"/>
+                </a:solidFill>
+                <a:latin typeface="+mn-lt"/>
+                <a:ea typeface="+mn-ea"/>
+                <a:cs typeface="+mn-cs"/>
+              </a:defRPr>
+            </a:lvl6pPr>
+            <a:lvl7pPr marL="3962301" indent="-304792" algn="l" defTabSz="609585" rtl="0" eaLnBrk="1" latinLnBrk="0" hangingPunct="1">
+              <a:spcBef>
+                <a:spcPct val="20000"/>
+              </a:spcBef>
+              <a:buFont typeface="Arial"/>
+              <a:buChar char="•"/>
+              <a:defRPr sz="2400" kern="1200">
+                <a:solidFill>
+                  <a:schemeClr val="tx1"/>
+                </a:solidFill>
+                <a:latin typeface="+mn-lt"/>
+                <a:ea typeface="+mn-ea"/>
+                <a:cs typeface="+mn-cs"/>
+              </a:defRPr>
+            </a:lvl7pPr>
+            <a:lvl8pPr marL="4571886" indent="-304792" algn="l" defTabSz="609585" rtl="0" eaLnBrk="1" latinLnBrk="0" hangingPunct="1">
+              <a:spcBef>
+                <a:spcPct val="20000"/>
+              </a:spcBef>
+              <a:buFont typeface="Arial"/>
+              <a:buChar char="•"/>
+              <a:defRPr sz="2400" kern="1200">
+                <a:solidFill>
+                  <a:schemeClr val="tx1"/>
+                </a:solidFill>
+                <a:latin typeface="+mn-lt"/>
+                <a:ea typeface="+mn-ea"/>
+                <a:cs typeface="+mn-cs"/>
+              </a:defRPr>
+            </a:lvl8pPr>
+            <a:lvl9pPr marL="5181470" indent="-304792" algn="l" defTabSz="609585" rtl="0" eaLnBrk="1" latinLnBrk="0" hangingPunct="1">
+              <a:spcBef>
+                <a:spcPct val="20000"/>
+              </a:spcBef>
+              <a:buFont typeface="Arial"/>
+              <a:buChar char="•"/>
+              <a:defRPr sz="2400" kern="1200">
+                <a:solidFill>
+                  <a:schemeClr val="tx1"/>
+                </a:solidFill>
+                <a:latin typeface="+mn-lt"/>
+                <a:ea typeface="+mn-ea"/>
+                <a:cs typeface="+mn-cs"/>
+              </a:defRPr>
+            </a:lvl9pPr>
+          </a:lstStyle>
+          <a:p>
+            <a:r>
+              <a:rPr lang="en-US" sz="2000" dirty="0"/>
+              <a:t>The thermal defect resistance is defined as the difference between the reciprocals of the irradiated and nonirradiated thermal conductivity (1/</a:t>
+            </a:r>
+            <a:r>
+              <a:rPr lang="en-US" sz="2000" dirty="0" err="1"/>
+              <a:t>K</a:t>
+            </a:r>
+            <a:r>
+              <a:rPr lang="en-US" sz="2000" baseline="-25000" dirty="0" err="1"/>
+              <a:t>rd</a:t>
+            </a:r>
+            <a:r>
+              <a:rPr lang="en-US" sz="2000" dirty="0"/>
+              <a:t> = 1/</a:t>
+            </a:r>
+            <a:r>
+              <a:rPr lang="en-US" sz="2000" dirty="0" err="1"/>
+              <a:t>K</a:t>
+            </a:r>
+            <a:r>
+              <a:rPr lang="en-US" sz="2000" baseline="-25000" dirty="0" err="1"/>
+              <a:t>irr</a:t>
+            </a:r>
+            <a:r>
+              <a:rPr lang="en-US" sz="2000" dirty="0"/>
+              <a:t> – 1/</a:t>
+            </a:r>
+            <a:r>
+              <a:rPr lang="en-US" sz="2000" dirty="0" err="1"/>
+              <a:t>K</a:t>
+            </a:r>
+            <a:r>
+              <a:rPr lang="en-US" sz="2000" baseline="-25000" dirty="0" err="1"/>
+              <a:t>nonirr</a:t>
+            </a:r>
+            <a:r>
+              <a:rPr lang="en-US" sz="2000" dirty="0"/>
+              <a:t>)</a:t>
+            </a:r>
+          </a:p>
+          <a:p>
+            <a:r>
+              <a:rPr lang="en-US" sz="2000" dirty="0"/>
+              <a:t>This term can be related directly to the defect type and concentration present in irradiated ceramics</a:t>
+            </a:r>
+          </a:p>
+          <a:p>
+            <a:r>
+              <a:rPr lang="en-US" sz="2000" dirty="0"/>
+              <a:t>The thermal defect resistance is directly proportional to the irradiation-induced swelling in </a:t>
+            </a:r>
+            <a:r>
+              <a:rPr lang="en-US" sz="2000" dirty="0" err="1"/>
+              <a:t>SiC</a:t>
+            </a:r>
+            <a:endParaRPr lang="en-US" sz="2000" dirty="0"/>
+          </a:p>
+          <a:p>
+            <a:r>
+              <a:rPr lang="en-US" sz="2000" dirty="0"/>
+              <a:t>This allows an indirect determination of thermal conductivity by measurement of the density change in the TRISO </a:t>
+            </a:r>
+            <a:r>
+              <a:rPr lang="en-US" sz="2000" dirty="0" err="1"/>
+              <a:t>SiC</a:t>
+            </a:r>
+            <a:r>
+              <a:rPr lang="en-US" sz="2000" dirty="0"/>
+              <a:t> shell</a:t>
+            </a:r>
+          </a:p>
+          <a:p>
+            <a:pPr marL="0" indent="0">
+              <a:buNone/>
+            </a:pPr>
+            <a:endParaRPr lang="en-US" sz="2000" dirty="0"/>
+          </a:p>
+          <a:p>
+            <a:endParaRPr lang="en-US" sz="2000" dirty="0"/>
+          </a:p>
+          <a:p>
+            <a:endParaRPr lang="en-US" sz="2000" dirty="0"/>
+          </a:p>
+          <a:p>
+            <a:endParaRPr lang="en-US" sz="2000" dirty="0"/>
+          </a:p>
+          <a:p>
+            <a:endParaRPr lang="en-US" sz="2000" dirty="0"/>
+          </a:p>
+        </p:txBody>
+      </p:sp>
+      <p:sp>
+        <p:nvSpPr>
+          <p:cNvPr id="4" name="Slide Number Placeholder 3">
+            <a:extLst>
+              <a:ext uri="{FF2B5EF4-FFF2-40B4-BE49-F238E27FC236}">
+                <a16:creationId xmlns:a16="http://schemas.microsoft.com/office/drawing/2014/main" id="{282BE51A-AAD1-984F-8E06-3D029832E119}"/>
+              </a:ext>
+            </a:extLst>
+          </p:cNvPr>
+          <p:cNvSpPr>
+            <a:spLocks noGrp="1"/>
+          </p:cNvSpPr>
+          <p:nvPr>
+            <p:ph type="sldNum" sz="quarter" idx="12"/>
+          </p:nvPr>
+        </p:nvSpPr>
+        <p:spPr/>
+        <p:txBody>
+          <a:bodyPr/>
+          <a:lstStyle/>
+          <a:p>
+            <a:pPr>
+              <a:defRPr/>
+            </a:pPr>
+            <a:fld id="{EC35E9FC-F6D5-0349-BBED-EA7D7A9BC49B}" type="slidenum">
+              <a:rPr lang="en-US" smtClean="0"/>
+              <a:pPr>
+                <a:defRPr/>
+              </a:pPr>
+              <a:t>13</a:t>
+            </a:fld>
+            <a:endParaRPr lang="en-US"/>
+          </a:p>
+        </p:txBody>
+      </p:sp>
+    </p:spTree>
+    <p:extLst>
+      <p:ext uri="{BB962C8B-B14F-4D97-AF65-F5344CB8AC3E}">
+        <p14:creationId xmlns:p14="http://schemas.microsoft.com/office/powerpoint/2010/main" val="3320645494"/>
+      </p:ext>
+    </p:extLst>
+  </p:cSld>
+  <p:clrMapOvr>
+    <a:masterClrMapping/>
+  </p:clrMapOvr>
+</p:sld>
+</file>
+
+<file path=ppt/slides/slide14.xml><?xml version="1.0" encoding="utf-8"?>
+<p:sld xmlns:a="http://schemas.openxmlformats.org/drawingml/2006/main" xmlns:r="http://schemas.openxmlformats.org/officeDocument/2006/relationships" xmlns:p="http://schemas.openxmlformats.org/presentationml/2006/main">
+  <p:cSld>
+    <p:spTree>
+      <p:nvGrpSpPr>
+        <p:cNvPr id="1" name=""/>
+        <p:cNvGrpSpPr/>
+        <p:nvPr/>
+      </p:nvGrpSpPr>
+      <p:grpSpPr>
+        <a:xfrm>
+          <a:off x="0" y="0"/>
+          <a:ext cx="0" cy="0"/>
+          <a:chOff x="0" y="0"/>
+          <a:chExt cx="0" cy="0"/>
+        </a:xfrm>
+      </p:grpSpPr>
+      <p:sp>
+        <p:nvSpPr>
+          <p:cNvPr id="2" name="Title 1">
+            <a:extLst>
+              <a:ext uri="{FF2B5EF4-FFF2-40B4-BE49-F238E27FC236}">
+                <a16:creationId xmlns:a16="http://schemas.microsoft.com/office/drawing/2014/main" id="{C730F246-B5CC-9544-B2A6-036175CF44C5}"/>
+              </a:ext>
+            </a:extLst>
+          </p:cNvPr>
+          <p:cNvSpPr>
+            <a:spLocks noGrp="1"/>
+          </p:cNvSpPr>
+          <p:nvPr>
+            <p:ph type="title"/>
+          </p:nvPr>
+        </p:nvSpPr>
+        <p:spPr/>
+        <p:txBody>
+          <a:bodyPr/>
+          <a:lstStyle/>
+          <a:p>
+            <a:r>
+              <a:rPr lang="en-US" dirty="0"/>
+              <a:t>Thermal Conductivity Degradation</a:t>
+            </a:r>
+          </a:p>
+        </p:txBody>
+      </p:sp>
+      <p:sp>
+        <p:nvSpPr>
+          <p:cNvPr id="3" name="Content Placeholder 2">
+            <a:extLst>
+              <a:ext uri="{FF2B5EF4-FFF2-40B4-BE49-F238E27FC236}">
+                <a16:creationId xmlns:a16="http://schemas.microsoft.com/office/drawing/2014/main" id="{EA27E7EA-9334-B745-88DC-5034E8BF2B52}"/>
+              </a:ext>
+            </a:extLst>
+          </p:cNvPr>
+          <p:cNvSpPr>
+            <a:spLocks noGrp="1"/>
+          </p:cNvSpPr>
+          <p:nvPr>
+            <p:ph sz="half" idx="1"/>
+          </p:nvPr>
+        </p:nvSpPr>
+        <p:spPr>
+          <a:xfrm>
+            <a:off x="609599" y="1968503"/>
+            <a:ext cx="5769686" cy="4157663"/>
+          </a:xfrm>
+        </p:spPr>
+        <p:txBody>
+          <a:bodyPr/>
+          <a:lstStyle/>
+          <a:p>
+            <a:r>
+              <a:rPr lang="en-US" sz="2200" dirty="0"/>
+              <a:t>In the high temperature void swelling regime, thermal conductivity degradation is not expected to saturate, as voids continue to grow and scatter phonons</a:t>
+            </a:r>
+          </a:p>
+          <a:p>
+            <a:r>
+              <a:rPr lang="en-US" sz="2200" dirty="0"/>
+              <a:t>Additionally, the linear relationship between swelling and thermal defect resistance does not exist at high temperature</a:t>
+            </a:r>
+          </a:p>
+          <a:p>
+            <a:r>
+              <a:rPr lang="en-US" sz="2200" dirty="0"/>
+              <a:t>Generally, void swelling does not degrade thermal conductivity as severely as point defects, but data at high T is quite limited</a:t>
+            </a:r>
+          </a:p>
+          <a:p>
+            <a:endParaRPr lang="en-US" sz="2200" dirty="0"/>
+          </a:p>
+        </p:txBody>
+      </p:sp>
+      <p:pic>
+        <p:nvPicPr>
+          <p:cNvPr id="5" name="Content Placeholder 4" descr="Impact of irradiation temperature on the thermal conductivity degradation">
+            <a:extLst>
+              <a:ext uri="{FF2B5EF4-FFF2-40B4-BE49-F238E27FC236}">
+                <a16:creationId xmlns:a16="http://schemas.microsoft.com/office/drawing/2014/main" id="{FE2CBB67-EB10-A74E-B49A-35E6A1508B6F}"/>
+              </a:ext>
+            </a:extLst>
+          </p:cNvPr>
+          <p:cNvPicPr>
+            <a:picLocks noGrp="1" noChangeAspect="1"/>
+          </p:cNvPicPr>
+          <p:nvPr>
+            <p:ph sz="half" idx="2"/>
+          </p:nvPr>
+        </p:nvPicPr>
+        <p:blipFill>
+          <a:blip r:embed="rId2" cstate="email">
+            <a:extLst>
+              <a:ext uri="{28A0092B-C50C-407E-A947-70E740481C1C}">
+                <a14:useLocalDpi xmlns:a14="http://schemas.microsoft.com/office/drawing/2010/main"/>
+              </a:ext>
+            </a:extLst>
+          </a:blip>
+          <a:stretch>
+            <a:fillRect/>
+          </a:stretch>
+        </p:blipFill>
+        <p:spPr>
+          <a:xfrm>
+            <a:off x="6197600" y="1981306"/>
+            <a:ext cx="5384800" cy="4132051"/>
+          </a:xfrm>
+          <a:prstGeom prst="rect">
+            <a:avLst/>
+          </a:prstGeom>
+        </p:spPr>
+      </p:pic>
+      <p:sp>
+        <p:nvSpPr>
+          <p:cNvPr id="4" name="Slide Number Placeholder 3">
+            <a:extLst>
+              <a:ext uri="{FF2B5EF4-FFF2-40B4-BE49-F238E27FC236}">
+                <a16:creationId xmlns:a16="http://schemas.microsoft.com/office/drawing/2014/main" id="{75255BDD-884B-2741-8566-BD77231A5E05}"/>
+              </a:ext>
+            </a:extLst>
+          </p:cNvPr>
+          <p:cNvSpPr>
+            <a:spLocks noGrp="1"/>
+          </p:cNvSpPr>
+          <p:nvPr>
+            <p:ph type="sldNum" sz="quarter" idx="12"/>
+          </p:nvPr>
+        </p:nvSpPr>
+        <p:spPr/>
+        <p:txBody>
+          <a:bodyPr/>
+          <a:lstStyle/>
+          <a:p>
+            <a:pPr>
+              <a:defRPr/>
+            </a:pPr>
+            <a:fld id="{EC35E9FC-F6D5-0349-BBED-EA7D7A9BC49B}" type="slidenum">
+              <a:rPr lang="en-US" smtClean="0"/>
+              <a:pPr>
+                <a:defRPr/>
+              </a:pPr>
+              <a:t>14</a:t>
+            </a:fld>
+            <a:endParaRPr lang="en-US"/>
+          </a:p>
+        </p:txBody>
+      </p:sp>
+    </p:spTree>
+    <p:extLst>
+      <p:ext uri="{BB962C8B-B14F-4D97-AF65-F5344CB8AC3E}">
+        <p14:creationId xmlns:p14="http://schemas.microsoft.com/office/powerpoint/2010/main" val="2124457683"/>
       </p:ext>
     </p:extLst>
   </p:cSld>
@@ -6479,7 +5267,12 @@
             <p:ph type="title"/>
           </p:nvPr>
         </p:nvSpPr>
-        <p:spPr/>
+        <p:spPr>
+          <a:xfrm>
+            <a:off x="609600" y="669925"/>
+            <a:ext cx="10972800" cy="1068387"/>
+          </a:xfrm>
+        </p:spPr>
         <p:txBody>
           <a:bodyPr/>
           <a:lstStyle/>
@@ -6509,8 +5302,8 @@
         </p:nvSpPr>
         <p:spPr>
           <a:xfrm>
-            <a:off x="609599" y="2280746"/>
-            <a:ext cx="11183007" cy="3845418"/>
+            <a:off x="609599" y="1738312"/>
+            <a:ext cx="11183007" cy="4387852"/>
           </a:xfrm>
         </p:spPr>
         <p:txBody>
@@ -6518,79 +5311,89 @@
           <a:lstStyle/>
           <a:p>
             <a:r>
-              <a:rPr lang="en-US" sz="2400" dirty="0"/>
+              <a:rPr lang="en-US" sz="2200" dirty="0"/>
               <a:t>TRISO particle intro, evolution into current TRISO design</a:t>
             </a:r>
           </a:p>
           <a:p>
             <a:r>
-              <a:rPr lang="en-US" sz="2400" dirty="0"/>
+              <a:rPr lang="en-US" sz="2200" dirty="0"/>
               <a:t>Different layers and their roles</a:t>
             </a:r>
           </a:p>
           <a:p>
             <a:pPr lvl="1"/>
             <a:r>
-              <a:rPr lang="en-US" sz="2400" dirty="0"/>
+              <a:rPr lang="en-US" sz="2200" dirty="0"/>
               <a:t>kernel, buffer, </a:t>
             </a:r>
             <a:r>
-              <a:rPr lang="en-US" sz="2400" dirty="0" err="1"/>
+              <a:rPr lang="en-US" sz="2200" dirty="0" err="1"/>
               <a:t>IPyC</a:t>
             </a:r>
             <a:r>
-              <a:rPr lang="en-US" sz="2400" dirty="0"/>
+              <a:rPr lang="en-US" sz="2200" dirty="0"/>
               <a:t>, </a:t>
             </a:r>
             <a:r>
-              <a:rPr lang="en-US" sz="2400" dirty="0" err="1"/>
+              <a:rPr lang="en-US" sz="2200" dirty="0" err="1"/>
               <a:t>SiC</a:t>
             </a:r>
             <a:r>
-              <a:rPr lang="en-US" sz="2400" dirty="0"/>
+              <a:rPr lang="en-US" sz="2200" dirty="0"/>
               <a:t>, </a:t>
             </a:r>
             <a:r>
-              <a:rPr lang="en-US" sz="2400" dirty="0" err="1"/>
+              <a:rPr lang="en-US" sz="2200" dirty="0" err="1"/>
               <a:t>OPyC</a:t>
             </a:r>
-            <a:endParaRPr lang="en-US" sz="2400" dirty="0"/>
-          </a:p>
-          <a:p>
-            <a:r>
-              <a:rPr lang="en-US" sz="2400" dirty="0"/>
+            <a:endParaRPr lang="en-US" sz="2200" dirty="0"/>
+          </a:p>
+          <a:p>
+            <a:r>
+              <a:rPr lang="en-US" sz="2200" dirty="0"/>
               <a:t>Fuel kernel – UO2 and UCO</a:t>
             </a:r>
           </a:p>
           <a:p>
             <a:pPr lvl="1"/>
             <a:r>
-              <a:rPr lang="en-US" sz="2400" dirty="0"/>
+              <a:rPr lang="en-US" sz="2200" dirty="0"/>
               <a:t>UO2 retains fission products, but generates CO</a:t>
             </a:r>
           </a:p>
           <a:p>
             <a:pPr lvl="1"/>
             <a:r>
-              <a:rPr lang="en-US" sz="2400" dirty="0"/>
+              <a:rPr lang="en-US" sz="2200" dirty="0"/>
               <a:t>UC2 limits CO formation, but poorly retains fission products</a:t>
             </a:r>
           </a:p>
           <a:p>
             <a:r>
-              <a:rPr lang="en-US" sz="2400" dirty="0"/>
+              <a:rPr lang="en-US" sz="2200" dirty="0"/>
               <a:t>Fission products</a:t>
             </a:r>
           </a:p>
           <a:p>
             <a:pPr lvl="1"/>
             <a:r>
-              <a:rPr lang="en-US" sz="2400" dirty="0"/>
+              <a:rPr lang="en-US" sz="2200" dirty="0"/>
               <a:t>Oxygen potential controls which compounds form, transitioning UC into UO2, while some FPs form oxides and other carbides</a:t>
             </a:r>
           </a:p>
           <a:p>
-            <a:endParaRPr lang="en-US" sz="2400" dirty="0"/>
+            <a:r>
+              <a:rPr lang="en-US" sz="2200" dirty="0" err="1"/>
+              <a:t>SiC</a:t>
+            </a:r>
+            <a:r>
+              <a:rPr lang="en-US" sz="2200" dirty="0"/>
+              <a:t> </a:t>
+            </a:r>
+          </a:p>
+          <a:p>
+            <a:endParaRPr lang="en-US" sz="2200" dirty="0"/>
           </a:p>
         </p:txBody>
       </p:sp>
@@ -6990,6 +5793,55 @@
                       </p:childTnLst>
                     </p:cTn>
                   </p:par>
+                  <p:par>
+                    <p:cTn id="31" fill="hold">
+                      <p:stCondLst>
+                        <p:cond delay="indefinite"/>
+                      </p:stCondLst>
+                      <p:childTnLst>
+                        <p:par>
+                          <p:cTn id="32" fill="hold">
+                            <p:stCondLst>
+                              <p:cond delay="0"/>
+                            </p:stCondLst>
+                            <p:childTnLst>
+                              <p:par>
+                                <p:cTn id="33" presetID="1" presetClass="entr" presetSubtype="0" fill="hold" nodeType="clickEffect">
+                                  <p:stCondLst>
+                                    <p:cond delay="0"/>
+                                  </p:stCondLst>
+                                  <p:childTnLst>
+                                    <p:set>
+                                      <p:cBhvr>
+                                        <p:cTn id="34" dur="1" fill="hold">
+                                          <p:stCondLst>
+                                            <p:cond delay="0"/>
+                                          </p:stCondLst>
+                                        </p:cTn>
+                                        <p:tgtEl>
+                                          <p:spTgt spid="3">
+                                            <p:txEl>
+                                              <p:pRg st="8" end="8"/>
+                                            </p:txEl>
+                                          </p:spTgt>
+                                        </p:tgtEl>
+                                        <p:attrNameLst>
+                                          <p:attrName>style.visibility</p:attrName>
+                                        </p:attrNameLst>
+                                      </p:cBhvr>
+                                      <p:to>
+                                        <p:strVal val="visible"/>
+                                      </p:to>
+                                    </p:set>
+                                  </p:childTnLst>
+                                </p:cTn>
+                              </p:par>
+                            </p:childTnLst>
+                          </p:cTn>
+                        </p:par>
+                      </p:childTnLst>
+                    </p:cTn>
+                  </p:par>
                 </p:childTnLst>
               </p:cTn>
               <p:prevCondLst>
@@ -7015,685 +5867,6 @@
 </p:sld>
 </file>
 
-<file path=ppt/slides/slide20.xml><?xml version="1.0" encoding="utf-8"?>
-<p:sld xmlns:a="http://schemas.openxmlformats.org/drawingml/2006/main" xmlns:r="http://schemas.openxmlformats.org/officeDocument/2006/relationships" xmlns:p="http://schemas.openxmlformats.org/presentationml/2006/main">
-  <p:cSld>
-    <p:spTree>
-      <p:nvGrpSpPr>
-        <p:cNvPr id="1" name=""/>
-        <p:cNvGrpSpPr/>
-        <p:nvPr/>
-      </p:nvGrpSpPr>
-      <p:grpSpPr>
-        <a:xfrm>
-          <a:off x="0" y="0"/>
-          <a:ext cx="0" cy="0"/>
-          <a:chOff x="0" y="0"/>
-          <a:chExt cx="0" cy="0"/>
-        </a:xfrm>
-      </p:grpSpPr>
-      <p:sp>
-        <p:nvSpPr>
-          <p:cNvPr id="2" name="Title 1">
-            <a:extLst>
-              <a:ext uri="{FF2B5EF4-FFF2-40B4-BE49-F238E27FC236}">
-                <a16:creationId xmlns:a16="http://schemas.microsoft.com/office/drawing/2014/main" id="{BB61E8AD-1ED9-E044-977B-436EBFDABD10}"/>
-              </a:ext>
-            </a:extLst>
-          </p:cNvPr>
-          <p:cNvSpPr>
-            <a:spLocks noGrp="1"/>
-          </p:cNvSpPr>
-          <p:nvPr>
-            <p:ph type="title"/>
-          </p:nvPr>
-        </p:nvSpPr>
-        <p:spPr/>
-        <p:txBody>
-          <a:bodyPr/>
-          <a:lstStyle/>
-          <a:p>
-            <a:r>
-              <a:rPr lang="en-US" dirty="0"/>
-              <a:t>Thermal Conductivity Degradation</a:t>
-            </a:r>
-          </a:p>
-        </p:txBody>
-      </p:sp>
-      <p:sp>
-        <p:nvSpPr>
-          <p:cNvPr id="3" name="Content Placeholder 2">
-            <a:extLst>
-              <a:ext uri="{FF2B5EF4-FFF2-40B4-BE49-F238E27FC236}">
-                <a16:creationId xmlns:a16="http://schemas.microsoft.com/office/drawing/2014/main" id="{A3756E65-B45F-DE49-A02A-453904A0D063}"/>
-              </a:ext>
-            </a:extLst>
-          </p:cNvPr>
-          <p:cNvSpPr>
-            <a:spLocks noGrp="1"/>
-          </p:cNvSpPr>
-          <p:nvPr>
-            <p:ph sz="half" idx="1"/>
-          </p:nvPr>
-        </p:nvSpPr>
-        <p:spPr>
-          <a:xfrm>
-            <a:off x="609600" y="1968503"/>
-            <a:ext cx="5855746" cy="4157663"/>
-          </a:xfrm>
-        </p:spPr>
-        <p:txBody>
-          <a:bodyPr/>
-          <a:lstStyle/>
-          <a:p>
-            <a:endParaRPr lang="en-US" sz="2400" dirty="0"/>
-          </a:p>
-          <a:p>
-            <a:endParaRPr lang="en-US" sz="2400" dirty="0"/>
-          </a:p>
-        </p:txBody>
-      </p:sp>
-      <p:pic>
-        <p:nvPicPr>
-          <p:cNvPr id="6" name="Content Placeholder 5">
-            <a:extLst>
-              <a:ext uri="{FF2B5EF4-FFF2-40B4-BE49-F238E27FC236}">
-                <a16:creationId xmlns:a16="http://schemas.microsoft.com/office/drawing/2014/main" id="{ACE0CC0A-2F1F-9C40-A2D7-AD26591F93E9}"/>
-              </a:ext>
-            </a:extLst>
-          </p:cNvPr>
-          <p:cNvPicPr>
-            <a:picLocks noGrp="1" noChangeAspect="1"/>
-          </p:cNvPicPr>
-          <p:nvPr>
-            <p:ph sz="half" idx="2"/>
-          </p:nvPr>
-        </p:nvPicPr>
-        <p:blipFill>
-          <a:blip r:embed="rId2" cstate="email">
-            <a:extLst>
-              <a:ext uri="{28A0092B-C50C-407E-A947-70E740481C1C}">
-                <a14:useLocalDpi xmlns:a14="http://schemas.microsoft.com/office/drawing/2010/main"/>
-              </a:ext>
-            </a:extLst>
-          </a:blip>
-          <a:stretch>
-            <a:fillRect/>
-          </a:stretch>
-        </p:blipFill>
-        <p:spPr>
-          <a:xfrm>
-            <a:off x="6515910" y="2345018"/>
-            <a:ext cx="2969338" cy="3141382"/>
-          </a:xfrm>
-          <a:prstGeom prst="rect">
-            <a:avLst/>
-          </a:prstGeom>
-        </p:spPr>
-      </p:pic>
-      <p:pic>
-        <p:nvPicPr>
-          <p:cNvPr id="7" name="Picture 6">
-            <a:extLst>
-              <a:ext uri="{FF2B5EF4-FFF2-40B4-BE49-F238E27FC236}">
-                <a16:creationId xmlns:a16="http://schemas.microsoft.com/office/drawing/2014/main" id="{B091F565-C9AC-7C4E-9D36-E5BA8BDE1065}"/>
-              </a:ext>
-            </a:extLst>
-          </p:cNvPr>
-          <p:cNvPicPr>
-            <a:picLocks noChangeAspect="1"/>
-          </p:cNvPicPr>
-          <p:nvPr/>
-        </p:nvPicPr>
-        <p:blipFill>
-          <a:blip r:embed="rId3" cstate="email">
-            <a:extLst>
-              <a:ext uri="{28A0092B-C50C-407E-A947-70E740481C1C}">
-                <a14:useLocalDpi xmlns:a14="http://schemas.microsoft.com/office/drawing/2010/main"/>
-              </a:ext>
-            </a:extLst>
-          </a:blip>
-          <a:stretch>
-            <a:fillRect/>
-          </a:stretch>
-        </p:blipFill>
-        <p:spPr>
-          <a:xfrm>
-            <a:off x="9383411" y="2011366"/>
-            <a:ext cx="2808589" cy="3475034"/>
-          </a:xfrm>
-          <a:prstGeom prst="rect">
-            <a:avLst/>
-          </a:prstGeom>
-        </p:spPr>
-      </p:pic>
-      <p:sp>
-        <p:nvSpPr>
-          <p:cNvPr id="9" name="Content Placeholder 2">
-            <a:extLst>
-              <a:ext uri="{FF2B5EF4-FFF2-40B4-BE49-F238E27FC236}">
-                <a16:creationId xmlns:a16="http://schemas.microsoft.com/office/drawing/2014/main" id="{22A99754-751D-8C40-9109-7DA406691619}"/>
-              </a:ext>
-            </a:extLst>
-          </p:cNvPr>
-          <p:cNvSpPr txBox="1">
-            <a:spLocks/>
-          </p:cNvSpPr>
-          <p:nvPr/>
-        </p:nvSpPr>
-        <p:spPr bwMode="auto">
-          <a:xfrm>
-            <a:off x="762000" y="2120903"/>
-            <a:ext cx="5544207" cy="4157663"/>
-          </a:xfrm>
-          <a:prstGeom prst="rect">
-            <a:avLst/>
-          </a:prstGeom>
-          <a:noFill/>
-          <a:ln>
-            <a:noFill/>
-          </a:ln>
-          <a:extLst>
-            <a:ext uri="{909E8E84-426E-40dd-AFC4-6F175D3DCCD1}">
-              <a14:hiddenFill xmlns="" xmlns:a14="http://schemas.microsoft.com/office/drawing/2010/main">
-                <a:solidFill>
-                  <a:srgbClr val="FFFFFF"/>
-                </a:solidFill>
-              </a14:hiddenFill>
-            </a:ext>
-            <a:ext uri="{91240B29-F687-4f45-9708-019B960494DF}">
-              <a14:hiddenLine xmlns="" xmlns:a14="http://schemas.microsoft.com/office/drawing/2010/main" w="9525">
-                <a:solidFill>
-                  <a:srgbClr val="000000"/>
-                </a:solidFill>
-                <a:miter lim="800000"/>
-                <a:headEnd/>
-                <a:tailEnd/>
-              </a14:hiddenLine>
-            </a:ext>
-            <a:ext uri="{FAA26D3D-D897-4be2-8F04-BA451C77F1D7}">
-              <ma14:placeholderFlag xmlns="" xmlns:ma14="http://schemas.microsoft.com/office/mac/drawingml/2011/main" val="1"/>
-            </a:ext>
-          </a:extLst>
-        </p:spPr>
-        <p:txBody>
-          <a:bodyPr vert="horz" wrap="square" lIns="91440" tIns="45720" rIns="91440" bIns="45720" numCol="1" anchor="t" anchorCtr="0" compatLnSpc="1">
-            <a:prstTxWarp prst="textNoShape">
-              <a:avLst/>
-            </a:prstTxWarp>
-          </a:bodyPr>
-          <a:lstStyle>
-            <a:lvl1pPr marL="457189" indent="-457189" algn="l" defTabSz="609585" rtl="0" eaLnBrk="1" fontAlgn="base" hangingPunct="1">
-              <a:spcBef>
-                <a:spcPct val="20000"/>
-              </a:spcBef>
-              <a:spcAft>
-                <a:spcPct val="0"/>
-              </a:spcAft>
-              <a:buFont typeface="Arial" charset="0"/>
-              <a:buChar char="•"/>
-              <a:defRPr sz="3733" kern="1200">
-                <a:solidFill>
-                  <a:schemeClr val="tx1"/>
-                </a:solidFill>
-                <a:latin typeface="Arial"/>
-                <a:ea typeface="ＭＳ Ｐゴシック" charset="0"/>
-                <a:cs typeface="Arial"/>
-              </a:defRPr>
-            </a:lvl1pPr>
-            <a:lvl2pPr marL="990575" indent="-380990" algn="l" defTabSz="609585" rtl="0" eaLnBrk="1" fontAlgn="base" hangingPunct="1">
-              <a:spcBef>
-                <a:spcPct val="20000"/>
-              </a:spcBef>
-              <a:spcAft>
-                <a:spcPct val="0"/>
-              </a:spcAft>
-              <a:buFont typeface="Arial" charset="0"/>
-              <a:buChar char="–"/>
-              <a:defRPr sz="3200" kern="1200">
-                <a:solidFill>
-                  <a:schemeClr val="tx1"/>
-                </a:solidFill>
-                <a:latin typeface="Arial"/>
-                <a:ea typeface="ＭＳ Ｐゴシック" charset="0"/>
-                <a:cs typeface="Arial"/>
-              </a:defRPr>
-            </a:lvl2pPr>
-            <a:lvl3pPr marL="1523962" indent="-304792" algn="l" defTabSz="609585" rtl="0" eaLnBrk="1" fontAlgn="base" hangingPunct="1">
-              <a:spcBef>
-                <a:spcPct val="20000"/>
-              </a:spcBef>
-              <a:spcAft>
-                <a:spcPct val="0"/>
-              </a:spcAft>
-              <a:buFont typeface="Arial" charset="0"/>
-              <a:buChar char="•"/>
-              <a:defRPr sz="2667" kern="1200">
-                <a:solidFill>
-                  <a:schemeClr val="tx1"/>
-                </a:solidFill>
-                <a:latin typeface="Arial"/>
-                <a:ea typeface="ＭＳ Ｐゴシック" charset="0"/>
-                <a:cs typeface="Arial"/>
-              </a:defRPr>
-            </a:lvl3pPr>
-            <a:lvl4pPr marL="2133547" indent="-304792" algn="l" defTabSz="609585" rtl="0" eaLnBrk="1" fontAlgn="base" hangingPunct="1">
-              <a:spcBef>
-                <a:spcPct val="20000"/>
-              </a:spcBef>
-              <a:spcAft>
-                <a:spcPct val="0"/>
-              </a:spcAft>
-              <a:buFont typeface="Arial" charset="0"/>
-              <a:buChar char="–"/>
-              <a:defRPr sz="2400" kern="1200">
-                <a:solidFill>
-                  <a:schemeClr val="tx1"/>
-                </a:solidFill>
-                <a:latin typeface="Arial"/>
-                <a:ea typeface="ＭＳ Ｐゴシック" charset="0"/>
-                <a:cs typeface="Arial"/>
-              </a:defRPr>
-            </a:lvl4pPr>
-            <a:lvl5pPr marL="2743131" indent="-304792" algn="l" defTabSz="609585" rtl="0" eaLnBrk="1" fontAlgn="base" hangingPunct="1">
-              <a:spcBef>
-                <a:spcPct val="20000"/>
-              </a:spcBef>
-              <a:spcAft>
-                <a:spcPct val="0"/>
-              </a:spcAft>
-              <a:buFont typeface="Arial" charset="0"/>
-              <a:buChar char="»"/>
-              <a:defRPr sz="2400" kern="1200">
-                <a:solidFill>
-                  <a:schemeClr val="tx1"/>
-                </a:solidFill>
-                <a:latin typeface="Arial"/>
-                <a:ea typeface="ＭＳ Ｐゴシック" charset="0"/>
-                <a:cs typeface="Arial"/>
-              </a:defRPr>
-            </a:lvl5pPr>
-            <a:lvl6pPr marL="3352716" indent="-304792" algn="l" defTabSz="609585" rtl="0" eaLnBrk="1" latinLnBrk="0" hangingPunct="1">
-              <a:spcBef>
-                <a:spcPct val="20000"/>
-              </a:spcBef>
-              <a:buFont typeface="Arial"/>
-              <a:buChar char="•"/>
-              <a:defRPr sz="2400" kern="1200">
-                <a:solidFill>
-                  <a:schemeClr val="tx1"/>
-                </a:solidFill>
-                <a:latin typeface="+mn-lt"/>
-                <a:ea typeface="+mn-ea"/>
-                <a:cs typeface="+mn-cs"/>
-              </a:defRPr>
-            </a:lvl6pPr>
-            <a:lvl7pPr marL="3962301" indent="-304792" algn="l" defTabSz="609585" rtl="0" eaLnBrk="1" latinLnBrk="0" hangingPunct="1">
-              <a:spcBef>
-                <a:spcPct val="20000"/>
-              </a:spcBef>
-              <a:buFont typeface="Arial"/>
-              <a:buChar char="•"/>
-              <a:defRPr sz="2400" kern="1200">
-                <a:solidFill>
-                  <a:schemeClr val="tx1"/>
-                </a:solidFill>
-                <a:latin typeface="+mn-lt"/>
-                <a:ea typeface="+mn-ea"/>
-                <a:cs typeface="+mn-cs"/>
-              </a:defRPr>
-            </a:lvl7pPr>
-            <a:lvl8pPr marL="4571886" indent="-304792" algn="l" defTabSz="609585" rtl="0" eaLnBrk="1" latinLnBrk="0" hangingPunct="1">
-              <a:spcBef>
-                <a:spcPct val="20000"/>
-              </a:spcBef>
-              <a:buFont typeface="Arial"/>
-              <a:buChar char="•"/>
-              <a:defRPr sz="2400" kern="1200">
-                <a:solidFill>
-                  <a:schemeClr val="tx1"/>
-                </a:solidFill>
-                <a:latin typeface="+mn-lt"/>
-                <a:ea typeface="+mn-ea"/>
-                <a:cs typeface="+mn-cs"/>
-              </a:defRPr>
-            </a:lvl8pPr>
-            <a:lvl9pPr marL="5181470" indent="-304792" algn="l" defTabSz="609585" rtl="0" eaLnBrk="1" latinLnBrk="0" hangingPunct="1">
-              <a:spcBef>
-                <a:spcPct val="20000"/>
-              </a:spcBef>
-              <a:buFont typeface="Arial"/>
-              <a:buChar char="•"/>
-              <a:defRPr sz="2400" kern="1200">
-                <a:solidFill>
-                  <a:schemeClr val="tx1"/>
-                </a:solidFill>
-                <a:latin typeface="+mn-lt"/>
-                <a:ea typeface="+mn-ea"/>
-                <a:cs typeface="+mn-cs"/>
-              </a:defRPr>
-            </a:lvl9pPr>
-          </a:lstStyle>
-          <a:p>
-            <a:r>
-              <a:rPr lang="en-US" sz="2000" dirty="0"/>
-              <a:t>The thermal defect resistance is defined as the difference between the reciprocals of the irradiated and nonirradiated thermal conductivity (1/</a:t>
-            </a:r>
-            <a:r>
-              <a:rPr lang="en-US" sz="2000" dirty="0" err="1"/>
-              <a:t>K</a:t>
-            </a:r>
-            <a:r>
-              <a:rPr lang="en-US" sz="2000" baseline="-25000" dirty="0" err="1"/>
-              <a:t>rd</a:t>
-            </a:r>
-            <a:r>
-              <a:rPr lang="en-US" sz="2000" dirty="0"/>
-              <a:t> = 1/</a:t>
-            </a:r>
-            <a:r>
-              <a:rPr lang="en-US" sz="2000" dirty="0" err="1"/>
-              <a:t>K</a:t>
-            </a:r>
-            <a:r>
-              <a:rPr lang="en-US" sz="2000" baseline="-25000" dirty="0" err="1"/>
-              <a:t>irr</a:t>
-            </a:r>
-            <a:r>
-              <a:rPr lang="en-US" sz="2000" dirty="0"/>
-              <a:t> – 1/</a:t>
-            </a:r>
-            <a:r>
-              <a:rPr lang="en-US" sz="2000" dirty="0" err="1"/>
-              <a:t>K</a:t>
-            </a:r>
-            <a:r>
-              <a:rPr lang="en-US" sz="2000" baseline="-25000" dirty="0" err="1"/>
-              <a:t>nonirr</a:t>
-            </a:r>
-            <a:r>
-              <a:rPr lang="en-US" sz="2000" dirty="0"/>
-              <a:t>)</a:t>
-            </a:r>
-          </a:p>
-          <a:p>
-            <a:r>
-              <a:rPr lang="en-US" sz="2000" dirty="0"/>
-              <a:t>This term can be related directly to the defect type and concentration present in irradiated ceramics</a:t>
-            </a:r>
-          </a:p>
-          <a:p>
-            <a:r>
-              <a:rPr lang="en-US" sz="2000" dirty="0"/>
-              <a:t>The thermal defect resistance is directly proportional to the irradiation-induced swelling in </a:t>
-            </a:r>
-            <a:r>
-              <a:rPr lang="en-US" sz="2000" dirty="0" err="1"/>
-              <a:t>SiC</a:t>
-            </a:r>
-            <a:endParaRPr lang="en-US" sz="2000" dirty="0"/>
-          </a:p>
-          <a:p>
-            <a:r>
-              <a:rPr lang="en-US" sz="2000" dirty="0"/>
-              <a:t>This allows an indirect determination of thermal conductivity by measurement of the density change in the TRISO </a:t>
-            </a:r>
-            <a:r>
-              <a:rPr lang="en-US" sz="2000" dirty="0" err="1"/>
-              <a:t>SiC</a:t>
-            </a:r>
-            <a:r>
-              <a:rPr lang="en-US" sz="2000" dirty="0"/>
-              <a:t> shell</a:t>
-            </a:r>
-          </a:p>
-          <a:p>
-            <a:pPr marL="0" indent="0">
-              <a:buNone/>
-            </a:pPr>
-            <a:endParaRPr lang="en-US" sz="2000" dirty="0"/>
-          </a:p>
-          <a:p>
-            <a:endParaRPr lang="en-US" sz="2000" dirty="0"/>
-          </a:p>
-          <a:p>
-            <a:endParaRPr lang="en-US" sz="2000" dirty="0"/>
-          </a:p>
-          <a:p>
-            <a:endParaRPr lang="en-US" sz="2000" dirty="0"/>
-          </a:p>
-          <a:p>
-            <a:endParaRPr lang="en-US" sz="2000" dirty="0"/>
-          </a:p>
-        </p:txBody>
-      </p:sp>
-      <p:sp>
-        <p:nvSpPr>
-          <p:cNvPr id="4" name="Slide Number Placeholder 3">
-            <a:extLst>
-              <a:ext uri="{FF2B5EF4-FFF2-40B4-BE49-F238E27FC236}">
-                <a16:creationId xmlns:a16="http://schemas.microsoft.com/office/drawing/2014/main" id="{282BE51A-AAD1-984F-8E06-3D029832E119}"/>
-              </a:ext>
-            </a:extLst>
-          </p:cNvPr>
-          <p:cNvSpPr>
-            <a:spLocks noGrp="1"/>
-          </p:cNvSpPr>
-          <p:nvPr>
-            <p:ph type="sldNum" sz="quarter" idx="12"/>
-          </p:nvPr>
-        </p:nvSpPr>
-        <p:spPr/>
-        <p:txBody>
-          <a:bodyPr/>
-          <a:lstStyle/>
-          <a:p>
-            <a:pPr>
-              <a:defRPr/>
-            </a:pPr>
-            <a:fld id="{EC35E9FC-F6D5-0349-BBED-EA7D7A9BC49B}" type="slidenum">
-              <a:rPr lang="en-US" smtClean="0"/>
-              <a:pPr>
-                <a:defRPr/>
-              </a:pPr>
-              <a:t>20</a:t>
-            </a:fld>
-            <a:endParaRPr lang="en-US"/>
-          </a:p>
-        </p:txBody>
-      </p:sp>
-    </p:spTree>
-    <p:extLst>
-      <p:ext uri="{BB962C8B-B14F-4D97-AF65-F5344CB8AC3E}">
-        <p14:creationId xmlns:p14="http://schemas.microsoft.com/office/powerpoint/2010/main" val="3320645494"/>
-      </p:ext>
-    </p:extLst>
-  </p:cSld>
-  <p:clrMapOvr>
-    <a:masterClrMapping/>
-  </p:clrMapOvr>
-</p:sld>
-</file>
-
-<file path=ppt/slides/slide21.xml><?xml version="1.0" encoding="utf-8"?>
-<p:sld xmlns:a="http://schemas.openxmlformats.org/drawingml/2006/main" xmlns:r="http://schemas.openxmlformats.org/officeDocument/2006/relationships" xmlns:p="http://schemas.openxmlformats.org/presentationml/2006/main">
-  <p:cSld>
-    <p:spTree>
-      <p:nvGrpSpPr>
-        <p:cNvPr id="1" name=""/>
-        <p:cNvGrpSpPr/>
-        <p:nvPr/>
-      </p:nvGrpSpPr>
-      <p:grpSpPr>
-        <a:xfrm>
-          <a:off x="0" y="0"/>
-          <a:ext cx="0" cy="0"/>
-          <a:chOff x="0" y="0"/>
-          <a:chExt cx="0" cy="0"/>
-        </a:xfrm>
-      </p:grpSpPr>
-      <p:sp>
-        <p:nvSpPr>
-          <p:cNvPr id="2" name="Title 1">
-            <a:extLst>
-              <a:ext uri="{FF2B5EF4-FFF2-40B4-BE49-F238E27FC236}">
-                <a16:creationId xmlns:a16="http://schemas.microsoft.com/office/drawing/2014/main" id="{C730F246-B5CC-9544-B2A6-036175CF44C5}"/>
-              </a:ext>
-            </a:extLst>
-          </p:cNvPr>
-          <p:cNvSpPr>
-            <a:spLocks noGrp="1"/>
-          </p:cNvSpPr>
-          <p:nvPr>
-            <p:ph type="title"/>
-          </p:nvPr>
-        </p:nvSpPr>
-        <p:spPr/>
-        <p:txBody>
-          <a:bodyPr/>
-          <a:lstStyle/>
-          <a:p>
-            <a:r>
-              <a:rPr lang="en-US" dirty="0"/>
-              <a:t>Thermal Conductivity Degradation</a:t>
-            </a:r>
-          </a:p>
-        </p:txBody>
-      </p:sp>
-      <p:sp>
-        <p:nvSpPr>
-          <p:cNvPr id="3" name="Content Placeholder 2">
-            <a:extLst>
-              <a:ext uri="{FF2B5EF4-FFF2-40B4-BE49-F238E27FC236}">
-                <a16:creationId xmlns:a16="http://schemas.microsoft.com/office/drawing/2014/main" id="{EA27E7EA-9334-B745-88DC-5034E8BF2B52}"/>
-              </a:ext>
-            </a:extLst>
-          </p:cNvPr>
-          <p:cNvSpPr>
-            <a:spLocks noGrp="1"/>
-          </p:cNvSpPr>
-          <p:nvPr>
-            <p:ph sz="half" idx="1"/>
-          </p:nvPr>
-        </p:nvSpPr>
-        <p:spPr>
-          <a:xfrm>
-            <a:off x="609599" y="1968503"/>
-            <a:ext cx="5769686" cy="4157663"/>
-          </a:xfrm>
-        </p:spPr>
-        <p:txBody>
-          <a:bodyPr/>
-          <a:lstStyle/>
-          <a:p>
-            <a:r>
-              <a:rPr lang="en-US" sz="2200" dirty="0"/>
-              <a:t>In the high temperature void swelling regime, thermal conductivity degradation is not expected to saturate, as voids continue to grow and scatter phonons</a:t>
-            </a:r>
-          </a:p>
-          <a:p>
-            <a:r>
-              <a:rPr lang="en-US" sz="2200" dirty="0"/>
-              <a:t>Additionally, the linear relationship between swelling and thermal defect resistance does not exist at high temperature</a:t>
-            </a:r>
-          </a:p>
-          <a:p>
-            <a:r>
-              <a:rPr lang="en-US" sz="2200" dirty="0"/>
-              <a:t>Generally, void swelling does not degrade thermal conductivity as severely as point defects, but data at high T is quite limited</a:t>
-            </a:r>
-          </a:p>
-          <a:p>
-            <a:endParaRPr lang="en-US" sz="2200" dirty="0"/>
-          </a:p>
-        </p:txBody>
-      </p:sp>
-      <p:pic>
-        <p:nvPicPr>
-          <p:cNvPr id="5" name="Content Placeholder 4">
-            <a:extLst>
-              <a:ext uri="{FF2B5EF4-FFF2-40B4-BE49-F238E27FC236}">
-                <a16:creationId xmlns:a16="http://schemas.microsoft.com/office/drawing/2014/main" id="{FE2CBB67-EB10-A74E-B49A-35E6A1508B6F}"/>
-              </a:ext>
-            </a:extLst>
-          </p:cNvPr>
-          <p:cNvPicPr>
-            <a:picLocks noGrp="1" noChangeAspect="1"/>
-          </p:cNvPicPr>
-          <p:nvPr>
-            <p:ph sz="half" idx="2"/>
-          </p:nvPr>
-        </p:nvPicPr>
-        <p:blipFill>
-          <a:blip r:embed="rId2" cstate="email">
-            <a:extLst>
-              <a:ext uri="{28A0092B-C50C-407E-A947-70E740481C1C}">
-                <a14:useLocalDpi xmlns:a14="http://schemas.microsoft.com/office/drawing/2010/main"/>
-              </a:ext>
-            </a:extLst>
-          </a:blip>
-          <a:stretch>
-            <a:fillRect/>
-          </a:stretch>
-        </p:blipFill>
-        <p:spPr>
-          <a:xfrm>
-            <a:off x="6197600" y="1981306"/>
-            <a:ext cx="5384800" cy="4132051"/>
-          </a:xfrm>
-          <a:prstGeom prst="rect">
-            <a:avLst/>
-          </a:prstGeom>
-        </p:spPr>
-      </p:pic>
-      <p:sp>
-        <p:nvSpPr>
-          <p:cNvPr id="4" name="Slide Number Placeholder 3">
-            <a:extLst>
-              <a:ext uri="{FF2B5EF4-FFF2-40B4-BE49-F238E27FC236}">
-                <a16:creationId xmlns:a16="http://schemas.microsoft.com/office/drawing/2014/main" id="{75255BDD-884B-2741-8566-BD77231A5E05}"/>
-              </a:ext>
-            </a:extLst>
-          </p:cNvPr>
-          <p:cNvSpPr>
-            <a:spLocks noGrp="1"/>
-          </p:cNvSpPr>
-          <p:nvPr>
-            <p:ph type="sldNum" sz="quarter" idx="12"/>
-          </p:nvPr>
-        </p:nvSpPr>
-        <p:spPr/>
-        <p:txBody>
-          <a:bodyPr/>
-          <a:lstStyle/>
-          <a:p>
-            <a:pPr>
-              <a:defRPr/>
-            </a:pPr>
-            <a:fld id="{EC35E9FC-F6D5-0349-BBED-EA7D7A9BC49B}" type="slidenum">
-              <a:rPr lang="en-US" smtClean="0"/>
-              <a:pPr>
-                <a:defRPr/>
-              </a:pPr>
-              <a:t>21</a:t>
-            </a:fld>
-            <a:endParaRPr lang="en-US"/>
-          </a:p>
-        </p:txBody>
-      </p:sp>
-    </p:spTree>
-    <p:extLst>
-      <p:ext uri="{BB962C8B-B14F-4D97-AF65-F5344CB8AC3E}">
-        <p14:creationId xmlns:p14="http://schemas.microsoft.com/office/powerpoint/2010/main" val="2124457683"/>
-      </p:ext>
-    </p:extLst>
-  </p:cSld>
-  <p:clrMapOvr>
-    <a:masterClrMapping/>
-  </p:clrMapOvr>
-</p:sld>
-</file>
-
 <file path=ppt/slides/slide3.xml><?xml version="1.0" encoding="utf-8"?>
 <p:sld xmlns:a="http://schemas.openxmlformats.org/drawingml/2006/main" xmlns:r="http://schemas.openxmlformats.org/officeDocument/2006/relationships" xmlns:p="http://schemas.openxmlformats.org/presentationml/2006/main">
   <p:cSld>
@@ -7716,7 +5889,7 @@
           <p:cNvPr id="2" name="Title 1">
             <a:extLst>
               <a:ext uri="{FF2B5EF4-FFF2-40B4-BE49-F238E27FC236}">
-                <a16:creationId xmlns:a16="http://schemas.microsoft.com/office/drawing/2014/main" id="{297947CF-EAEA-5F40-93E5-30922295C42A}"/>
+                <a16:creationId xmlns:a16="http://schemas.microsoft.com/office/drawing/2014/main" id="{7D15B8A0-BF30-1440-97BD-9FCCBD7373F7}"/>
               </a:ext>
             </a:extLst>
           </p:cNvPr>
@@ -7734,17 +5907,173 @@
           <a:p>
             <a:r>
               <a:rPr lang="en-US" dirty="0"/>
-              <a:t>Silicon Carbide</a:t>
-            </a:r>
-          </a:p>
-        </p:txBody>
-      </p:sp>
-      <p:sp>
-        <p:nvSpPr>
-          <p:cNvPr id="3" name="Slide Number Placeholder 2">
+              <a:t>Saturation Swelling in </a:t>
+            </a:r>
+            <a:r>
+              <a:rPr lang="en-US" dirty="0" err="1"/>
+              <a:t>SiC</a:t>
+            </a:r>
+            <a:endParaRPr lang="en-US" dirty="0"/>
+          </a:p>
+        </p:txBody>
+      </p:sp>
+      <p:sp>
+        <p:nvSpPr>
+          <p:cNvPr id="3" name="Content Placeholder 2">
             <a:extLst>
               <a:ext uri="{FF2B5EF4-FFF2-40B4-BE49-F238E27FC236}">
-                <a16:creationId xmlns:a16="http://schemas.microsoft.com/office/drawing/2014/main" id="{5C119F45-AD4E-DB44-9BDF-31513E0DD6DB}"/>
+                <a16:creationId xmlns:a16="http://schemas.microsoft.com/office/drawing/2014/main" id="{0C9D6EBB-A39D-884F-B14C-39C6B20CF978}"/>
+              </a:ext>
+            </a:extLst>
+          </p:cNvPr>
+          <p:cNvSpPr>
+            <a:spLocks noGrp="1"/>
+          </p:cNvSpPr>
+          <p:nvPr>
+            <p:ph sz="half" idx="1"/>
+          </p:nvPr>
+        </p:nvSpPr>
+        <p:spPr>
+          <a:xfrm>
+            <a:off x="609599" y="1968503"/>
+            <a:ext cx="5769685" cy="4157663"/>
+          </a:xfrm>
+        </p:spPr>
+        <p:txBody>
+          <a:bodyPr/>
+          <a:lstStyle/>
+          <a:p>
+            <a:r>
+              <a:rPr lang="en-US" sz="2400" dirty="0"/>
+              <a:t>Log swelling vs dose shown at right for CVD </a:t>
+            </a:r>
+            <a:r>
+              <a:rPr lang="en-US" sz="2400" dirty="0" err="1"/>
+              <a:t>SiC</a:t>
+            </a:r>
+            <a:r>
+              <a:rPr lang="en-US" sz="2400" dirty="0"/>
+              <a:t> irradiated in HFIR</a:t>
+            </a:r>
+          </a:p>
+          <a:p>
+            <a:r>
+              <a:rPr lang="en-US" sz="2400" dirty="0"/>
+              <a:t>The swelling of </a:t>
+            </a:r>
+            <a:r>
+              <a:rPr lang="en-US" sz="2400" dirty="0" err="1"/>
+              <a:t>SiC</a:t>
+            </a:r>
+            <a:r>
+              <a:rPr lang="en-US" sz="2400" dirty="0"/>
+              <a:t> is highly temperature dependent</a:t>
+            </a:r>
+          </a:p>
+          <a:p>
+            <a:pPr lvl="1"/>
+            <a:r>
+              <a:rPr lang="en-US" sz="1867" dirty="0"/>
+              <a:t>at 1 dpa, saturation values from 200 C to 800 C vary by a factor of 5</a:t>
+            </a:r>
+          </a:p>
+          <a:p>
+            <a:r>
+              <a:rPr lang="en-US" sz="2400" dirty="0"/>
+              <a:t>The decrease in saturation with increasing T is due to increased recombination of defects</a:t>
+            </a:r>
+          </a:p>
+          <a:p>
+            <a:r>
+              <a:rPr lang="en-US" sz="2400" dirty="0"/>
+              <a:t>Swelling saturates at relatively low doses, less than 10 dpa</a:t>
+            </a:r>
+          </a:p>
+        </p:txBody>
+      </p:sp>
+      <p:pic>
+        <p:nvPicPr>
+          <p:cNvPr id="6" name="Picture 5">
+            <a:extLst>
+              <a:ext uri="{FF2B5EF4-FFF2-40B4-BE49-F238E27FC236}">
+                <a16:creationId xmlns:a16="http://schemas.microsoft.com/office/drawing/2014/main" id="{B841284E-76ED-6C42-A0AC-3A121F12F2BE}"/>
+              </a:ext>
+              <a:ext uri="{C183D7F6-B498-43B3-948B-1728B52AA6E4}">
+                <adec:decorative xmlns:adec="http://schemas.microsoft.com/office/drawing/2017/decorative" val="1"/>
+              </a:ext>
+            </a:extLst>
+          </p:cNvPr>
+          <p:cNvPicPr>
+            <a:picLocks noChangeAspect="1"/>
+          </p:cNvPicPr>
+          <p:nvPr/>
+        </p:nvPicPr>
+        <p:blipFill>
+          <a:blip r:embed="rId2" cstate="email">
+            <a:extLst>
+              <a:ext uri="{28A0092B-C50C-407E-A947-70E740481C1C}">
+                <a14:useLocalDpi xmlns:a14="http://schemas.microsoft.com/office/drawing/2010/main"/>
+              </a:ext>
+            </a:extLst>
+          </a:blip>
+          <a:stretch>
+            <a:fillRect/>
+          </a:stretch>
+        </p:blipFill>
+        <p:spPr>
+          <a:xfrm rot="16200000">
+            <a:off x="9722293" y="1940985"/>
+            <a:ext cx="2844800" cy="631131"/>
+          </a:xfrm>
+          <a:prstGeom prst="rect">
+            <a:avLst/>
+          </a:prstGeom>
+        </p:spPr>
+      </p:pic>
+      <p:pic>
+        <p:nvPicPr>
+          <p:cNvPr id="10" name="Content Placeholder 9" descr="Swelling percent of SiC as a function of dose at different temperatures">
+            <a:extLst>
+              <a:ext uri="{FF2B5EF4-FFF2-40B4-BE49-F238E27FC236}">
+                <a16:creationId xmlns:a16="http://schemas.microsoft.com/office/drawing/2014/main" id="{79E1832C-7411-3443-9900-A8C2E4757AB8}"/>
+              </a:ext>
+            </a:extLst>
+          </p:cNvPr>
+          <p:cNvPicPr>
+            <a:picLocks noGrp="1" noChangeAspect="1"/>
+          </p:cNvPicPr>
+          <p:nvPr>
+            <p:ph sz="half" idx="2"/>
+          </p:nvPr>
+        </p:nvPicPr>
+        <p:blipFill>
+          <a:blip r:embed="rId3" cstate="email">
+            <a:extLst>
+              <a:ext uri="{28A0092B-C50C-407E-A947-70E740481C1C}">
+                <a14:useLocalDpi xmlns:a14="http://schemas.microsoft.com/office/drawing/2010/main"/>
+              </a:ext>
+            </a:extLst>
+          </a:blip>
+          <a:stretch>
+            <a:fillRect/>
+          </a:stretch>
+        </p:blipFill>
+        <p:spPr>
+          <a:xfrm>
+            <a:off x="8060105" y="745756"/>
+            <a:ext cx="2646881" cy="3021591"/>
+          </a:xfrm>
+          <a:prstGeom prst="rect">
+            <a:avLst/>
+          </a:prstGeom>
+        </p:spPr>
+      </p:pic>
+      <p:sp>
+        <p:nvSpPr>
+          <p:cNvPr id="4" name="Slide Number Placeholder 3">
+            <a:extLst>
+              <a:ext uri="{FF2B5EF4-FFF2-40B4-BE49-F238E27FC236}">
+                <a16:creationId xmlns:a16="http://schemas.microsoft.com/office/drawing/2014/main" id="{20782E88-0D33-9D41-801A-A4A219FAA716}"/>
               </a:ext>
             </a:extLst>
           </p:cNvPr>
@@ -7763,7 +6092,7 @@
             <a:pPr>
               <a:defRPr/>
             </a:pPr>
-            <a:fld id="{0DA6BD0F-ABBC-C14D-BC96-77BE126A748B}" type="slidenum">
+            <a:fld id="{EC35E9FC-F6D5-0349-BBED-EA7D7A9BC49B}" type="slidenum">
               <a:rPr lang="en-US" smtClean="0"/>
               <a:pPr>
                 <a:defRPr/>
@@ -7774,10 +6103,174 @@
           </a:p>
         </p:txBody>
       </p:sp>
+      <p:pic>
+        <p:nvPicPr>
+          <p:cNvPr id="5" name="Picture 4" descr="Micrograph showing defects forming">
+            <a:extLst>
+              <a:ext uri="{FF2B5EF4-FFF2-40B4-BE49-F238E27FC236}">
+                <a16:creationId xmlns:a16="http://schemas.microsoft.com/office/drawing/2014/main" id="{D14E6347-7AA5-664F-E3FA-50365FED591A}"/>
+              </a:ext>
+            </a:extLst>
+          </p:cNvPr>
+          <p:cNvPicPr>
+            <a:picLocks noChangeAspect="1"/>
+          </p:cNvPicPr>
+          <p:nvPr/>
+        </p:nvPicPr>
+        <p:blipFill>
+          <a:blip r:embed="rId4" cstate="email">
+            <a:extLst>
+              <a:ext uri="{28A0092B-C50C-407E-A947-70E740481C1C}">
+                <a14:useLocalDpi xmlns:a14="http://schemas.microsoft.com/office/drawing/2010/main"/>
+              </a:ext>
+            </a:extLst>
+          </a:blip>
+          <a:stretch>
+            <a:fillRect/>
+          </a:stretch>
+        </p:blipFill>
+        <p:spPr>
+          <a:xfrm>
+            <a:off x="7458978" y="3858435"/>
+            <a:ext cx="4123422" cy="2626441"/>
+          </a:xfrm>
+          <a:prstGeom prst="rect">
+            <a:avLst/>
+          </a:prstGeom>
+        </p:spPr>
+      </p:pic>
+      <p:sp>
+        <p:nvSpPr>
+          <p:cNvPr id="7" name="Rectangle 6">
+            <a:extLst>
+              <a:ext uri="{FF2B5EF4-FFF2-40B4-BE49-F238E27FC236}">
+                <a16:creationId xmlns:a16="http://schemas.microsoft.com/office/drawing/2014/main" id="{09210F7D-D23E-54D4-FDF7-09BBFA6B50E4}"/>
+              </a:ext>
+            </a:extLst>
+          </p:cNvPr>
+          <p:cNvSpPr/>
+          <p:nvPr/>
+        </p:nvSpPr>
+        <p:spPr>
+          <a:xfrm>
+            <a:off x="7716230" y="3943901"/>
+            <a:ext cx="1499600" cy="415498"/>
+          </a:xfrm>
+          <a:prstGeom prst="rect">
+            <a:avLst/>
+          </a:prstGeom>
+          <a:solidFill>
+            <a:schemeClr val="bg1"/>
+          </a:solidFill>
+        </p:spPr>
+        <p:txBody>
+          <a:bodyPr wrap="square">
+            <a:spAutoFit/>
+          </a:bodyPr>
+          <a:lstStyle/>
+          <a:p>
+            <a:pPr algn="ctr"/>
+            <a:r>
+              <a:rPr lang="en-US" sz="700" dirty="0" err="1">
+                <a:latin typeface="Helvetica" pitchFamily="2" charset="0"/>
+              </a:rPr>
+              <a:t>Tirr</a:t>
+            </a:r>
+            <a:r>
+              <a:rPr lang="en-US" sz="700" dirty="0">
+                <a:latin typeface="Helvetica" pitchFamily="2" charset="0"/>
+              </a:rPr>
+              <a:t>=300  C, 6 dpa</a:t>
+            </a:r>
+          </a:p>
+          <a:p>
+            <a:pPr algn="ctr"/>
+            <a:r>
+              <a:rPr lang="en-US" sz="700" dirty="0">
+                <a:latin typeface="Helvetica" pitchFamily="2" charset="0"/>
+              </a:rPr>
+              <a:t>Dot number density  2.2e+24m-3</a:t>
+            </a:r>
+          </a:p>
+          <a:p>
+            <a:pPr algn="ctr"/>
+            <a:r>
+              <a:rPr lang="en-US" sz="700" dirty="0">
+                <a:latin typeface="Helvetica" pitchFamily="2" charset="0"/>
+              </a:rPr>
+              <a:t>Mean dot diameter=1nm</a:t>
+            </a:r>
+          </a:p>
+        </p:txBody>
+      </p:sp>
+      <p:sp>
+        <p:nvSpPr>
+          <p:cNvPr id="8" name="Rectangle 7">
+            <a:extLst>
+              <a:ext uri="{FF2B5EF4-FFF2-40B4-BE49-F238E27FC236}">
+                <a16:creationId xmlns:a16="http://schemas.microsoft.com/office/drawing/2014/main" id="{B45B2144-C6B7-2C3B-D0AE-8AFA2935AA09}"/>
+              </a:ext>
+            </a:extLst>
+          </p:cNvPr>
+          <p:cNvSpPr/>
+          <p:nvPr/>
+        </p:nvSpPr>
+        <p:spPr>
+          <a:xfrm>
+            <a:off x="9671094" y="3943901"/>
+            <a:ext cx="1751649" cy="461665"/>
+          </a:xfrm>
+          <a:prstGeom prst="rect">
+            <a:avLst/>
+          </a:prstGeom>
+          <a:solidFill>
+            <a:schemeClr val="bg1"/>
+          </a:solidFill>
+        </p:spPr>
+        <p:txBody>
+          <a:bodyPr wrap="square">
+            <a:spAutoFit/>
+          </a:bodyPr>
+          <a:lstStyle/>
+          <a:p>
+            <a:pPr algn="ctr"/>
+            <a:r>
+              <a:rPr lang="en-US" sz="800" dirty="0" err="1">
+                <a:latin typeface="Helvetica" pitchFamily="2" charset="0"/>
+              </a:rPr>
+              <a:t>Tirr</a:t>
+            </a:r>
+            <a:r>
+              <a:rPr lang="en-US" sz="800" dirty="0">
+                <a:latin typeface="Helvetica" pitchFamily="2" charset="0"/>
+              </a:rPr>
+              <a:t>= 800  C, 7.7 dpa</a:t>
+            </a:r>
+          </a:p>
+          <a:p>
+            <a:pPr algn="ctr"/>
+            <a:r>
+              <a:rPr lang="en-US" sz="800" dirty="0">
+                <a:latin typeface="Helvetica" pitchFamily="2" charset="0"/>
+              </a:rPr>
+              <a:t>Loop number density  3.3e+23m-3</a:t>
+            </a:r>
+          </a:p>
+          <a:p>
+            <a:pPr algn="ctr"/>
+            <a:r>
+              <a:rPr lang="en-US" sz="800" dirty="0">
+                <a:latin typeface="Helvetica" pitchFamily="2" charset="0"/>
+              </a:rPr>
+              <a:t>Mean loop diameter = 3.0 nm</a:t>
+            </a:r>
+          </a:p>
+        </p:txBody>
+      </p:sp>
     </p:spTree>
     <p:extLst>
       <p:ext uri="{BB962C8B-B14F-4D97-AF65-F5344CB8AC3E}">
-        <p14:creationId xmlns:p14="http://schemas.microsoft.com/office/powerpoint/2010/main" val="2755803430"/>
+        <p14:creationId xmlns:p14="http://schemas.microsoft.com/office/powerpoint/2010/main" val="222066799"/>
       </p:ext>
     </p:extLst>
   </p:cSld>
@@ -7809,7 +6302,7 @@
           <p:cNvPr id="2" name="Title 1">
             <a:extLst>
               <a:ext uri="{FF2B5EF4-FFF2-40B4-BE49-F238E27FC236}">
-                <a16:creationId xmlns:a16="http://schemas.microsoft.com/office/drawing/2014/main" id="{7DC0A1E1-6E18-384F-B1A3-3F786D8E46EF}"/>
+                <a16:creationId xmlns:a16="http://schemas.microsoft.com/office/drawing/2014/main" id="{659957E8-B98C-F044-BD9F-900BAC2054B4}"/>
               </a:ext>
             </a:extLst>
           </p:cNvPr>
@@ -7827,16 +6320,13 @@
           <a:p>
             <a:r>
               <a:rPr lang="en-US" dirty="0"/>
-              <a:t>Silicon Carbide (</a:t>
+              <a:t>High T Radiation Effects in </a:t>
             </a:r>
             <a:r>
               <a:rPr lang="en-US" dirty="0" err="1"/>
               <a:t>SiC</a:t>
             </a:r>
-            <a:r>
-              <a:rPr lang="en-US" dirty="0"/>
-              <a:t>)</a:t>
-            </a:r>
+            <a:endParaRPr lang="en-US" dirty="0"/>
           </a:p>
         </p:txBody>
       </p:sp>
@@ -7845,7 +6335,7 @@
           <p:cNvPr id="3" name="Content Placeholder 2">
             <a:extLst>
               <a:ext uri="{FF2B5EF4-FFF2-40B4-BE49-F238E27FC236}">
-                <a16:creationId xmlns:a16="http://schemas.microsoft.com/office/drawing/2014/main" id="{A780FC78-65F0-0D49-94D5-96503B56A597}"/>
+                <a16:creationId xmlns:a16="http://schemas.microsoft.com/office/drawing/2014/main" id="{880A1D2C-87D7-A84A-BED9-7210B2DFF21B}"/>
               </a:ext>
             </a:extLst>
           </p:cNvPr>
@@ -7859,7 +6349,7 @@
         <p:spPr>
           <a:xfrm>
             <a:off x="609599" y="1968503"/>
-            <a:ext cx="5705139" cy="4157663"/>
+            <a:ext cx="6533479" cy="4157663"/>
           </a:xfrm>
         </p:spPr>
         <p:txBody>
@@ -7867,125 +6357,47 @@
           <a:lstStyle/>
           <a:p>
             <a:r>
-              <a:rPr lang="en-US" sz="2000" dirty="0" err="1"/>
-              <a:t>SiC</a:t>
-            </a:r>
-            <a:r>
-              <a:rPr lang="en-US" sz="2000" dirty="0"/>
-              <a:t> is a very hard and strong non-oxide ceramic that possesses unique thermal and electronic properties</a:t>
-            </a:r>
-          </a:p>
-          <a:p>
-            <a:r>
-              <a:rPr lang="en-US" sz="2000" dirty="0"/>
-              <a:t>Polycrystalline </a:t>
-            </a:r>
-            <a:r>
-              <a:rPr lang="en-US" sz="2000" dirty="0" err="1"/>
-              <a:t>SiC</a:t>
-            </a:r>
-            <a:r>
-              <a:rPr lang="en-US" sz="2000" dirty="0"/>
-              <a:t> has a strength of 15 GPa and has excellent creep resistance</a:t>
-            </a:r>
-          </a:p>
-          <a:p>
-            <a:r>
-              <a:rPr lang="en-US" sz="2000" dirty="0" err="1"/>
-              <a:t>SiC’s</a:t>
-            </a:r>
-            <a:r>
-              <a:rPr lang="en-US" sz="2000" dirty="0"/>
-              <a:t> upper limit of stability is around 2500C and has a melting temperature of around 2830C</a:t>
-            </a:r>
-          </a:p>
-          <a:p>
-            <a:r>
-              <a:rPr lang="en-US" sz="2000" dirty="0" err="1"/>
-              <a:t>SiC</a:t>
-            </a:r>
-            <a:r>
-              <a:rPr lang="en-US" sz="2000" dirty="0"/>
-              <a:t> also has excellent thermal conductivity</a:t>
-            </a:r>
-          </a:p>
-          <a:p>
-            <a:r>
-              <a:rPr lang="en-US" sz="2000" dirty="0" err="1"/>
-              <a:t>SiC</a:t>
-            </a:r>
-            <a:r>
-              <a:rPr lang="en-US" sz="2000" dirty="0"/>
-              <a:t> is a highly covalent material that forms tetrahedra that are centered around either carbon or silicon atoms</a:t>
-            </a:r>
-          </a:p>
-        </p:txBody>
-      </p:sp>
-      <p:sp>
-        <p:nvSpPr>
-          <p:cNvPr id="4" name="Content Placeholder 3">
-            <a:extLst>
-              <a:ext uri="{FF2B5EF4-FFF2-40B4-BE49-F238E27FC236}">
-                <a16:creationId xmlns:a16="http://schemas.microsoft.com/office/drawing/2014/main" id="{BEB02EDE-6F11-CD4C-813D-89AFE8189A18}"/>
-              </a:ext>
-            </a:extLst>
-          </p:cNvPr>
-          <p:cNvSpPr>
-            <a:spLocks noGrp="1"/>
-          </p:cNvSpPr>
-          <p:nvPr>
-            <p:ph sz="half" idx="2"/>
-          </p:nvPr>
-        </p:nvSpPr>
-        <p:spPr>
-          <a:xfrm>
-            <a:off x="6476104" y="4467188"/>
-            <a:ext cx="5106296" cy="1658978"/>
-          </a:xfrm>
-        </p:spPr>
-        <p:txBody>
-          <a:bodyPr/>
-          <a:lstStyle/>
-          <a:p>
-            <a:r>
-              <a:rPr lang="el-GR" sz="2000" dirty="0"/>
-              <a:t>β-</a:t>
-            </a:r>
-            <a:r>
-              <a:rPr lang="en-US" sz="2000" dirty="0" err="1"/>
-              <a:t>SiC</a:t>
-            </a:r>
-            <a:r>
-              <a:rPr lang="en-US" sz="2000" dirty="0"/>
-              <a:t> takes the diamond cubic structure with half of the carbons being replaced with silicon; this is a very stable structure that is conducive to </a:t>
-            </a:r>
-            <a:r>
-              <a:rPr lang="en-US" sz="2000" dirty="0" err="1"/>
-              <a:t>phononic</a:t>
-            </a:r>
-            <a:r>
-              <a:rPr lang="en-US" sz="2000" dirty="0"/>
-              <a:t> heat conduction</a:t>
-            </a:r>
-            <a:endParaRPr lang="en-US" sz="1100" dirty="0"/>
+              <a:rPr lang="en-US" sz="2200" dirty="0"/>
+              <a:t>Above 1000C, Frank loops of the interstitial type become the dominant defects observed by TEM</a:t>
+            </a:r>
+          </a:p>
+          <a:p>
+            <a:r>
+              <a:rPr lang="en-US" sz="2200" dirty="0"/>
+              <a:t>Interstitial Frank loops are faulted, in that they include a stacking fault</a:t>
+            </a:r>
+          </a:p>
+          <a:p>
+            <a:r>
+              <a:rPr lang="en-US" sz="2200" dirty="0"/>
+              <a:t>Consequently, these loops cannot glide and will not move under an applied stress or temperature, and are therefore considered as sessile</a:t>
+            </a:r>
+          </a:p>
+          <a:p>
+            <a:r>
+              <a:rPr lang="en-US" sz="2200" dirty="0"/>
+              <a:t>At high temperature, the development of Frank loops into dislocation networks through unfaulting reactions at high doses is reported</a:t>
+            </a:r>
           </a:p>
         </p:txBody>
       </p:sp>
       <p:pic>
         <p:nvPicPr>
-          <p:cNvPr id="6" name="Picture 5">
+          <p:cNvPr id="5" name="Content Placeholder 4" descr="Illustration of a Frank loop">
             <a:extLst>
               <a:ext uri="{FF2B5EF4-FFF2-40B4-BE49-F238E27FC236}">
-                <a16:creationId xmlns:a16="http://schemas.microsoft.com/office/drawing/2014/main" id="{B6BA2D98-6AF1-2A42-9978-8D9B37CEBA96}"/>
+                <a16:creationId xmlns:a16="http://schemas.microsoft.com/office/drawing/2014/main" id="{C26003CB-11BC-CE42-8ADA-9D9BD5F78ACA}"/>
               </a:ext>
             </a:extLst>
           </p:cNvPr>
           <p:cNvPicPr>
-            <a:picLocks noChangeAspect="1"/>
+            <a:picLocks noGrp="1" noChangeAspect="1"/>
           </p:cNvPicPr>
-          <p:nvPr/>
+          <p:nvPr>
+            <p:ph sz="half" idx="2"/>
+          </p:nvPr>
         </p:nvPicPr>
-        <p:blipFill>
+        <p:blipFill rotWithShape="1">
           <a:blip r:embed="rId2" cstate="email">
             <a:extLst>
               <a:ext uri="{28A0092B-C50C-407E-A947-70E740481C1C}">
@@ -7993,14 +6405,13 @@
               </a:ext>
             </a:extLst>
           </a:blip>
-          <a:stretch>
-            <a:fillRect/>
-          </a:stretch>
+          <a:srcRect/>
+          <a:stretch/>
         </p:blipFill>
         <p:spPr>
           <a:xfrm>
-            <a:off x="6476104" y="1749388"/>
-            <a:ext cx="2400300" cy="2717800"/>
+            <a:off x="7957440" y="1968500"/>
+            <a:ext cx="2810598" cy="1908371"/>
           </a:xfrm>
           <a:prstGeom prst="rect">
             <a:avLst/>
@@ -8009,10 +6420,10 @@
       </p:pic>
       <p:pic>
         <p:nvPicPr>
-          <p:cNvPr id="8" name="Picture 7">
+          <p:cNvPr id="6" name="Picture 5" descr="Micrograph of Frank loops">
             <a:extLst>
               <a:ext uri="{FF2B5EF4-FFF2-40B4-BE49-F238E27FC236}">
-                <a16:creationId xmlns:a16="http://schemas.microsoft.com/office/drawing/2014/main" id="{81D27F00-753B-564B-81F4-3CEDDA5F22BA}"/>
+                <a16:creationId xmlns:a16="http://schemas.microsoft.com/office/drawing/2014/main" id="{57F7C259-2E87-BB45-9DF5-516B803A9A0E}"/>
               </a:ext>
             </a:extLst>
           </p:cNvPr>
@@ -8021,7 +6432,7 @@
           </p:cNvPicPr>
           <p:nvPr/>
         </p:nvPicPr>
-        <p:blipFill>
+        <p:blipFill rotWithShape="1">
           <a:blip r:embed="rId3" cstate="email">
             <a:extLst>
               <a:ext uri="{28A0092B-C50C-407E-A947-70E740481C1C}">
@@ -8029,14 +6440,13 @@
               </a:ext>
             </a:extLst>
           </a:blip>
-          <a:stretch>
-            <a:fillRect/>
-          </a:stretch>
+          <a:srcRect/>
+          <a:stretch/>
         </p:blipFill>
         <p:spPr>
           <a:xfrm>
-            <a:off x="9140033" y="1905678"/>
-            <a:ext cx="2530243" cy="2405219"/>
+            <a:off x="7779721" y="3876871"/>
+            <a:ext cx="2429286" cy="2620990"/>
           </a:xfrm>
           <a:prstGeom prst="rect">
             <a:avLst/>
@@ -8045,10 +6455,45 @@
       </p:pic>
       <p:sp>
         <p:nvSpPr>
-          <p:cNvPr id="5" name="Slide Number Placeholder 4">
+          <p:cNvPr id="7" name="TextBox 6">
             <a:extLst>
               <a:ext uri="{FF2B5EF4-FFF2-40B4-BE49-F238E27FC236}">
-                <a16:creationId xmlns:a16="http://schemas.microsoft.com/office/drawing/2014/main" id="{F1479196-67C6-E04E-813D-F068C1E7C61B}"/>
+                <a16:creationId xmlns:a16="http://schemas.microsoft.com/office/drawing/2014/main" id="{8088A641-3ABC-A946-BE15-9A77593E4AFE}"/>
+              </a:ext>
+            </a:extLst>
+          </p:cNvPr>
+          <p:cNvSpPr txBox="1"/>
+          <p:nvPr/>
+        </p:nvSpPr>
+        <p:spPr>
+          <a:xfrm>
+            <a:off x="10424160" y="4593515"/>
+            <a:ext cx="1258645" cy="646331"/>
+          </a:xfrm>
+          <a:prstGeom prst="rect">
+            <a:avLst/>
+          </a:prstGeom>
+          <a:noFill/>
+        </p:spPr>
+        <p:txBody>
+          <a:bodyPr wrap="square" rtlCol="0">
+            <a:spAutoFit/>
+          </a:bodyPr>
+          <a:lstStyle/>
+          <a:p>
+            <a:r>
+              <a:rPr lang="en-US" dirty="0"/>
+              <a:t>Frank loops in Al</a:t>
+            </a:r>
+          </a:p>
+        </p:txBody>
+      </p:sp>
+      <p:sp>
+        <p:nvSpPr>
+          <p:cNvPr id="4" name="Slide Number Placeholder 3">
+            <a:extLst>
+              <a:ext uri="{FF2B5EF4-FFF2-40B4-BE49-F238E27FC236}">
+                <a16:creationId xmlns:a16="http://schemas.microsoft.com/office/drawing/2014/main" id="{B6432E1F-F866-0244-8360-246DAFA3F823}"/>
               </a:ext>
             </a:extLst>
           </p:cNvPr>
@@ -8081,7 +6526,7 @@
     </p:spTree>
     <p:extLst>
       <p:ext uri="{BB962C8B-B14F-4D97-AF65-F5344CB8AC3E}">
-        <p14:creationId xmlns:p14="http://schemas.microsoft.com/office/powerpoint/2010/main" val="3309799421"/>
+        <p14:creationId xmlns:p14="http://schemas.microsoft.com/office/powerpoint/2010/main" val="2410084725"/>
       </p:ext>
     </p:extLst>
   </p:cSld>
@@ -8113,7 +6558,7 @@
           <p:cNvPr id="2" name="Title 1">
             <a:extLst>
               <a:ext uri="{FF2B5EF4-FFF2-40B4-BE49-F238E27FC236}">
-                <a16:creationId xmlns:a16="http://schemas.microsoft.com/office/drawing/2014/main" id="{E816D832-8525-2A41-9BF2-D0B2618EED92}"/>
+                <a16:creationId xmlns:a16="http://schemas.microsoft.com/office/drawing/2014/main" id="{196D329D-E63E-0349-A476-6CE2C0E0ADD8}"/>
               </a:ext>
             </a:extLst>
           </p:cNvPr>
@@ -8131,16 +6576,13 @@
           <a:p>
             <a:r>
               <a:rPr lang="en-US" dirty="0"/>
-              <a:t>Silicon Carbide (</a:t>
+              <a:t>High T Radiation Effects in </a:t>
             </a:r>
             <a:r>
               <a:rPr lang="en-US" dirty="0" err="1"/>
               <a:t>SiC</a:t>
             </a:r>
-            <a:r>
-              <a:rPr lang="en-US" dirty="0"/>
-              <a:t>)</a:t>
-            </a:r>
+            <a:endParaRPr lang="en-US" dirty="0"/>
           </a:p>
         </p:txBody>
       </p:sp>
@@ -8149,7 +6591,7 @@
           <p:cNvPr id="3" name="Content Placeholder 2">
             <a:extLst>
               <a:ext uri="{FF2B5EF4-FFF2-40B4-BE49-F238E27FC236}">
-                <a16:creationId xmlns:a16="http://schemas.microsoft.com/office/drawing/2014/main" id="{F65AF318-667E-0544-9A8B-CF772AABFFA4}"/>
+                <a16:creationId xmlns:a16="http://schemas.microsoft.com/office/drawing/2014/main" id="{3359A460-9072-664C-AABE-83BB119ABDEB}"/>
               </a:ext>
             </a:extLst>
           </p:cNvPr>
@@ -8167,7 +6609,7 @@
           <a:p>
             <a:r>
               <a:rPr lang="en-US" sz="2400" dirty="0"/>
-              <a:t>Silicon carbide (</a:t>
+              <a:t>The volume associated with dislocation loops in irradiated </a:t>
             </a:r>
             <a:r>
               <a:rPr lang="en-US" sz="2400" dirty="0" err="1"/>
@@ -8175,107 +6617,353 @@
             </a:r>
             <a:r>
               <a:rPr lang="en-US" sz="2400" dirty="0"/>
-              <a:t>) has been studied and utilized in nuclear systems for decades, primarily as the micro pressure vessel for high-temperature gas-cooled reactor fuels</a:t>
+              <a:t> has been estimated to be on the order of 0.1%</a:t>
             </a:r>
           </a:p>
           <a:p>
             <a:r>
               <a:rPr lang="en-US" sz="2400" dirty="0"/>
-              <a:t>The </a:t>
-            </a:r>
-            <a:r>
-              <a:rPr lang="en-US" sz="2400" dirty="0" err="1"/>
+              <a:t>At high T (greater than about 1250 K) vacancies are sufficiently mobile and vacancy clusters can be formed</a:t>
+            </a:r>
+          </a:p>
+          <a:p>
+            <a:r>
+              <a:rPr lang="en-US" sz="2400" dirty="0"/>
+              <a:t>This high T regime is the void swelling regime</a:t>
+            </a:r>
+          </a:p>
+        </p:txBody>
+      </p:sp>
+      <p:pic>
+        <p:nvPicPr>
+          <p:cNvPr id="5" name="Content Placeholder 4" descr="Micrograph showing defect evolution, and the beginning of voids, as temperature and dose increases">
+            <a:extLst>
+              <a:ext uri="{FF2B5EF4-FFF2-40B4-BE49-F238E27FC236}">
+                <a16:creationId xmlns:a16="http://schemas.microsoft.com/office/drawing/2014/main" id="{E5790135-67CB-E646-90F9-4856CD5B2572}"/>
+              </a:ext>
+            </a:extLst>
+          </p:cNvPr>
+          <p:cNvPicPr>
+            <a:picLocks noGrp="1" noChangeAspect="1"/>
+          </p:cNvPicPr>
+          <p:nvPr>
+            <p:ph sz="half" idx="2"/>
+          </p:nvPr>
+        </p:nvPicPr>
+        <p:blipFill>
+          <a:blip r:embed="rId2" cstate="email">
+            <a:extLst>
+              <a:ext uri="{28A0092B-C50C-407E-A947-70E740481C1C}">
+                <a14:useLocalDpi xmlns:a14="http://schemas.microsoft.com/office/drawing/2010/main"/>
+              </a:ext>
+            </a:extLst>
+          </a:blip>
+          <a:stretch>
+            <a:fillRect/>
+          </a:stretch>
+        </p:blipFill>
+        <p:spPr>
+          <a:xfrm>
+            <a:off x="6267450" y="2288381"/>
+            <a:ext cx="5245100" cy="3517900"/>
+          </a:xfrm>
+          <a:prstGeom prst="rect">
+            <a:avLst/>
+          </a:prstGeom>
+        </p:spPr>
+      </p:pic>
+      <p:sp>
+        <p:nvSpPr>
+          <p:cNvPr id="6" name="Rectangle 5">
+            <a:extLst>
+              <a:ext uri="{FF2B5EF4-FFF2-40B4-BE49-F238E27FC236}">
+                <a16:creationId xmlns:a16="http://schemas.microsoft.com/office/drawing/2014/main" id="{6BA361B1-3443-C34A-AB65-DC5B2A5A2FE9}"/>
+              </a:ext>
+            </a:extLst>
+          </p:cNvPr>
+          <p:cNvSpPr/>
+          <p:nvPr/>
+        </p:nvSpPr>
+        <p:spPr>
+          <a:xfrm>
+            <a:off x="5822493" y="6126162"/>
+            <a:ext cx="6135013" cy="369332"/>
+          </a:xfrm>
+          <a:prstGeom prst="rect">
+            <a:avLst/>
+          </a:prstGeom>
+        </p:spPr>
+        <p:txBody>
+          <a:bodyPr wrap="none">
+            <a:spAutoFit/>
+          </a:bodyPr>
+          <a:lstStyle/>
+          <a:p>
+            <a:r>
+              <a:rPr lang="en-US" dirty="0">
+                <a:latin typeface="Helvetica" pitchFamily="2" charset="0"/>
+              </a:rPr>
+              <a:t>Evolution of voids in high-temperature irradiated CVD </a:t>
+            </a:r>
+            <a:r>
+              <a:rPr lang="en-US" dirty="0" err="1">
+                <a:latin typeface="Helvetica" pitchFamily="2" charset="0"/>
+              </a:rPr>
               <a:t>SiC</a:t>
             </a:r>
-            <a:r>
-              <a:rPr lang="en-US" sz="2400" dirty="0"/>
-              <a:t> must be strong enough to withstand the pressure buildup from the fission product gas liberated and CO produced</a:t>
-            </a:r>
-          </a:p>
-          <a:p>
-            <a:endParaRPr lang="en-US" sz="2400" dirty="0"/>
-          </a:p>
-        </p:txBody>
-      </p:sp>
-      <p:sp>
-        <p:nvSpPr>
-          <p:cNvPr id="4" name="Content Placeholder 3">
+            <a:endParaRPr lang="en-US" dirty="0">
+              <a:effectLst/>
+              <a:latin typeface="Helvetica" pitchFamily="2" charset="0"/>
+            </a:endParaRPr>
+          </a:p>
+        </p:txBody>
+      </p:sp>
+      <p:sp>
+        <p:nvSpPr>
+          <p:cNvPr id="7" name="Rectangle 6">
             <a:extLst>
               <a:ext uri="{FF2B5EF4-FFF2-40B4-BE49-F238E27FC236}">
-                <a16:creationId xmlns:a16="http://schemas.microsoft.com/office/drawing/2014/main" id="{10CAB368-801F-BB4B-B5EE-A710FA1FA98C}"/>
+                <a16:creationId xmlns:a16="http://schemas.microsoft.com/office/drawing/2014/main" id="{A22ED2E6-AE87-6E40-B576-536035F5A1EE}"/>
               </a:ext>
             </a:extLst>
           </p:cNvPr>
-          <p:cNvSpPr>
-            <a:spLocks noGrp="1"/>
-          </p:cNvSpPr>
-          <p:nvPr>
-            <p:ph sz="half" idx="2"/>
-          </p:nvPr>
-        </p:nvSpPr>
-        <p:spPr/>
-        <p:txBody>
-          <a:bodyPr/>
+          <p:cNvSpPr/>
+          <p:nvPr/>
+        </p:nvSpPr>
+        <p:spPr>
+          <a:xfrm>
+            <a:off x="6553323" y="3082970"/>
+            <a:ext cx="1225015" cy="261610"/>
+          </a:xfrm>
+          <a:prstGeom prst="rect">
+            <a:avLst/>
+          </a:prstGeom>
+        </p:spPr>
+        <p:txBody>
+          <a:bodyPr wrap="none">
+            <a:spAutoFit/>
+          </a:bodyPr>
           <a:lstStyle/>
           <a:p>
             <a:r>
-              <a:rPr lang="en-US" sz="2400" dirty="0"/>
-              <a:t>The </a:t>
-            </a:r>
-            <a:r>
-              <a:rPr lang="en-US" sz="2400" dirty="0" err="1"/>
-              <a:t>SiC</a:t>
-            </a:r>
-            <a:r>
-              <a:rPr lang="en-US" sz="2400" dirty="0"/>
-              <a:t> layer must withstand chemical attack from metallic fission products such as palladium </a:t>
-            </a:r>
-          </a:p>
-          <a:p>
-            <a:r>
-              <a:rPr lang="en-US" sz="2400" dirty="0"/>
-              <a:t>The </a:t>
-            </a:r>
-            <a:r>
-              <a:rPr lang="en-US" sz="2400" dirty="0" err="1"/>
-              <a:t>SiC</a:t>
-            </a:r>
-            <a:r>
-              <a:rPr lang="en-US" sz="2400" dirty="0"/>
-              <a:t> must be able to handle the mechanical loads derived from irradiation-induced dimensional changes occurring in the PyC layers</a:t>
-            </a:r>
-          </a:p>
-          <a:p>
-            <a:r>
-              <a:rPr lang="en-US" sz="2400" dirty="0"/>
-              <a:t>The </a:t>
-            </a:r>
-            <a:r>
-              <a:rPr lang="en-US" sz="2400" dirty="0" err="1"/>
-              <a:t>SiC</a:t>
-            </a:r>
-            <a:r>
-              <a:rPr lang="en-US" sz="2400" dirty="0"/>
-              <a:t> must maintain its properties during irradiation</a:t>
-            </a:r>
-          </a:p>
-          <a:p>
-            <a:endParaRPr lang="en-US" sz="2400" dirty="0"/>
-          </a:p>
-          <a:p>
-            <a:endParaRPr lang="en-US" sz="2400" dirty="0"/>
-          </a:p>
-          <a:p>
-            <a:endParaRPr lang="en-US" sz="2400" dirty="0"/>
-          </a:p>
-        </p:txBody>
-      </p:sp>
-      <p:sp>
-        <p:nvSpPr>
-          <p:cNvPr id="5" name="Slide Number Placeholder 4">
+              <a:rPr lang="en-US" sz="1100" dirty="0">
+                <a:latin typeface="Helvetica" pitchFamily="2" charset="0"/>
+              </a:rPr>
+              <a:t>1130  C, 1.8 dpa</a:t>
+            </a:r>
+            <a:endParaRPr lang="en-US" sz="1100" dirty="0">
+              <a:effectLst/>
+              <a:latin typeface="Helvetica" pitchFamily="2" charset="0"/>
+            </a:endParaRPr>
+          </a:p>
+        </p:txBody>
+      </p:sp>
+      <p:sp>
+        <p:nvSpPr>
+          <p:cNvPr id="8" name="Rectangle 7">
             <a:extLst>
               <a:ext uri="{FF2B5EF4-FFF2-40B4-BE49-F238E27FC236}">
-                <a16:creationId xmlns:a16="http://schemas.microsoft.com/office/drawing/2014/main" id="{BA40622E-583F-FE4C-B306-6E354AF59138}"/>
+                <a16:creationId xmlns:a16="http://schemas.microsoft.com/office/drawing/2014/main" id="{7EAFB8A6-2C53-AF49-875E-2D0C6943D6D3}"/>
+              </a:ext>
+            </a:extLst>
+          </p:cNvPr>
+          <p:cNvSpPr/>
+          <p:nvPr/>
+        </p:nvSpPr>
+        <p:spPr>
+          <a:xfrm>
+            <a:off x="8175892" y="3082970"/>
+            <a:ext cx="1225015" cy="261610"/>
+          </a:xfrm>
+          <a:prstGeom prst="rect">
+            <a:avLst/>
+          </a:prstGeom>
+        </p:spPr>
+        <p:txBody>
+          <a:bodyPr wrap="none">
+            <a:spAutoFit/>
+          </a:bodyPr>
+          <a:lstStyle/>
+          <a:p>
+            <a:r>
+              <a:rPr lang="en-US" sz="1100" dirty="0">
+                <a:latin typeface="Helvetica" pitchFamily="2" charset="0"/>
+              </a:rPr>
+              <a:t>1130  C, 8.5 dpa</a:t>
+            </a:r>
+            <a:endParaRPr lang="en-US" sz="1100" dirty="0">
+              <a:effectLst/>
+              <a:latin typeface="Helvetica" pitchFamily="2" charset="0"/>
+            </a:endParaRPr>
+          </a:p>
+        </p:txBody>
+      </p:sp>
+      <p:sp>
+        <p:nvSpPr>
+          <p:cNvPr id="9" name="Rectangle 8">
+            <a:extLst>
+              <a:ext uri="{FF2B5EF4-FFF2-40B4-BE49-F238E27FC236}">
+                <a16:creationId xmlns:a16="http://schemas.microsoft.com/office/drawing/2014/main" id="{505B05CB-08F4-164B-9CDB-622B4A1C45A9}"/>
+              </a:ext>
+            </a:extLst>
+          </p:cNvPr>
+          <p:cNvSpPr/>
+          <p:nvPr/>
+        </p:nvSpPr>
+        <p:spPr>
+          <a:xfrm>
+            <a:off x="10081754" y="3004905"/>
+            <a:ext cx="1225015" cy="261610"/>
+          </a:xfrm>
+          <a:prstGeom prst="rect">
+            <a:avLst/>
+          </a:prstGeom>
+        </p:spPr>
+        <p:txBody>
+          <a:bodyPr wrap="none">
+            <a:spAutoFit/>
+          </a:bodyPr>
+          <a:lstStyle/>
+          <a:p>
+            <a:r>
+              <a:rPr lang="en-US" sz="1100" dirty="0">
+                <a:latin typeface="Helvetica" pitchFamily="2" charset="0"/>
+              </a:rPr>
+              <a:t>1280  C, 5.0 dpa</a:t>
+            </a:r>
+            <a:endParaRPr lang="en-US" sz="1100" dirty="0">
+              <a:effectLst/>
+              <a:latin typeface="Helvetica" pitchFamily="2" charset="0"/>
+            </a:endParaRPr>
+          </a:p>
+        </p:txBody>
+      </p:sp>
+      <p:sp>
+        <p:nvSpPr>
+          <p:cNvPr id="10" name="Rectangle 9">
+            <a:extLst>
+              <a:ext uri="{FF2B5EF4-FFF2-40B4-BE49-F238E27FC236}">
+                <a16:creationId xmlns:a16="http://schemas.microsoft.com/office/drawing/2014/main" id="{5B09F7C5-67CF-8C46-8304-29F7A11B29B2}"/>
+              </a:ext>
+            </a:extLst>
+          </p:cNvPr>
+          <p:cNvSpPr/>
+          <p:nvPr/>
+        </p:nvSpPr>
+        <p:spPr>
+          <a:xfrm>
+            <a:off x="6553322" y="4739648"/>
+            <a:ext cx="1225015" cy="261610"/>
+          </a:xfrm>
+          <a:prstGeom prst="rect">
+            <a:avLst/>
+          </a:prstGeom>
+        </p:spPr>
+        <p:txBody>
+          <a:bodyPr wrap="none">
+            <a:spAutoFit/>
+          </a:bodyPr>
+          <a:lstStyle/>
+          <a:p>
+            <a:r>
+              <a:rPr lang="en-US" sz="1100" dirty="0">
+                <a:latin typeface="Helvetica" pitchFamily="2" charset="0"/>
+              </a:rPr>
+              <a:t>1450  C, 1.8 dpa</a:t>
+            </a:r>
+            <a:endParaRPr lang="en-US" sz="1100" dirty="0">
+              <a:effectLst/>
+              <a:latin typeface="Helvetica" pitchFamily="2" charset="0"/>
+            </a:endParaRPr>
+          </a:p>
+        </p:txBody>
+      </p:sp>
+      <p:sp>
+        <p:nvSpPr>
+          <p:cNvPr id="11" name="Rectangle 10">
+            <a:extLst>
+              <a:ext uri="{FF2B5EF4-FFF2-40B4-BE49-F238E27FC236}">
+                <a16:creationId xmlns:a16="http://schemas.microsoft.com/office/drawing/2014/main" id="{1C0533CC-AE9D-094C-9A17-0C75DC313A49}"/>
+              </a:ext>
+            </a:extLst>
+          </p:cNvPr>
+          <p:cNvSpPr/>
+          <p:nvPr/>
+        </p:nvSpPr>
+        <p:spPr>
+          <a:xfrm>
+            <a:off x="8277491" y="4739648"/>
+            <a:ext cx="1225015" cy="261610"/>
+          </a:xfrm>
+          <a:prstGeom prst="rect">
+            <a:avLst/>
+          </a:prstGeom>
+        </p:spPr>
+        <p:txBody>
+          <a:bodyPr wrap="none">
+            <a:spAutoFit/>
+          </a:bodyPr>
+          <a:lstStyle/>
+          <a:p>
+            <a:r>
+              <a:rPr lang="en-US" sz="1100" dirty="0">
+                <a:latin typeface="Helvetica" pitchFamily="2" charset="0"/>
+              </a:rPr>
+              <a:t>1450  C, 5.0 dpa</a:t>
+            </a:r>
+            <a:endParaRPr lang="en-US" sz="1100" dirty="0">
+              <a:effectLst/>
+              <a:latin typeface="Helvetica" pitchFamily="2" charset="0"/>
+            </a:endParaRPr>
+          </a:p>
+        </p:txBody>
+      </p:sp>
+      <p:sp>
+        <p:nvSpPr>
+          <p:cNvPr id="12" name="Rectangle 11">
+            <a:extLst>
+              <a:ext uri="{FF2B5EF4-FFF2-40B4-BE49-F238E27FC236}">
+                <a16:creationId xmlns:a16="http://schemas.microsoft.com/office/drawing/2014/main" id="{09A8950D-F948-074F-A106-0680561A17E3}"/>
+              </a:ext>
+            </a:extLst>
+          </p:cNvPr>
+          <p:cNvSpPr/>
+          <p:nvPr/>
+        </p:nvSpPr>
+        <p:spPr>
+          <a:xfrm>
+            <a:off x="10081753" y="4739648"/>
+            <a:ext cx="1225015" cy="261610"/>
+          </a:xfrm>
+          <a:prstGeom prst="rect">
+            <a:avLst/>
+          </a:prstGeom>
+        </p:spPr>
+        <p:txBody>
+          <a:bodyPr wrap="none">
+            <a:spAutoFit/>
+          </a:bodyPr>
+          <a:lstStyle/>
+          <a:p>
+            <a:r>
+              <a:rPr lang="en-US" sz="1100" dirty="0">
+                <a:latin typeface="Helvetica" pitchFamily="2" charset="0"/>
+              </a:rPr>
+              <a:t>1450  C, 8.5 dpa</a:t>
+            </a:r>
+            <a:endParaRPr lang="en-US" sz="1100" dirty="0">
+              <a:effectLst/>
+              <a:latin typeface="Helvetica" pitchFamily="2" charset="0"/>
+            </a:endParaRPr>
+          </a:p>
+        </p:txBody>
+      </p:sp>
+      <p:sp>
+        <p:nvSpPr>
+          <p:cNvPr id="4" name="Slide Number Placeholder 3">
+            <a:extLst>
+              <a:ext uri="{FF2B5EF4-FFF2-40B4-BE49-F238E27FC236}">
+                <a16:creationId xmlns:a16="http://schemas.microsoft.com/office/drawing/2014/main" id="{6D25DBD7-A652-2744-9757-49E48B0C731E}"/>
               </a:ext>
             </a:extLst>
           </p:cNvPr>
@@ -8308,7 +6996,7 @@
     </p:spTree>
     <p:extLst>
       <p:ext uri="{BB962C8B-B14F-4D97-AF65-F5344CB8AC3E}">
-        <p14:creationId xmlns:p14="http://schemas.microsoft.com/office/powerpoint/2010/main" val="933389763"/>
+        <p14:creationId xmlns:p14="http://schemas.microsoft.com/office/powerpoint/2010/main" val="238767562"/>
       </p:ext>
     </p:extLst>
   </p:cSld>
@@ -8340,7 +7028,7 @@
           <p:cNvPr id="2" name="Title 1">
             <a:extLst>
               <a:ext uri="{FF2B5EF4-FFF2-40B4-BE49-F238E27FC236}">
-                <a16:creationId xmlns:a16="http://schemas.microsoft.com/office/drawing/2014/main" id="{58187F84-1F20-054D-BC38-64CEA5C7F41D}"/>
+                <a16:creationId xmlns:a16="http://schemas.microsoft.com/office/drawing/2014/main" id="{3EB8E768-A935-F342-A8D1-4E267FB4C244}"/>
               </a:ext>
             </a:extLst>
           </p:cNvPr>
@@ -8358,7 +7046,7 @@
           <a:p>
             <a:r>
               <a:rPr lang="en-US" dirty="0"/>
-              <a:t>Radiation Effects in </a:t>
+              <a:t>Irradiation-Induced Swelling in </a:t>
             </a:r>
             <a:r>
               <a:rPr lang="en-US" dirty="0" err="1"/>
@@ -8373,7 +7061,7 @@
           <p:cNvPr id="3" name="Content Placeholder 2">
             <a:extLst>
               <a:ext uri="{FF2B5EF4-FFF2-40B4-BE49-F238E27FC236}">
-                <a16:creationId xmlns:a16="http://schemas.microsoft.com/office/drawing/2014/main" id="{0DBC7A60-A43F-F14B-B647-991B6AA0A553}"/>
+                <a16:creationId xmlns:a16="http://schemas.microsoft.com/office/drawing/2014/main" id="{EC33DA84-6B86-3845-A6D5-98EB5A1288CD}"/>
               </a:ext>
             </a:extLst>
           </p:cNvPr>
@@ -8386,8 +7074,8 @@
         </p:nvSpPr>
         <p:spPr>
           <a:xfrm>
-            <a:off x="609600" y="1968503"/>
-            <a:ext cx="10972800" cy="4157663"/>
+            <a:off x="609599" y="1968503"/>
+            <a:ext cx="5926851" cy="4157663"/>
           </a:xfrm>
         </p:spPr>
         <p:txBody>
@@ -8396,59 +7084,70 @@
           <a:p>
             <a:r>
               <a:rPr lang="en-US" sz="2400" dirty="0"/>
-              <a:t>The neutron-induced swelling of </a:t>
-            </a:r>
-            <a:r>
-              <a:rPr lang="en-US" sz="2400" dirty="0" err="1"/>
-              <a:t>SiC</a:t>
-            </a:r>
+              <a:t>The transition from point-defect saturated swelling to void swelling occurs above 1000C</a:t>
+            </a:r>
+          </a:p>
+          <a:p>
             <a:r>
               <a:rPr lang="en-US" sz="2400" dirty="0"/>
-              <a:t> has been well studied for low and intermediate temperatures (up to 1000 C)</a:t>
+              <a:t>Void swelling increases as a function of dose, and is not known to saturate</a:t>
             </a:r>
           </a:p>
           <a:p>
             <a:r>
               <a:rPr lang="en-US" sz="2400" dirty="0"/>
-              <a:t>It is well understood that the presence of significant second phases and/or poorly crystallized phases in these materials leads to unstable behavior under neutron irradiation</a:t>
-            </a:r>
-          </a:p>
-          <a:p>
-            <a:r>
-              <a:rPr lang="en-US" sz="2400" dirty="0"/>
-              <a:t>High purity, stoichiometric, near-theoretical density </a:t>
-            </a:r>
-            <a:r>
-              <a:rPr lang="en-US" sz="2400" dirty="0" err="1"/>
-              <a:t>SiC</a:t>
-            </a:r>
-            <a:r>
-              <a:rPr lang="en-US" sz="2400" dirty="0"/>
-              <a:t> can show excellent radiation resistance</a:t>
-            </a:r>
-          </a:p>
-          <a:p>
-            <a:r>
-              <a:rPr lang="en-US" sz="2400" dirty="0"/>
-              <a:t>Here I will be talking about the good </a:t>
-            </a:r>
-            <a:r>
-              <a:rPr lang="en-US" sz="2400" dirty="0" err="1"/>
-              <a:t>SiC</a:t>
-            </a:r>
-            <a:r>
-              <a:rPr lang="en-US" sz="2400" dirty="0"/>
-              <a:t>, assuming that the fabrication process has produced appropriately clean coatings</a:t>
-            </a:r>
-          </a:p>
-        </p:txBody>
-      </p:sp>
+              <a:t>The swelling near the critical amorphization temperature is described as the differential strain between point defects or small defect clusters</a:t>
+            </a:r>
+          </a:p>
+          <a:p>
+            <a:endParaRPr lang="en-US" sz="2400" dirty="0"/>
+          </a:p>
+        </p:txBody>
+      </p:sp>
+      <p:pic>
+        <p:nvPicPr>
+          <p:cNvPr id="5" name="Content Placeholder 4" descr="Combined swelling plot versus temperature and dpa for SiC">
+            <a:extLst>
+              <a:ext uri="{FF2B5EF4-FFF2-40B4-BE49-F238E27FC236}">
+                <a16:creationId xmlns:a16="http://schemas.microsoft.com/office/drawing/2014/main" id="{0E289562-8E23-8646-9690-FD01D359C181}"/>
+              </a:ext>
+            </a:extLst>
+          </p:cNvPr>
+          <p:cNvPicPr>
+            <a:picLocks noGrp="1" noChangeAspect="1"/>
+          </p:cNvPicPr>
+          <p:nvPr>
+            <p:ph sz="half" idx="2"/>
+          </p:nvPr>
+        </p:nvPicPr>
+        <p:blipFill>
+          <a:blip r:embed="rId2" cstate="email">
+            <a:extLst>
+              <a:ext uri="{28A0092B-C50C-407E-A947-70E740481C1C}">
+                <a14:useLocalDpi xmlns:a14="http://schemas.microsoft.com/office/drawing/2010/main"/>
+              </a:ext>
+            </a:extLst>
+          </a:blip>
+          <a:stretch>
+            <a:fillRect/>
+          </a:stretch>
+        </p:blipFill>
+        <p:spPr>
+          <a:xfrm>
+            <a:off x="6536451" y="1968500"/>
+            <a:ext cx="4707097" cy="4157663"/>
+          </a:xfrm>
+          <a:prstGeom prst="rect">
+            <a:avLst/>
+          </a:prstGeom>
+        </p:spPr>
+      </p:pic>
       <p:sp>
         <p:nvSpPr>
           <p:cNvPr id="4" name="Slide Number Placeholder 3">
             <a:extLst>
               <a:ext uri="{FF2B5EF4-FFF2-40B4-BE49-F238E27FC236}">
-                <a16:creationId xmlns:a16="http://schemas.microsoft.com/office/drawing/2014/main" id="{1685D81B-471F-B247-997A-1F5F4CC3C576}"/>
+                <a16:creationId xmlns:a16="http://schemas.microsoft.com/office/drawing/2014/main" id="{0F3053EA-89D8-044D-BA24-295FF82C9761}"/>
               </a:ext>
             </a:extLst>
           </p:cNvPr>
@@ -8481,7 +7180,7 @@
     </p:spTree>
     <p:extLst>
       <p:ext uri="{BB962C8B-B14F-4D97-AF65-F5344CB8AC3E}">
-        <p14:creationId xmlns:p14="http://schemas.microsoft.com/office/powerpoint/2010/main" val="3536326720"/>
+        <p14:creationId xmlns:p14="http://schemas.microsoft.com/office/powerpoint/2010/main" val="3946535401"/>
       </p:ext>
     </p:extLst>
   </p:cSld>
@@ -8513,7 +7212,7 @@
           <p:cNvPr id="2" name="Title 1">
             <a:extLst>
               <a:ext uri="{FF2B5EF4-FFF2-40B4-BE49-F238E27FC236}">
-                <a16:creationId xmlns:a16="http://schemas.microsoft.com/office/drawing/2014/main" id="{714E8619-8F8B-E649-98FB-551E85B3BA6A}"/>
+                <a16:creationId xmlns:a16="http://schemas.microsoft.com/office/drawing/2014/main" id="{3EB8E768-A935-F342-A8D1-4E267FB4C244}"/>
               </a:ext>
             </a:extLst>
           </p:cNvPr>
@@ -8531,7 +7230,7 @@
           <a:p>
             <a:r>
               <a:rPr lang="en-US" dirty="0"/>
-              <a:t>Radiation Effects in </a:t>
+              <a:t>Irradiation-Induced Swelling in </a:t>
             </a:r>
             <a:r>
               <a:rPr lang="en-US" dirty="0" err="1"/>
@@ -8546,7 +7245,7 @@
           <p:cNvPr id="3" name="Content Placeholder 2">
             <a:extLst>
               <a:ext uri="{FF2B5EF4-FFF2-40B4-BE49-F238E27FC236}">
-                <a16:creationId xmlns:a16="http://schemas.microsoft.com/office/drawing/2014/main" id="{7E4F582F-09B3-F047-9EDC-67C6C1814419}"/>
+                <a16:creationId xmlns:a16="http://schemas.microsoft.com/office/drawing/2014/main" id="{EC33DA84-6B86-3845-A6D5-98EB5A1288CD}"/>
               </a:ext>
             </a:extLst>
           </p:cNvPr>
@@ -8559,8 +7258,8 @@
         </p:nvSpPr>
         <p:spPr>
           <a:xfrm>
-            <a:off x="609600" y="1968503"/>
-            <a:ext cx="5381297" cy="4157663"/>
+            <a:off x="609599" y="1968503"/>
+            <a:ext cx="6017112" cy="4157663"/>
           </a:xfrm>
         </p:spPr>
         <p:txBody>
@@ -8568,55 +7267,39 @@
           <a:lstStyle/>
           <a:p>
             <a:r>
-              <a:rPr lang="en-US" dirty="0"/>
-              <a:t>The microstructural evolution map is shown on the right</a:t>
-            </a:r>
-          </a:p>
-          <a:p>
-            <a:r>
-              <a:rPr lang="en-US" dirty="0"/>
-              <a:t>Different types of defects form at different temperatures</a:t>
-            </a:r>
-          </a:p>
-          <a:p>
-            <a:r>
-              <a:rPr lang="en-US" dirty="0"/>
-              <a:t>Swelling behavior of </a:t>
-            </a:r>
-            <a:r>
-              <a:rPr lang="en-US" dirty="0" err="1"/>
-              <a:t>SiC</a:t>
-            </a:r>
-            <a:r>
-              <a:rPr lang="en-US" dirty="0"/>
-              <a:t> is relatively well understood</a:t>
-            </a:r>
-          </a:p>
-          <a:p>
-            <a:r>
-              <a:rPr lang="en-US" dirty="0"/>
-              <a:t>But the contribution of the defects themselves to the swelling in </a:t>
-            </a:r>
-            <a:r>
-              <a:rPr lang="en-US" dirty="0" err="1"/>
-              <a:t>SiC</a:t>
-            </a:r>
-            <a:r>
-              <a:rPr lang="en-US" dirty="0"/>
-              <a:t> is not well understood</a:t>
-            </a:r>
-          </a:p>
-          <a:p>
-            <a:endParaRPr lang="en-US" dirty="0"/>
+              <a:rPr lang="en-US" sz="2200" dirty="0"/>
+              <a:t>Above the critical amorphization temperature, the number of defects surviving recombination is reduced and the mobility of both silicon and carbon interstitials becomes significant</a:t>
+            </a:r>
+          </a:p>
+          <a:p>
+            <a:r>
+              <a:rPr lang="en-US" sz="2200" dirty="0"/>
+              <a:t>Above 1000 C microstructural studies have noted the presence of both Frank loops and tiny voids, indicating limited mobility of vacancies</a:t>
+            </a:r>
+          </a:p>
+          <a:p>
+            <a:r>
+              <a:rPr lang="en-US" sz="2200" dirty="0"/>
+              <a:t>The max irradiation temperature shown is 0.65 </a:t>
+            </a:r>
+            <a:r>
+              <a:rPr lang="en-US" sz="2200" dirty="0" err="1"/>
+              <a:t>T</a:t>
+            </a:r>
+            <a:r>
+              <a:rPr lang="en-US" sz="2200" baseline="-25000" dirty="0" err="1"/>
+              <a:t>melt</a:t>
+            </a:r>
+            <a:endParaRPr lang="en-US" sz="2200" baseline="-25000" dirty="0"/>
           </a:p>
         </p:txBody>
       </p:sp>
       <p:pic>
         <p:nvPicPr>
-          <p:cNvPr id="5" name="Content Placeholder 4">
+          <p:cNvPr id="5" name="Content Placeholder 4" descr="Combined swelling plot for SiC with irradiation temperature and dose">
             <a:extLst>
               <a:ext uri="{FF2B5EF4-FFF2-40B4-BE49-F238E27FC236}">
-                <a16:creationId xmlns:a16="http://schemas.microsoft.com/office/drawing/2014/main" id="{05493A0B-EBC6-1341-A32D-84DC6A8107C7}"/>
+                <a16:creationId xmlns:a16="http://schemas.microsoft.com/office/drawing/2014/main" id="{0E289562-8E23-8646-9690-FD01D359C181}"/>
               </a:ext>
             </a:extLst>
           </p:cNvPr>
@@ -8641,8 +7324,8 @@
         </p:blipFill>
         <p:spPr>
           <a:xfrm>
-            <a:off x="6528076" y="1968500"/>
-            <a:ext cx="4723848" cy="4157663"/>
+            <a:off x="6536451" y="1968500"/>
+            <a:ext cx="4707097" cy="4157663"/>
           </a:xfrm>
           <a:prstGeom prst="rect">
             <a:avLst/>
@@ -8654,7 +7337,7 @@
           <p:cNvPr id="4" name="Slide Number Placeholder 3">
             <a:extLst>
               <a:ext uri="{FF2B5EF4-FFF2-40B4-BE49-F238E27FC236}">
-                <a16:creationId xmlns:a16="http://schemas.microsoft.com/office/drawing/2014/main" id="{1251886F-9E4C-7B46-8BC9-3409E487EB65}"/>
+                <a16:creationId xmlns:a16="http://schemas.microsoft.com/office/drawing/2014/main" id="{98489A4B-F623-2B48-82E5-ED4E36D50C76}"/>
               </a:ext>
             </a:extLst>
           </p:cNvPr>
@@ -8687,7 +7370,7 @@
     </p:spTree>
     <p:extLst>
       <p:ext uri="{BB962C8B-B14F-4D97-AF65-F5344CB8AC3E}">
-        <p14:creationId xmlns:p14="http://schemas.microsoft.com/office/powerpoint/2010/main" val="506900624"/>
+        <p14:creationId xmlns:p14="http://schemas.microsoft.com/office/powerpoint/2010/main" val="2707072449"/>
       </p:ext>
     </p:extLst>
   </p:cSld>
@@ -8719,7 +7402,7 @@
           <p:cNvPr id="2" name="Title 1">
             <a:extLst>
               <a:ext uri="{FF2B5EF4-FFF2-40B4-BE49-F238E27FC236}">
-                <a16:creationId xmlns:a16="http://schemas.microsoft.com/office/drawing/2014/main" id="{80D03049-4B0D-0947-9A8D-33B38D2E0C3B}"/>
+                <a16:creationId xmlns:a16="http://schemas.microsoft.com/office/drawing/2014/main" id="{3EB8E768-A935-F342-A8D1-4E267FB4C244}"/>
               </a:ext>
             </a:extLst>
           </p:cNvPr>
@@ -8737,7 +7420,7 @@
           <a:p>
             <a:r>
               <a:rPr lang="en-US" dirty="0"/>
-              <a:t>Low T Radiation Effects in </a:t>
+              <a:t>Irradiation-Induced Swelling in </a:t>
             </a:r>
             <a:r>
               <a:rPr lang="en-US" dirty="0" err="1"/>
@@ -8752,7 +7435,7 @@
           <p:cNvPr id="3" name="Content Placeholder 2">
             <a:extLst>
               <a:ext uri="{FF2B5EF4-FFF2-40B4-BE49-F238E27FC236}">
-                <a16:creationId xmlns:a16="http://schemas.microsoft.com/office/drawing/2014/main" id="{3A775B20-5E00-B145-9346-A0CC7F4F2B14}"/>
+                <a16:creationId xmlns:a16="http://schemas.microsoft.com/office/drawing/2014/main" id="{EC33DA84-6B86-3845-A6D5-98EB5A1288CD}"/>
               </a:ext>
             </a:extLst>
           </p:cNvPr>
@@ -8766,7 +7449,7 @@
         <p:spPr>
           <a:xfrm>
             <a:off x="609599" y="1968503"/>
-            <a:ext cx="6422973" cy="4157663"/>
+            <a:ext cx="6017112" cy="4157663"/>
           </a:xfrm>
         </p:spPr>
         <p:txBody>
@@ -8774,55 +7457,75 @@
           <a:lstStyle/>
           <a:p>
             <a:r>
-              <a:rPr lang="en-US" sz="2000" dirty="0"/>
-              <a:t>Below 400 K, neutron irradiated </a:t>
-            </a:r>
-            <a:r>
-              <a:rPr lang="en-US" sz="2000" dirty="0" err="1"/>
+              <a:rPr lang="en-US" sz="2200" dirty="0"/>
+              <a:t>In typical </a:t>
+            </a:r>
+            <a:r>
+              <a:rPr lang="en-US" sz="2200" dirty="0" err="1"/>
+              <a:t>fcc</a:t>
+            </a:r>
+            <a:r>
+              <a:rPr lang="en-US" sz="2200" dirty="0"/>
+              <a:t> metal systems void swelling typically begins at ~0.35Tm, goes through a maximum value, and decreases to nil swelling by ~0.55Tm</a:t>
+            </a:r>
+          </a:p>
+          <a:p>
+            <a:r>
+              <a:rPr lang="en-US" sz="2200" dirty="0"/>
+              <a:t>The voids in </a:t>
+            </a:r>
+            <a:r>
+              <a:rPr lang="en-US" sz="2200" dirty="0" err="1"/>
               <a:t>SiC</a:t>
             </a:r>
             <a:r>
-              <a:rPr lang="en-US" sz="2000" dirty="0"/>
-              <a:t> microstructure is described as black spot defects, which are most likely clusters of self-interstitial atoms</a:t>
-            </a:r>
-          </a:p>
-          <a:p>
-            <a:r>
-              <a:rPr lang="en-US" sz="2000" dirty="0"/>
-              <a:t>For irradiation temperatures less than about 423 K, accumulation of strain due to the irradiation-produced defects can exceed a critical level above which the crystal becomes amorphous</a:t>
-            </a:r>
-          </a:p>
-          <a:p>
-            <a:r>
-              <a:rPr lang="en-US" sz="2000" dirty="0"/>
-              <a:t>The swelling under self-ion irradiation increases logarithmically with dose until amorphization occurs</a:t>
-            </a:r>
-          </a:p>
-          <a:p>
-            <a:r>
-              <a:rPr lang="en-US" sz="2000" dirty="0"/>
-              <a:t>The swelling of neutron- and ion-amorphized </a:t>
-            </a:r>
-            <a:r>
-              <a:rPr lang="en-US" sz="2000" dirty="0" err="1"/>
+              <a:rPr lang="en-US" sz="2200" dirty="0"/>
+              <a:t> are continuing to grow in </a:t>
+            </a:r>
+            <a:r>
+              <a:rPr lang="en-US" sz="2200" dirty="0" err="1"/>
               <a:t>SiC</a:t>
             </a:r>
             <a:r>
-              <a:rPr lang="en-US" sz="2000" dirty="0"/>
-              <a:t> has been reported to be as high as 10.8% at 343K</a:t>
-            </a:r>
-          </a:p>
-          <a:p>
-            <a:endParaRPr lang="en-US" sz="2000" dirty="0"/>
+              <a:rPr lang="en-US" sz="2200" dirty="0"/>
+              <a:t> irradiated to 1773 K, thus the energies for diffusion of either the Si or C vacancy or both must be quite high</a:t>
+            </a:r>
+          </a:p>
+          <a:p>
+            <a:r>
+              <a:rPr lang="en-US" sz="2200" dirty="0"/>
+              <a:t>This has been confirmed through DFT methods</a:t>
+            </a:r>
+          </a:p>
+          <a:p>
+            <a:r>
+              <a:rPr lang="en-US" sz="2200" dirty="0"/>
+              <a:t>It is unclear how swelling will increase as a function of dose above 10 dpa</a:t>
+            </a:r>
+          </a:p>
+          <a:p>
+            <a:endParaRPr lang="en-US" sz="2200" dirty="0"/>
+          </a:p>
+          <a:p>
+            <a:endParaRPr lang="en-US" sz="2200" dirty="0"/>
+          </a:p>
+          <a:p>
+            <a:endParaRPr lang="en-US" sz="2200" dirty="0"/>
+          </a:p>
+          <a:p>
+            <a:endParaRPr lang="en-US" sz="2200" dirty="0"/>
+          </a:p>
+          <a:p>
+            <a:endParaRPr lang="en-US" sz="2200" dirty="0"/>
           </a:p>
         </p:txBody>
       </p:sp>
       <p:pic>
         <p:nvPicPr>
-          <p:cNvPr id="5" name="Content Placeholder 4">
+          <p:cNvPr id="5" name="Content Placeholder 4" descr="Combined swelling for SiC with irradiation temperature and dose">
             <a:extLst>
               <a:ext uri="{FF2B5EF4-FFF2-40B4-BE49-F238E27FC236}">
-                <a16:creationId xmlns:a16="http://schemas.microsoft.com/office/drawing/2014/main" id="{24C70F64-58F7-E242-AB90-A542BD2FDA5F}"/>
+                <a16:creationId xmlns:a16="http://schemas.microsoft.com/office/drawing/2014/main" id="{0E289562-8E23-8646-9690-FD01D359C181}"/>
               </a:ext>
             </a:extLst>
           </p:cNvPr>
@@ -8847,8 +7550,8 @@
         </p:blipFill>
         <p:spPr>
           <a:xfrm>
-            <a:off x="7032572" y="1968500"/>
-            <a:ext cx="4723848" cy="4157663"/>
+            <a:off x="6536451" y="1968500"/>
+            <a:ext cx="4707097" cy="4157663"/>
           </a:xfrm>
           <a:prstGeom prst="rect">
             <a:avLst/>
@@ -8860,7 +7563,7 @@
           <p:cNvPr id="4" name="Slide Number Placeholder 3">
             <a:extLst>
               <a:ext uri="{FF2B5EF4-FFF2-40B4-BE49-F238E27FC236}">
-                <a16:creationId xmlns:a16="http://schemas.microsoft.com/office/drawing/2014/main" id="{EEF4DE5D-0656-2E45-B4C7-692BA49F0600}"/>
+                <a16:creationId xmlns:a16="http://schemas.microsoft.com/office/drawing/2014/main" id="{1D24B6BE-B35F-E044-B8DC-C2678633E4A3}"/>
               </a:ext>
             </a:extLst>
           </p:cNvPr>
@@ -8893,7 +7596,7 @@
     </p:spTree>
     <p:extLst>
       <p:ext uri="{BB962C8B-B14F-4D97-AF65-F5344CB8AC3E}">
-        <p14:creationId xmlns:p14="http://schemas.microsoft.com/office/powerpoint/2010/main" val="3778392511"/>
+        <p14:creationId xmlns:p14="http://schemas.microsoft.com/office/powerpoint/2010/main" val="3503524009"/>
       </p:ext>
     </p:extLst>
   </p:cSld>
@@ -8925,7 +7628,7 @@
           <p:cNvPr id="2" name="Title 1">
             <a:extLst>
               <a:ext uri="{FF2B5EF4-FFF2-40B4-BE49-F238E27FC236}">
-                <a16:creationId xmlns:a16="http://schemas.microsoft.com/office/drawing/2014/main" id="{80D03049-4B0D-0947-9A8D-33B38D2E0C3B}"/>
+                <a16:creationId xmlns:a16="http://schemas.microsoft.com/office/drawing/2014/main" id="{BAB7FA9A-E401-F253-8DF3-5762FE1AF53C}"/>
               </a:ext>
             </a:extLst>
           </p:cNvPr>
@@ -8943,13 +7646,16 @@
           <a:p>
             <a:r>
               <a:rPr lang="en-US" dirty="0"/>
-              <a:t>Low-Med T Radiation Effects in </a:t>
+              <a:t>Recap of </a:t>
             </a:r>
             <a:r>
               <a:rPr lang="en-US" dirty="0" err="1"/>
               <a:t>SiC</a:t>
             </a:r>
-            <a:endParaRPr lang="en-US" dirty="0"/>
+            <a:r>
+              <a:rPr lang="en-US" dirty="0"/>
+              <a:t> Irradiation Defects</a:t>
+            </a:r>
           </a:p>
         </p:txBody>
       </p:sp>
@@ -8958,7 +7664,7 @@
           <p:cNvPr id="3" name="Content Placeholder 2">
             <a:extLst>
               <a:ext uri="{FF2B5EF4-FFF2-40B4-BE49-F238E27FC236}">
-                <a16:creationId xmlns:a16="http://schemas.microsoft.com/office/drawing/2014/main" id="{3A775B20-5E00-B145-9346-A0CC7F4F2B14}"/>
+                <a16:creationId xmlns:a16="http://schemas.microsoft.com/office/drawing/2014/main" id="{833824CF-753B-70CB-5C02-C7939F761D1A}"/>
               </a:ext>
             </a:extLst>
           </p:cNvPr>
@@ -8971,8 +7677,8 @@
         </p:nvSpPr>
         <p:spPr>
           <a:xfrm>
-            <a:off x="609600" y="1968503"/>
-            <a:ext cx="5918476" cy="4157663"/>
+            <a:off x="609599" y="1968503"/>
+            <a:ext cx="8057361" cy="4157663"/>
           </a:xfrm>
         </p:spPr>
         <p:txBody>
@@ -8980,52 +7686,110 @@
           <a:lstStyle/>
           <a:p>
             <a:r>
-              <a:rPr lang="en-US" sz="2000" dirty="0"/>
-              <a:t>Above the critical amorphization temperature (423 K), the swelling increases logarithmically with dose until it reaches saturation</a:t>
-            </a:r>
-          </a:p>
-          <a:p>
-            <a:r>
-              <a:rPr lang="en-US" sz="2000" dirty="0"/>
-              <a:t>The saturation level decreases with increasing irradiation temperature</a:t>
-            </a:r>
-          </a:p>
-          <a:p>
-            <a:r>
-              <a:rPr lang="en-US" sz="2000" dirty="0"/>
-              <a:t>The dose exponents of swelling during the log period are often close to 2/3, in line with assumptions based on interstitial clusters</a:t>
-            </a:r>
-          </a:p>
-          <a:p>
-            <a:r>
-              <a:rPr lang="en-US" sz="2000" dirty="0"/>
-              <a:t>This temperature regime is referred to as the point-defect swelling regime and goes from critical amorphization temperature to about 1273 K</a:t>
-            </a:r>
-          </a:p>
-          <a:p>
-            <a:endParaRPr lang="en-US" sz="2000" dirty="0"/>
-          </a:p>
-          <a:p>
-            <a:endParaRPr lang="en-US" sz="2000" dirty="0"/>
-          </a:p>
-          <a:p>
-            <a:endParaRPr lang="en-US" sz="2000" dirty="0"/>
+              <a:rPr lang="en-US" dirty="0"/>
+              <a:t>below 423 K, </a:t>
+            </a:r>
+            <a:r>
+              <a:rPr lang="en-US" dirty="0" err="1"/>
+              <a:t>SiC</a:t>
+            </a:r>
+            <a:r>
+              <a:rPr lang="en-US" dirty="0"/>
+              <a:t> can amorphize, can have fairly high swelling rates</a:t>
+            </a:r>
+          </a:p>
+          <a:p>
+            <a:r>
+              <a:rPr lang="en-US" dirty="0"/>
+              <a:t>at 423-1273 K, point defect swelling regime</a:t>
+            </a:r>
+          </a:p>
+          <a:p>
+            <a:pPr lvl="1"/>
+            <a:r>
+              <a:rPr lang="en-US" sz="2400" dirty="0"/>
+              <a:t>black spot defects are the main types of defects</a:t>
+            </a:r>
+          </a:p>
+          <a:p>
+            <a:pPr lvl="1"/>
+            <a:r>
+              <a:rPr lang="en-US" sz="2400" dirty="0"/>
+              <a:t>cause swelling which saturates, the level of which is inversely proportional to T</a:t>
+            </a:r>
+          </a:p>
+          <a:p>
+            <a:r>
+              <a:rPr lang="en-US" dirty="0"/>
+              <a:t>above 1273 K, we get Frank loops and voids</a:t>
+            </a:r>
+          </a:p>
+          <a:p>
+            <a:pPr lvl="1"/>
+            <a:r>
+              <a:rPr lang="en-US" sz="2400" dirty="0"/>
+              <a:t>void swelling regime</a:t>
+            </a:r>
+          </a:p>
+          <a:p>
+            <a:pPr lvl="1"/>
+            <a:r>
+              <a:rPr lang="en-US" sz="2400" dirty="0"/>
+              <a:t>does not saturate, increases with dose and with T</a:t>
+            </a:r>
+          </a:p>
+        </p:txBody>
+      </p:sp>
+      <p:sp>
+        <p:nvSpPr>
+          <p:cNvPr id="5" name="Slide Number Placeholder 4">
+            <a:extLst>
+              <a:ext uri="{FF2B5EF4-FFF2-40B4-BE49-F238E27FC236}">
+                <a16:creationId xmlns:a16="http://schemas.microsoft.com/office/drawing/2014/main" id="{A1A33A1E-ECD6-ACE4-AAEB-5534F9A5F62F}"/>
+              </a:ext>
+            </a:extLst>
+          </p:cNvPr>
+          <p:cNvSpPr>
+            <a:spLocks noGrp="1"/>
+          </p:cNvSpPr>
+          <p:nvPr>
+            <p:ph type="sldNum" sz="quarter" idx="12"/>
+          </p:nvPr>
+        </p:nvSpPr>
+        <p:spPr/>
+        <p:txBody>
+          <a:bodyPr/>
+          <a:lstStyle/>
+          <a:p>
+            <a:pPr>
+              <a:defRPr/>
+            </a:pPr>
+            <a:fld id="{EC35E9FC-F6D5-0349-BBED-EA7D7A9BC49B}" type="slidenum">
+              <a:rPr lang="en-US" smtClean="0"/>
+              <a:pPr>
+                <a:defRPr/>
+              </a:pPr>
+              <a:t>9</a:t>
+            </a:fld>
+            <a:endParaRPr lang="en-US"/>
           </a:p>
         </p:txBody>
       </p:sp>
       <p:pic>
         <p:nvPicPr>
-          <p:cNvPr id="4" name="Picture 3">
+          <p:cNvPr id="6" name="Content Placeholder 4" descr="Combined swelling for SiC with irradiation temperature and dose">
             <a:extLst>
               <a:ext uri="{FF2B5EF4-FFF2-40B4-BE49-F238E27FC236}">
-                <a16:creationId xmlns:a16="http://schemas.microsoft.com/office/drawing/2014/main" id="{DB3629BA-C39F-114C-A1F4-094B6069E223}"/>
+                <a16:creationId xmlns:a16="http://schemas.microsoft.com/office/drawing/2014/main" id="{9BAAAA74-F8C8-9189-0FD4-B8F4E679ADAF}"/>
               </a:ext>
             </a:extLst>
           </p:cNvPr>
           <p:cNvPicPr>
-            <a:picLocks noChangeAspect="1"/>
+            <a:picLocks noGrp="1" noChangeAspect="1"/>
           </p:cNvPicPr>
-          <p:nvPr/>
+          <p:nvPr>
+            <p:ph sz="half" idx="2"/>
+          </p:nvPr>
         </p:nvPicPr>
         <p:blipFill>
           <a:blip r:embed="rId2" cstate="email">
@@ -9041,148 +7805,20 @@
         </p:blipFill>
         <p:spPr>
           <a:xfrm>
-            <a:off x="7142997" y="4231559"/>
-            <a:ext cx="4123422" cy="2626441"/>
+            <a:off x="8666960" y="3752382"/>
+            <a:ext cx="3112802" cy="2749462"/>
           </a:xfrm>
           <a:prstGeom prst="rect">
             <a:avLst/>
           </a:prstGeom>
         </p:spPr>
       </p:pic>
-      <p:sp>
-        <p:nvSpPr>
-          <p:cNvPr id="6" name="Rectangle 5">
-            <a:extLst>
-              <a:ext uri="{FF2B5EF4-FFF2-40B4-BE49-F238E27FC236}">
-                <a16:creationId xmlns:a16="http://schemas.microsoft.com/office/drawing/2014/main" id="{6D838706-DB0E-234A-B96B-3F1CBD13DE04}"/>
-              </a:ext>
-            </a:extLst>
-          </p:cNvPr>
-          <p:cNvSpPr/>
-          <p:nvPr/>
-        </p:nvSpPr>
-        <p:spPr>
-          <a:xfrm>
-            <a:off x="7400249" y="4317025"/>
-            <a:ext cx="1499600" cy="415498"/>
-          </a:xfrm>
-          <a:prstGeom prst="rect">
-            <a:avLst/>
-          </a:prstGeom>
-          <a:solidFill>
-            <a:schemeClr val="bg1"/>
-          </a:solidFill>
-        </p:spPr>
-        <p:txBody>
-          <a:bodyPr wrap="square">
-            <a:spAutoFit/>
-          </a:bodyPr>
-          <a:lstStyle/>
-          <a:p>
-            <a:pPr algn="ctr"/>
-            <a:r>
-              <a:rPr lang="en-US" sz="700" dirty="0" err="1">
-                <a:latin typeface="Helvetica" pitchFamily="2" charset="0"/>
-              </a:rPr>
-              <a:t>Tirr</a:t>
-            </a:r>
-            <a:r>
-              <a:rPr lang="en-US" sz="700" dirty="0">
-                <a:latin typeface="Helvetica" pitchFamily="2" charset="0"/>
-              </a:rPr>
-              <a:t>=300  C, 6 dpa</a:t>
-            </a:r>
-          </a:p>
-          <a:p>
-            <a:pPr algn="ctr"/>
-            <a:r>
-              <a:rPr lang="en-US" sz="700" dirty="0">
-                <a:latin typeface="Helvetica" pitchFamily="2" charset="0"/>
-              </a:rPr>
-              <a:t>Dot number density  2.2e+24m-3</a:t>
-            </a:r>
-          </a:p>
-          <a:p>
-            <a:pPr algn="ctr"/>
-            <a:r>
-              <a:rPr lang="en-US" sz="700" dirty="0">
-                <a:latin typeface="Helvetica" pitchFamily="2" charset="0"/>
-              </a:rPr>
-              <a:t>Mean dot diameter=1nm</a:t>
-            </a:r>
-          </a:p>
-        </p:txBody>
-      </p:sp>
-      <p:sp>
-        <p:nvSpPr>
-          <p:cNvPr id="7" name="Rectangle 6">
-            <a:extLst>
-              <a:ext uri="{FF2B5EF4-FFF2-40B4-BE49-F238E27FC236}">
-                <a16:creationId xmlns:a16="http://schemas.microsoft.com/office/drawing/2014/main" id="{66BDF0EE-5997-A84F-B89C-BB0B3A75F6ED}"/>
-              </a:ext>
-            </a:extLst>
-          </p:cNvPr>
-          <p:cNvSpPr/>
-          <p:nvPr/>
-        </p:nvSpPr>
-        <p:spPr>
-          <a:xfrm>
-            <a:off x="9355113" y="4317025"/>
-            <a:ext cx="1751649" cy="461665"/>
-          </a:xfrm>
-          <a:prstGeom prst="rect">
-            <a:avLst/>
-          </a:prstGeom>
-          <a:solidFill>
-            <a:schemeClr val="bg1"/>
-          </a:solidFill>
-        </p:spPr>
-        <p:txBody>
-          <a:bodyPr wrap="square">
-            <a:spAutoFit/>
-          </a:bodyPr>
-          <a:lstStyle/>
-          <a:p>
-            <a:pPr algn="ctr"/>
-            <a:r>
-              <a:rPr lang="en-US" sz="800" dirty="0" err="1">
-                <a:latin typeface="Helvetica" pitchFamily="2" charset="0"/>
-              </a:rPr>
-              <a:t>Tirr</a:t>
-            </a:r>
-            <a:r>
-              <a:rPr lang="en-US" sz="800" dirty="0">
-                <a:latin typeface="Helvetica" pitchFamily="2" charset="0"/>
-              </a:rPr>
-              <a:t>= 800  C, 7.7 dpa</a:t>
-            </a:r>
-          </a:p>
-          <a:p>
-            <a:pPr algn="ctr"/>
-            <a:r>
-              <a:rPr lang="en-US" sz="800" dirty="0">
-                <a:latin typeface="Helvetica" pitchFamily="2" charset="0"/>
-              </a:rPr>
-              <a:t>Loop number density  3.3e+23m-3</a:t>
-            </a:r>
-          </a:p>
-          <a:p>
-            <a:pPr algn="ctr"/>
-            <a:r>
-              <a:rPr lang="en-US" sz="800" dirty="0">
-                <a:latin typeface="Helvetica" pitchFamily="2" charset="0"/>
-              </a:rPr>
-              <a:t>Mean loop diameter = 3.0 nm</a:t>
-            </a:r>
-          </a:p>
-        </p:txBody>
-      </p:sp>
       <p:pic>
         <p:nvPicPr>
-          <p:cNvPr id="10" name="Content Placeholder 4">
+          <p:cNvPr id="7" name="Content Placeholder 9" descr="Swelling versus dose at different temperatures">
             <a:extLst>
               <a:ext uri="{FF2B5EF4-FFF2-40B4-BE49-F238E27FC236}">
-                <a16:creationId xmlns:a16="http://schemas.microsoft.com/office/drawing/2014/main" id="{604D0E9E-B234-7346-84D8-32C772AD7616}"/>
+                <a16:creationId xmlns:a16="http://schemas.microsoft.com/office/drawing/2014/main" id="{BF5BD5E9-9CB3-F2C0-3E72-7E16D46981F2}"/>
               </a:ext>
             </a:extLst>
           </p:cNvPr>
@@ -9205,8 +7841,8 @@
         </p:blipFill>
         <p:spPr bwMode="auto">
           <a:xfrm>
-            <a:off x="7616954" y="1703255"/>
-            <a:ext cx="2872605" cy="2528304"/>
+            <a:off x="9005602" y="1026234"/>
+            <a:ext cx="2435518" cy="2780306"/>
           </a:xfrm>
           <a:prstGeom prst="rect">
             <a:avLst/>
@@ -9239,45 +7875,10 @@
           </a:extLst>
         </p:spPr>
       </p:pic>
-      <p:sp>
-        <p:nvSpPr>
-          <p:cNvPr id="11" name="Slide Number Placeholder 10">
-            <a:extLst>
-              <a:ext uri="{FF2B5EF4-FFF2-40B4-BE49-F238E27FC236}">
-                <a16:creationId xmlns:a16="http://schemas.microsoft.com/office/drawing/2014/main" id="{857752AB-4E91-654B-9BEA-04BA868B82CC}"/>
-              </a:ext>
-            </a:extLst>
-          </p:cNvPr>
-          <p:cNvSpPr>
-            <a:spLocks noGrp="1"/>
-          </p:cNvSpPr>
-          <p:nvPr>
-            <p:ph type="sldNum" sz="quarter" idx="12"/>
-          </p:nvPr>
-        </p:nvSpPr>
-        <p:spPr/>
-        <p:txBody>
-          <a:bodyPr/>
-          <a:lstStyle/>
-          <a:p>
-            <a:pPr>
-              <a:defRPr/>
-            </a:pPr>
-            <a:fld id="{EC35E9FC-F6D5-0349-BBED-EA7D7A9BC49B}" type="slidenum">
-              <a:rPr lang="en-US" smtClean="0"/>
-              <a:pPr>
-                <a:defRPr/>
-              </a:pPr>
-              <a:t>9</a:t>
-            </a:fld>
-            <a:endParaRPr lang="en-US"/>
-          </a:p>
-        </p:txBody>
-      </p:sp>
     </p:spTree>
     <p:extLst>
       <p:ext uri="{BB962C8B-B14F-4D97-AF65-F5344CB8AC3E}">
-        <p14:creationId xmlns:p14="http://schemas.microsoft.com/office/powerpoint/2010/main" val="3937104751"/>
+        <p14:creationId xmlns:p14="http://schemas.microsoft.com/office/powerpoint/2010/main" val="1872868109"/>
       </p:ext>
     </p:extLst>
   </p:cSld>
